--- a/Chapter 15 Language models and the Transformer.pptx
+++ b/Chapter 15 Language models and the Transformer.pptx
@@ -316,7 +316,7 @@
                 <a:latin typeface="맑은 고딕" panose="020B0503020000020004" pitchFamily="50" charset="-127"/>
                 <a:ea typeface="맑은 고딕" panose="020B0503020000020004" pitchFamily="50" charset="-127"/>
               </a:rPr>
-              <a:t>2026-09-27</a:t>
+              <a:t>2026-10-07</a:t>
             </a:fld>
             <a:endParaRPr lang="ko-KR" altLang="en-US">
               <a:latin typeface="맑은 고딕" panose="020B0503020000020004" pitchFamily="50" charset="-127"/>
@@ -502,7 +502,7 @@
           <a:p>
             <a:fld id="{43E1C3DD-4A19-441D-907C-380838DB51C4}" type="datetime1">
               <a:rPr lang="ko-KR" altLang="en-US" noProof="0" smtClean="0"/>
-              <a:t>2026-09-27</a:t>
+              <a:t>2026-10-07</a:t>
             </a:fld>
             <a:endParaRPr lang="ko-KR" altLang="en-US" noProof="0"/>
           </a:p>
@@ -1683,7 +1683,7 @@
           <a:p>
             <a:fld id="{990475B5-67CA-4281-BDCA-DA943C3C8EB3}" type="datetime1">
               <a:rPr lang="ko-KR" altLang="en-US" noProof="0" smtClean="0"/>
-              <a:t>2026-09-27</a:t>
+              <a:t>2026-10-07</a:t>
             </a:fld>
             <a:endParaRPr lang="ko-KR" altLang="en-US" noProof="0"/>
           </a:p>
@@ -2337,7 +2337,7 @@
           <a:p>
             <a:fld id="{48A87A34-81AB-432B-8DAE-1953F412C126}" type="datetimeFigureOut">
               <a:rPr lang="en-US" smtClean="0"/>
-              <a:t>9/27/2026</a:t>
+              <a:t>10/7/2026</a:t>
             </a:fld>
             <a:endParaRPr lang="en-US" dirty="0"/>
           </a:p>
@@ -2633,7 +2633,7 @@
           <a:p>
             <a:fld id="{C655C81E-72E7-4D05-94B5-F45B321A525D}" type="datetime1">
               <a:rPr lang="ko-KR" altLang="en-US" noProof="0" smtClean="0"/>
-              <a:t>2026-09-27</a:t>
+              <a:t>2026-10-07</a:t>
             </a:fld>
             <a:endParaRPr lang="ko-KR" altLang="en-US" noProof="0" dirty="0">
               <a:latin typeface="맑은 고딕" panose="020B0503020000020004" pitchFamily="50" charset="-127"/>
@@ -4313,8 +4313,8 @@
         </p:nvSpPr>
         <p:spPr>
           <a:xfrm>
-            <a:off x="7315201" y="2259165"/>
-            <a:ext cx="4019550" cy="4260462"/>
+            <a:off x="7305675" y="2259165"/>
+            <a:ext cx="4561955" cy="1998304"/>
           </a:xfrm>
           <a:prstGeom prst="rect">
             <a:avLst/>
@@ -4333,36 +4333,19 @@
           </a:bodyPr>
           <a:lstStyle/>
           <a:p>
-            <a:pPr marL="285750" indent="-285750">
-              <a:lnSpc>
-                <a:spcPct val="150000"/>
-              </a:lnSpc>
-              <a:buFont typeface="Wingdings" panose="05000000000000000000" pitchFamily="2" charset="2"/>
-              <a:buChar char="v"/>
-            </a:pPr>
-            <a:r>
-              <a:rPr lang="en-US" altLang="ko-KR" sz="1400" b="0" i="0" dirty="0">
-                <a:effectLst/>
-                <a:latin typeface="D2Coding" panose="020B0609020101020101" pitchFamily="49" charset="-127"/>
-                <a:ea typeface="D2Coding" panose="020B0609020101020101" pitchFamily="49" charset="-127"/>
-              </a:rPr>
-              <a:t>Sequence-to-sequence learning: </a:t>
-            </a:r>
-          </a:p>
-          <a:p>
             <a:pPr>
               <a:lnSpc>
                 <a:spcPct val="150000"/>
               </a:lnSpc>
             </a:pPr>
             <a:r>
-              <a:rPr lang="en-US" altLang="ko-KR" sz="1400" dirty="0">
+              <a:rPr lang="en-US" altLang="ko-KR" sz="1400" b="1" dirty="0">
                 <a:latin typeface="D2Coding" panose="020B0609020101020101" pitchFamily="49" charset="-127"/>
                 <a:ea typeface="D2Coding" panose="020B0609020101020101" pitchFamily="49" charset="-127"/>
               </a:rPr>
               <a:t>[Training Phase]</a:t>
             </a:r>
-            <a:endParaRPr lang="en-US" altLang="ko-KR" sz="1400" b="0" i="0" dirty="0">
+            <a:endParaRPr lang="en-US" altLang="ko-KR" sz="1400" b="1" i="0" dirty="0">
               <a:effectLst/>
               <a:latin typeface="D2Coding" panose="020B0609020101020101" pitchFamily="49" charset="-127"/>
               <a:ea typeface="D2Coding" panose="020B0609020101020101" pitchFamily="49" charset="-127"/>
@@ -4402,20 +4385,41 @@
               <a:t>The decoder looks at the target sequence so far and predicts the target sequence offset by one step in the future. </a:t>
             </a:r>
           </a:p>
-          <a:p>
-            <a:pPr marL="285750" indent="-285750">
-              <a:lnSpc>
-                <a:spcPct val="150000"/>
-              </a:lnSpc>
-              <a:buFont typeface="Wingdings" panose="05000000000000000000" pitchFamily="2" charset="2"/>
-              <a:buChar char="§"/>
-            </a:pPr>
-            <a:endParaRPr lang="en-US" altLang="ko-KR" sz="1400" b="0" i="0" dirty="0">
-              <a:effectLst/>
-              <a:latin typeface="D2Coding" panose="020B0609020101020101" pitchFamily="49" charset="-127"/>
-              <a:ea typeface="D2Coding" panose="020B0609020101020101" pitchFamily="49" charset="-127"/>
-            </a:endParaRPr>
-          </a:p>
+        </p:txBody>
+      </p:sp>
+      <p:sp>
+        <p:nvSpPr>
+          <p:cNvPr id="4" name="TextBox 3">
+            <a:extLst>
+              <a:ext uri="{FF2B5EF4-FFF2-40B4-BE49-F238E27FC236}">
+                <a16:creationId xmlns:a16="http://schemas.microsoft.com/office/drawing/2014/main" id="{813AD9EA-7F1B-4038-2A80-719D974524DF}"/>
+              </a:ext>
+            </a:extLst>
+          </p:cNvPr>
+          <p:cNvSpPr txBox="1"/>
+          <p:nvPr/>
+        </p:nvSpPr>
+        <p:spPr>
+          <a:xfrm>
+            <a:off x="7305675" y="4491207"/>
+            <a:ext cx="4561955" cy="1028808"/>
+          </a:xfrm>
+          <a:prstGeom prst="rect">
+            <a:avLst/>
+          </a:prstGeom>
+          <a:noFill/>
+          <a:ln>
+            <a:solidFill>
+              <a:schemeClr val="tx1"/>
+            </a:solidFill>
+            <a:prstDash val="dash"/>
+          </a:ln>
+        </p:spPr>
+        <p:txBody>
+          <a:bodyPr wrap="square">
+            <a:spAutoFit/>
+          </a:bodyPr>
+          <a:lstStyle/>
           <a:p>
             <a:pPr>
               <a:lnSpc>
@@ -4423,7 +4427,7 @@
               </a:lnSpc>
             </a:pPr>
             <a:r>
-              <a:rPr lang="en-US" altLang="ko-KR" sz="1400" dirty="0">
+              <a:rPr lang="en-US" altLang="ko-KR" sz="1400" b="1" dirty="0">
                 <a:latin typeface="D2Coding" panose="020B0609020101020101" pitchFamily="49" charset="-127"/>
                 <a:ea typeface="D2Coding" panose="020B0609020101020101" pitchFamily="49" charset="-127"/>
               </a:rPr>
@@ -9127,14 +9131,15 @@
           </p:cNvPr>
           <p:cNvCxnSpPr>
             <a:cxnSpLocks/>
+            <a:stCxn id="18" idx="3"/>
             <a:endCxn id="19" idx="1"/>
           </p:cNvCxnSpPr>
           <p:nvPr/>
         </p:nvCxnSpPr>
         <p:spPr>
-          <a:xfrm flipV="1">
-            <a:off x="5649773" y="4383958"/>
-            <a:ext cx="853651" cy="24578"/>
+          <a:xfrm>
+            <a:off x="5645559" y="4383958"/>
+            <a:ext cx="857865" cy="0"/>
           </a:xfrm>
           <a:prstGeom prst="straightConnector1">
             <a:avLst/>
@@ -13437,6 +13442,102 @@
               <a:latin typeface="D2Coding" panose="020B0609020101020101" pitchFamily="49" charset="-127"/>
               <a:ea typeface="D2Coding" panose="020B0609020101020101" pitchFamily="49" charset="-127"/>
             </a:endParaRPr>
+          </a:p>
+        </p:txBody>
+      </p:sp>
+      <p:sp>
+        <p:nvSpPr>
+          <p:cNvPr id="4" name="직사각형 3">
+            <a:extLst>
+              <a:ext uri="{FF2B5EF4-FFF2-40B4-BE49-F238E27FC236}">
+                <a16:creationId xmlns:a16="http://schemas.microsoft.com/office/drawing/2014/main" id="{C15A4EAB-4BDC-CD4A-9E8F-9C61C8169477}"/>
+              </a:ext>
+            </a:extLst>
+          </p:cNvPr>
+          <p:cNvSpPr/>
+          <p:nvPr/>
+        </p:nvSpPr>
+        <p:spPr>
+          <a:xfrm>
+            <a:off x="475645" y="3286125"/>
+            <a:ext cx="1600286" cy="446814"/>
+          </a:xfrm>
+          <a:prstGeom prst="rect">
+            <a:avLst/>
+          </a:prstGeom>
+          <a:noFill/>
+          <a:ln w="28575"/>
+        </p:spPr>
+        <p:style>
+          <a:lnRef idx="2">
+            <a:schemeClr val="accent1">
+              <a:shade val="15000"/>
+            </a:schemeClr>
+          </a:lnRef>
+          <a:fillRef idx="1">
+            <a:schemeClr val="accent1"/>
+          </a:fillRef>
+          <a:effectRef idx="0">
+            <a:schemeClr val="accent1"/>
+          </a:effectRef>
+          <a:fontRef idx="minor">
+            <a:schemeClr val="lt1"/>
+          </a:fontRef>
+        </p:style>
+        <p:txBody>
+          <a:bodyPr rtlCol="0" anchor="ctr"/>
+          <a:lstStyle/>
+          <a:p>
+            <a:pPr algn="ctr"/>
+            <a:endParaRPr lang="ko-KR" altLang="en-US"/>
+          </a:p>
+        </p:txBody>
+      </p:sp>
+      <p:sp>
+        <p:nvSpPr>
+          <p:cNvPr id="6" name="직사각형 5">
+            <a:extLst>
+              <a:ext uri="{FF2B5EF4-FFF2-40B4-BE49-F238E27FC236}">
+                <a16:creationId xmlns:a16="http://schemas.microsoft.com/office/drawing/2014/main" id="{741A3A89-5C49-71D7-61F0-DCFBBE256077}"/>
+              </a:ext>
+            </a:extLst>
+          </p:cNvPr>
+          <p:cNvSpPr/>
+          <p:nvPr/>
+        </p:nvSpPr>
+        <p:spPr>
+          <a:xfrm>
+            <a:off x="7219345" y="4876212"/>
+            <a:ext cx="1600286" cy="446814"/>
+          </a:xfrm>
+          <a:prstGeom prst="rect">
+            <a:avLst/>
+          </a:prstGeom>
+          <a:noFill/>
+          <a:ln w="28575"/>
+        </p:spPr>
+        <p:style>
+          <a:lnRef idx="2">
+            <a:schemeClr val="accent1">
+              <a:shade val="15000"/>
+            </a:schemeClr>
+          </a:lnRef>
+          <a:fillRef idx="1">
+            <a:schemeClr val="accent1"/>
+          </a:fillRef>
+          <a:effectRef idx="0">
+            <a:schemeClr val="accent1"/>
+          </a:effectRef>
+          <a:fontRef idx="minor">
+            <a:schemeClr val="lt1"/>
+          </a:fontRef>
+        </p:style>
+        <p:txBody>
+          <a:bodyPr rtlCol="0" anchor="ctr"/>
+          <a:lstStyle/>
+          <a:p>
+            <a:pPr algn="ctr"/>
+            <a:endParaRPr lang="ko-KR" altLang="en-US"/>
           </a:p>
         </p:txBody>
       </p:sp>
@@ -39563,8 +39664,8 @@
           </a:p>
         </p:txBody>
       </p:sp>
-      <mc:AlternateContent xmlns:mc="http://schemas.openxmlformats.org/markup-compatibility/2006" xmlns:a14="http://schemas.microsoft.com/office/drawing/2010/main">
-        <mc:Choice Requires="a14">
+      <mc:AlternateContent xmlns:mc="http://schemas.openxmlformats.org/markup-compatibility/2006">
+        <mc:Choice xmlns:a14="http://schemas.microsoft.com/office/drawing/2010/main" Requires="a14">
           <p:sp>
             <p:nvSpPr>
               <p:cNvPr id="6" name="TextBox 5">
@@ -39619,7 +39720,7 @@
                     <a:latin typeface="D2Coding" panose="020B0609020101020101" pitchFamily="49" charset="-127"/>
                     <a:ea typeface="D2Coding" panose="020B0609020101020101" pitchFamily="49" charset="-127"/>
                   </a:rPr>
-                  <a:t>AI(GPT, BERT </a:t>
+                  <a:t>AI(GPT </a:t>
                 </a:r>
                 <a:r>
                   <a:rPr lang="ko-KR" altLang="en-US" dirty="0">
@@ -39798,7 +39899,7 @@
             </p:txBody>
           </p:sp>
         </mc:Choice>
-        <mc:Fallback xmlns="">
+        <mc:Fallback>
           <p:sp>
             <p:nvSpPr>
               <p:cNvPr id="6" name="TextBox 5">
@@ -39824,7 +39925,7 @@
               <a:blipFill>
                 <a:blip r:embed="rId2"/>
                 <a:stretch>
-                  <a:fillRect l="-381" b="-7075"/>
+                  <a:fillRect l="-381" r="-54" b="-7075"/>
                 </a:stretch>
               </a:blipFill>
             </p:spPr>
@@ -40164,6 +40265,110 @@
           </a:p>
         </p:txBody>
       </p:sp>
+      <p:sp>
+        <p:nvSpPr>
+          <p:cNvPr id="4" name="직사각형 3">
+            <a:extLst>
+              <a:ext uri="{FF2B5EF4-FFF2-40B4-BE49-F238E27FC236}">
+                <a16:creationId xmlns:a16="http://schemas.microsoft.com/office/drawing/2014/main" id="{09A973B2-265A-5360-2594-DF8829AAD2E4}"/>
+              </a:ext>
+            </a:extLst>
+          </p:cNvPr>
+          <p:cNvSpPr/>
+          <p:nvPr/>
+        </p:nvSpPr>
+        <p:spPr>
+          <a:xfrm>
+            <a:off x="4044425" y="3954377"/>
+            <a:ext cx="956200" cy="378991"/>
+          </a:xfrm>
+          <a:prstGeom prst="rect">
+            <a:avLst/>
+          </a:prstGeom>
+          <a:noFill/>
+          <a:ln>
+            <a:solidFill>
+              <a:srgbClr val="D24726"/>
+            </a:solidFill>
+          </a:ln>
+        </p:spPr>
+        <p:style>
+          <a:lnRef idx="2">
+            <a:schemeClr val="accent1">
+              <a:shade val="15000"/>
+            </a:schemeClr>
+          </a:lnRef>
+          <a:fillRef idx="1">
+            <a:schemeClr val="accent1"/>
+          </a:fillRef>
+          <a:effectRef idx="0">
+            <a:schemeClr val="accent1"/>
+          </a:effectRef>
+          <a:fontRef idx="minor">
+            <a:schemeClr val="lt1"/>
+          </a:fontRef>
+        </p:style>
+        <p:txBody>
+          <a:bodyPr rtlCol="0" anchor="ctr"/>
+          <a:lstStyle/>
+          <a:p>
+            <a:pPr algn="ctr"/>
+            <a:endParaRPr lang="ko-KR" altLang="en-US"/>
+          </a:p>
+        </p:txBody>
+      </p:sp>
+      <p:sp>
+        <p:nvSpPr>
+          <p:cNvPr id="9" name="직사각형 8">
+            <a:extLst>
+              <a:ext uri="{FF2B5EF4-FFF2-40B4-BE49-F238E27FC236}">
+                <a16:creationId xmlns:a16="http://schemas.microsoft.com/office/drawing/2014/main" id="{BC60060B-069F-A724-81B4-997CCACD0BE3}"/>
+              </a:ext>
+            </a:extLst>
+          </p:cNvPr>
+          <p:cNvSpPr/>
+          <p:nvPr/>
+        </p:nvSpPr>
+        <p:spPr>
+          <a:xfrm>
+            <a:off x="5520800" y="4297277"/>
+            <a:ext cx="956200" cy="378991"/>
+          </a:xfrm>
+          <a:prstGeom prst="rect">
+            <a:avLst/>
+          </a:prstGeom>
+          <a:noFill/>
+          <a:ln>
+            <a:solidFill>
+              <a:srgbClr val="D24726"/>
+            </a:solidFill>
+          </a:ln>
+        </p:spPr>
+        <p:style>
+          <a:lnRef idx="2">
+            <a:schemeClr val="accent1">
+              <a:shade val="15000"/>
+            </a:schemeClr>
+          </a:lnRef>
+          <a:fillRef idx="1">
+            <a:schemeClr val="accent1"/>
+          </a:fillRef>
+          <a:effectRef idx="0">
+            <a:schemeClr val="accent1"/>
+          </a:effectRef>
+          <a:fontRef idx="minor">
+            <a:schemeClr val="lt1"/>
+          </a:fontRef>
+        </p:style>
+        <p:txBody>
+          <a:bodyPr rtlCol="0" anchor="ctr"/>
+          <a:lstStyle/>
+          <a:p>
+            <a:pPr algn="ctr"/>
+            <a:endParaRPr lang="ko-KR" altLang="en-US"/>
+          </a:p>
+        </p:txBody>
+      </p:sp>
     </p:spTree>
     <p:extLst>
       <p:ext uri="{BB962C8B-B14F-4D97-AF65-F5344CB8AC3E}">
@@ -41860,7 +42065,7 @@
         <p:spPr>
           <a:xfrm>
             <a:off x="1471051" y="3008054"/>
-            <a:ext cx="8362950" cy="3009157"/>
+            <a:ext cx="8362950" cy="3193823"/>
           </a:xfrm>
           <a:prstGeom prst="rect">
             <a:avLst/>
@@ -41885,36 +42090,12 @@
                 <a:latin typeface="D2Coding" panose="020B0609020101020101" pitchFamily="49" charset="-127"/>
                 <a:ea typeface="D2Coding" panose="020B0609020101020101" pitchFamily="49" charset="-127"/>
               </a:rPr>
-              <a:t>1회차 루프: * 입력: "</a:t>
-            </a:r>
-            <a:r>
-              <a:rPr lang="ko-KR" altLang="en-US" sz="1600" dirty="0" err="1">
-                <a:latin typeface="D2Coding" panose="020B0609020101020101" pitchFamily="49" charset="-127"/>
-                <a:ea typeface="D2Coding" panose="020B0609020101020101" pitchFamily="49" charset="-127"/>
-              </a:rPr>
-              <a:t>To</a:t>
-            </a:r>
-            <a:r>
-              <a:rPr lang="ko-KR" altLang="en-US" sz="1600" dirty="0">
-                <a:latin typeface="D2Coding" panose="020B0609020101020101" pitchFamily="49" charset="-127"/>
-                <a:ea typeface="D2Coding" panose="020B0609020101020101" pitchFamily="49" charset="-127"/>
-              </a:rPr>
-              <a:t>" + (</a:t>
-            </a:r>
-            <a:r>
-              <a:rPr lang="ko-KR" altLang="en-US" sz="1600" dirty="0" err="1">
-                <a:latin typeface="D2Coding" panose="020B0609020101020101" pitchFamily="49" charset="-127"/>
-                <a:ea typeface="D2Coding" panose="020B0609020101020101" pitchFamily="49" charset="-127"/>
-              </a:rPr>
-              <a:t>비어있는</a:t>
-            </a:r>
-            <a:r>
-              <a:rPr lang="ko-KR" altLang="en-US" sz="1600" dirty="0">
-                <a:latin typeface="D2Coding" panose="020B0609020101020101" pitchFamily="49" charset="-127"/>
-                <a:ea typeface="D2Coding" panose="020B0609020101020101" pitchFamily="49" charset="-127"/>
-              </a:rPr>
-              <a:t> 초기 상태)</a:t>
-            </a:r>
+              <a:t>1회차 루프: </a:t>
+            </a:r>
+            <a:endParaRPr lang="en-US" altLang="ko-KR" sz="1600" dirty="0">
+              <a:latin typeface="D2Coding" panose="020B0609020101020101" pitchFamily="49" charset="-127"/>
+              <a:ea typeface="D2Coding" panose="020B0609020101020101" pitchFamily="49" charset="-127"/>
+            </a:endParaRPr>
           </a:p>
           <a:p>
             <a:pPr marL="742950" lvl="1" indent="-285750">
@@ -41925,40 +42106,113 @@
               <a:buChar char="v"/>
             </a:pPr>
             <a:r>
-              <a:rPr lang="ko-KR" altLang="en-US" sz="1600" dirty="0">
-                <a:latin typeface="D2Coding" panose="020B0609020101020101" pitchFamily="49" charset="-127"/>
-                <a:ea typeface="D2Coding" panose="020B0609020101020101" pitchFamily="49" charset="-127"/>
-              </a:rPr>
-              <a:t>출력: " </a:t>
-            </a:r>
-            <a:r>
-              <a:rPr lang="ko-KR" altLang="en-US" sz="1600" dirty="0" err="1">
+              <a:rPr lang="ko-KR" altLang="en-US" sz="1400" dirty="0">
+                <a:latin typeface="D2Coding" panose="020B0609020101020101" pitchFamily="49" charset="-127"/>
+                <a:ea typeface="D2Coding" panose="020B0609020101020101" pitchFamily="49" charset="-127"/>
+              </a:rPr>
+              <a:t>입력: "</a:t>
+            </a:r>
+            <a:r>
+              <a:rPr lang="ko-KR" altLang="en-US" sz="1400" dirty="0" err="1">
+                <a:latin typeface="D2Coding" panose="020B0609020101020101" pitchFamily="49" charset="-127"/>
+                <a:ea typeface="D2Coding" panose="020B0609020101020101" pitchFamily="49" charset="-127"/>
+              </a:rPr>
+              <a:t>To</a:t>
+            </a:r>
+            <a:r>
+              <a:rPr lang="ko-KR" altLang="en-US" sz="1400" dirty="0">
+                <a:latin typeface="D2Coding" panose="020B0609020101020101" pitchFamily="49" charset="-127"/>
+                <a:ea typeface="D2Coding" panose="020B0609020101020101" pitchFamily="49" charset="-127"/>
+              </a:rPr>
+              <a:t>" + (</a:t>
+            </a:r>
+            <a:r>
+              <a:rPr lang="ko-KR" altLang="en-US" sz="1400" dirty="0" err="1">
+                <a:latin typeface="D2Coding" panose="020B0609020101020101" pitchFamily="49" charset="-127"/>
+                <a:ea typeface="D2Coding" panose="020B0609020101020101" pitchFamily="49" charset="-127"/>
+              </a:rPr>
+              <a:t>비어있는</a:t>
+            </a:r>
+            <a:r>
+              <a:rPr lang="ko-KR" altLang="en-US" sz="1400" dirty="0">
+                <a:latin typeface="D2Coding" panose="020B0609020101020101" pitchFamily="49" charset="-127"/>
+                <a:ea typeface="D2Coding" panose="020B0609020101020101" pitchFamily="49" charset="-127"/>
+              </a:rPr>
+              <a:t> 초기 상태)</a:t>
+            </a:r>
+          </a:p>
+          <a:p>
+            <a:pPr marL="742950" lvl="1" indent="-285750">
+              <a:lnSpc>
+                <a:spcPct val="150000"/>
+              </a:lnSpc>
+              <a:buFont typeface="Wingdings" panose="05000000000000000000" pitchFamily="2" charset="2"/>
+              <a:buChar char="v"/>
+            </a:pPr>
+            <a:r>
+              <a:rPr lang="ko-KR" altLang="en-US" sz="1400" dirty="0">
+                <a:latin typeface="D2Coding" panose="020B0609020101020101" pitchFamily="49" charset="-127"/>
+                <a:ea typeface="D2Coding" panose="020B0609020101020101" pitchFamily="49" charset="-127"/>
+              </a:rPr>
+              <a:t>출력: </a:t>
+            </a:r>
+            <a:r>
+              <a:rPr lang="ko-KR" altLang="en-US" sz="1400" dirty="0">
+                <a:solidFill>
+                  <a:srgbClr val="FF0000"/>
+                </a:solidFill>
+                <a:latin typeface="D2Coding" panose="020B0609020101020101" pitchFamily="49" charset="-127"/>
+                <a:ea typeface="D2Coding" panose="020B0609020101020101" pitchFamily="49" charset="-127"/>
+              </a:rPr>
+              <a:t>" </a:t>
+            </a:r>
+            <a:r>
+              <a:rPr lang="ko-KR" altLang="en-US" sz="1400" dirty="0" err="1">
+                <a:solidFill>
+                  <a:srgbClr val="FF0000"/>
+                </a:solidFill>
                 <a:latin typeface="D2Coding" panose="020B0609020101020101" pitchFamily="49" charset="-127"/>
                 <a:ea typeface="D2Coding" panose="020B0609020101020101" pitchFamily="49" charset="-127"/>
               </a:rPr>
               <a:t>be</a:t>
             </a:r>
             <a:r>
-              <a:rPr lang="ko-KR" altLang="en-US" sz="1600" dirty="0">
+              <a:rPr lang="ko-KR" altLang="en-US" sz="1400" dirty="0">
+                <a:solidFill>
+                  <a:srgbClr val="FF0000"/>
+                </a:solidFill>
                 <a:latin typeface="D2Coding" panose="020B0609020101020101" pitchFamily="49" charset="-127"/>
                 <a:ea typeface="D2Coding" panose="020B0609020101020101" pitchFamily="49" charset="-127"/>
               </a:rPr>
               <a:t>" + [기억 상태 </a:t>
             </a:r>
             <a:r>
-              <a:rPr lang="ko-KR" altLang="en-US" sz="1600" dirty="0" err="1">
+              <a:rPr lang="ko-KR" altLang="en-US" sz="1400" dirty="0" err="1">
+                <a:solidFill>
+                  <a:srgbClr val="FF0000"/>
+                </a:solidFill>
                 <a:latin typeface="D2Coding" panose="020B0609020101020101" pitchFamily="49" charset="-127"/>
                 <a:ea typeface="D2Coding" panose="020B0609020101020101" pitchFamily="49" charset="-127"/>
               </a:rPr>
               <a:t>A</a:t>
             </a:r>
             <a:r>
-              <a:rPr lang="ko-KR" altLang="en-US" sz="1600" dirty="0">
+              <a:rPr lang="ko-KR" altLang="en-US" sz="1400" dirty="0">
+                <a:solidFill>
+                  <a:srgbClr val="FF0000"/>
+                </a:solidFill>
                 <a:latin typeface="D2Coding" panose="020B0609020101020101" pitchFamily="49" charset="-127"/>
                 <a:ea typeface="D2Coding" panose="020B0609020101020101" pitchFamily="49" charset="-127"/>
               </a:rPr>
               <a:t>]</a:t>
             </a:r>
+            <a:endParaRPr lang="ko-KR" altLang="en-US" sz="1600" dirty="0">
+              <a:solidFill>
+                <a:srgbClr val="FF0000"/>
+              </a:solidFill>
+              <a:latin typeface="D2Coding" panose="020B0609020101020101" pitchFamily="49" charset="-127"/>
+              <a:ea typeface="D2Coding" panose="020B0609020101020101" pitchFamily="49" charset="-127"/>
+            </a:endParaRPr>
           </a:p>
           <a:p>
             <a:pPr marL="285750" indent="-285750">
@@ -41985,39 +42239,68 @@
               <a:buChar char="v"/>
             </a:pPr>
             <a:r>
-              <a:rPr lang="ko-KR" altLang="en-US" sz="1600" dirty="0">
-                <a:latin typeface="D2Coding" panose="020B0609020101020101" pitchFamily="49" charset="-127"/>
-                <a:ea typeface="D2Coding" panose="020B0609020101020101" pitchFamily="49" charset="-127"/>
-              </a:rPr>
-              <a:t>입력: " </a:t>
-            </a:r>
-            <a:r>
-              <a:rPr lang="ko-KR" altLang="en-US" sz="1600" dirty="0" err="1">
+              <a:rPr lang="ko-KR" altLang="en-US" sz="1400" dirty="0">
+                <a:latin typeface="D2Coding" panose="020B0609020101020101" pitchFamily="49" charset="-127"/>
+                <a:ea typeface="D2Coding" panose="020B0609020101020101" pitchFamily="49" charset="-127"/>
+              </a:rPr>
+              <a:t>입력: </a:t>
+            </a:r>
+            <a:r>
+              <a:rPr lang="ko-KR" altLang="en-US" sz="1400" dirty="0">
+                <a:solidFill>
+                  <a:srgbClr val="FF0000"/>
+                </a:solidFill>
+                <a:latin typeface="D2Coding" panose="020B0609020101020101" pitchFamily="49" charset="-127"/>
+                <a:ea typeface="D2Coding" panose="020B0609020101020101" pitchFamily="49" charset="-127"/>
+              </a:rPr>
+              <a:t>" </a:t>
+            </a:r>
+            <a:r>
+              <a:rPr lang="ko-KR" altLang="en-US" sz="1400" dirty="0" err="1">
+                <a:solidFill>
+                  <a:srgbClr val="FF0000"/>
+                </a:solidFill>
                 <a:latin typeface="D2Coding" panose="020B0609020101020101" pitchFamily="49" charset="-127"/>
                 <a:ea typeface="D2Coding" panose="020B0609020101020101" pitchFamily="49" charset="-127"/>
               </a:rPr>
               <a:t>be</a:t>
             </a:r>
             <a:r>
-              <a:rPr lang="ko-KR" altLang="en-US" sz="1600" dirty="0">
+              <a:rPr lang="ko-KR" altLang="en-US" sz="1400" dirty="0">
+                <a:solidFill>
+                  <a:srgbClr val="FF0000"/>
+                </a:solidFill>
                 <a:latin typeface="D2Coding" panose="020B0609020101020101" pitchFamily="49" charset="-127"/>
                 <a:ea typeface="D2Coding" panose="020B0609020101020101" pitchFamily="49" charset="-127"/>
               </a:rPr>
               <a:t>" + [기억 상태 </a:t>
             </a:r>
             <a:r>
-              <a:rPr lang="ko-KR" altLang="en-US" sz="1600" dirty="0" err="1">
+              <a:rPr lang="ko-KR" altLang="en-US" sz="1400" dirty="0" err="1">
+                <a:solidFill>
+                  <a:srgbClr val="FF0000"/>
+                </a:solidFill>
                 <a:latin typeface="D2Coding" panose="020B0609020101020101" pitchFamily="49" charset="-127"/>
                 <a:ea typeface="D2Coding" panose="020B0609020101020101" pitchFamily="49" charset="-127"/>
               </a:rPr>
               <a:t>A</a:t>
             </a:r>
             <a:r>
-              <a:rPr lang="ko-KR" altLang="en-US" sz="1600" dirty="0">
-                <a:latin typeface="D2Coding" panose="020B0609020101020101" pitchFamily="49" charset="-127"/>
-                <a:ea typeface="D2Coding" panose="020B0609020101020101" pitchFamily="49" charset="-127"/>
-              </a:rPr>
-              <a:t>] (처음부터 다시 읽지 않고, 이어서 읽는 효과)</a:t>
+              <a:rPr lang="ko-KR" altLang="en-US" sz="1400" dirty="0">
+                <a:solidFill>
+                  <a:srgbClr val="FF0000"/>
+                </a:solidFill>
+                <a:latin typeface="D2Coding" panose="020B0609020101020101" pitchFamily="49" charset="-127"/>
+                <a:ea typeface="D2Coding" panose="020B0609020101020101" pitchFamily="49" charset="-127"/>
+              </a:rPr>
+              <a:t>]</a:t>
+            </a:r>
+            <a:r>
+              <a:rPr lang="ko-KR" altLang="en-US" sz="1400" dirty="0">
+                <a:latin typeface="D2Coding" panose="020B0609020101020101" pitchFamily="49" charset="-127"/>
+                <a:ea typeface="D2Coding" panose="020B0609020101020101" pitchFamily="49" charset="-127"/>
+              </a:rPr>
+              <a:t> (처음부터 다시 읽지 않고, 이어서 읽는 효과)</a:t>
             </a:r>
           </a:p>
           <a:p>
@@ -42029,40 +42312,69 @@
               <a:buChar char="v"/>
             </a:pPr>
             <a:r>
-              <a:rPr lang="ko-KR" altLang="en-US" sz="1600" dirty="0">
-                <a:latin typeface="D2Coding" panose="020B0609020101020101" pitchFamily="49" charset="-127"/>
-                <a:ea typeface="D2Coding" panose="020B0609020101020101" pitchFamily="49" charset="-127"/>
-              </a:rPr>
-              <a:t>출력: " </a:t>
-            </a:r>
-            <a:r>
-              <a:rPr lang="ko-KR" altLang="en-US" sz="1600" dirty="0" err="1">
+              <a:rPr lang="ko-KR" altLang="en-US" sz="1400" dirty="0">
+                <a:latin typeface="D2Coding" panose="020B0609020101020101" pitchFamily="49" charset="-127"/>
+                <a:ea typeface="D2Coding" panose="020B0609020101020101" pitchFamily="49" charset="-127"/>
+              </a:rPr>
+              <a:t>출력: </a:t>
+            </a:r>
+            <a:r>
+              <a:rPr lang="ko-KR" altLang="en-US" sz="1400" dirty="0">
+                <a:solidFill>
+                  <a:schemeClr val="accent5"/>
+                </a:solidFill>
+                <a:latin typeface="D2Coding" panose="020B0609020101020101" pitchFamily="49" charset="-127"/>
+                <a:ea typeface="D2Coding" panose="020B0609020101020101" pitchFamily="49" charset="-127"/>
+              </a:rPr>
+              <a:t>" </a:t>
+            </a:r>
+            <a:r>
+              <a:rPr lang="ko-KR" altLang="en-US" sz="1400" dirty="0" err="1">
+                <a:solidFill>
+                  <a:schemeClr val="accent5"/>
+                </a:solidFill>
                 <a:latin typeface="D2Coding" panose="020B0609020101020101" pitchFamily="49" charset="-127"/>
                 <a:ea typeface="D2Coding" panose="020B0609020101020101" pitchFamily="49" charset="-127"/>
               </a:rPr>
               <a:t>or</a:t>
             </a:r>
             <a:r>
-              <a:rPr lang="ko-KR" altLang="en-US" sz="1600" dirty="0">
+              <a:rPr lang="ko-KR" altLang="en-US" sz="1400" dirty="0">
+                <a:solidFill>
+                  <a:schemeClr val="accent5"/>
+                </a:solidFill>
                 <a:latin typeface="D2Coding" panose="020B0609020101020101" pitchFamily="49" charset="-127"/>
                 <a:ea typeface="D2Coding" panose="020B0609020101020101" pitchFamily="49" charset="-127"/>
               </a:rPr>
               <a:t>" + [기억 상태 </a:t>
             </a:r>
             <a:r>
-              <a:rPr lang="ko-KR" altLang="en-US" sz="1600" dirty="0" err="1">
+              <a:rPr lang="ko-KR" altLang="en-US" sz="1400" dirty="0" err="1">
+                <a:solidFill>
+                  <a:schemeClr val="accent5"/>
+                </a:solidFill>
                 <a:latin typeface="D2Coding" panose="020B0609020101020101" pitchFamily="49" charset="-127"/>
                 <a:ea typeface="D2Coding" panose="020B0609020101020101" pitchFamily="49" charset="-127"/>
               </a:rPr>
               <a:t>B</a:t>
             </a:r>
             <a:r>
-              <a:rPr lang="ko-KR" altLang="en-US" sz="1600" dirty="0">
+              <a:rPr lang="ko-KR" altLang="en-US" sz="1400" dirty="0">
+                <a:solidFill>
+                  <a:schemeClr val="accent5"/>
+                </a:solidFill>
                 <a:latin typeface="D2Coding" panose="020B0609020101020101" pitchFamily="49" charset="-127"/>
                 <a:ea typeface="D2Coding" panose="020B0609020101020101" pitchFamily="49" charset="-127"/>
               </a:rPr>
               <a:t>]</a:t>
             </a:r>
+            <a:endParaRPr lang="ko-KR" altLang="en-US" sz="1600" dirty="0">
+              <a:solidFill>
+                <a:schemeClr val="accent5"/>
+              </a:solidFill>
+              <a:latin typeface="D2Coding" panose="020B0609020101020101" pitchFamily="49" charset="-127"/>
+              <a:ea typeface="D2Coding" panose="020B0609020101020101" pitchFamily="49" charset="-127"/>
+            </a:endParaRPr>
           </a:p>
           <a:p>
             <a:pPr marL="285750" indent="-285750">
@@ -42089,35 +42401,57 @@
               <a:buChar char="v"/>
             </a:pPr>
             <a:r>
-              <a:rPr lang="ko-KR" altLang="en-US" sz="1600" dirty="0">
-                <a:latin typeface="D2Coding" panose="020B0609020101020101" pitchFamily="49" charset="-127"/>
-                <a:ea typeface="D2Coding" panose="020B0609020101020101" pitchFamily="49" charset="-127"/>
-              </a:rPr>
-              <a:t>입력: " </a:t>
-            </a:r>
-            <a:r>
-              <a:rPr lang="ko-KR" altLang="en-US" sz="1600" dirty="0" err="1">
+              <a:rPr lang="ko-KR" altLang="en-US" sz="1400" dirty="0">
+                <a:latin typeface="D2Coding" panose="020B0609020101020101" pitchFamily="49" charset="-127"/>
+                <a:ea typeface="D2Coding" panose="020B0609020101020101" pitchFamily="49" charset="-127"/>
+              </a:rPr>
+              <a:t>입력: </a:t>
+            </a:r>
+            <a:r>
+              <a:rPr lang="ko-KR" altLang="en-US" sz="1400" dirty="0">
+                <a:solidFill>
+                  <a:schemeClr val="accent5"/>
+                </a:solidFill>
+                <a:latin typeface="D2Coding" panose="020B0609020101020101" pitchFamily="49" charset="-127"/>
+                <a:ea typeface="D2Coding" panose="020B0609020101020101" pitchFamily="49" charset="-127"/>
+              </a:rPr>
+              <a:t>" </a:t>
+            </a:r>
+            <a:r>
+              <a:rPr lang="ko-KR" altLang="en-US" sz="1400" dirty="0" err="1">
+                <a:solidFill>
+                  <a:schemeClr val="accent5"/>
+                </a:solidFill>
                 <a:latin typeface="D2Coding" panose="020B0609020101020101" pitchFamily="49" charset="-127"/>
                 <a:ea typeface="D2Coding" panose="020B0609020101020101" pitchFamily="49" charset="-127"/>
               </a:rPr>
               <a:t>or</a:t>
             </a:r>
             <a:r>
-              <a:rPr lang="ko-KR" altLang="en-US" sz="1600" dirty="0">
+              <a:rPr lang="ko-KR" altLang="en-US" sz="1400" dirty="0">
+                <a:solidFill>
+                  <a:schemeClr val="accent5"/>
+                </a:solidFill>
                 <a:latin typeface="D2Coding" panose="020B0609020101020101" pitchFamily="49" charset="-127"/>
                 <a:ea typeface="D2Coding" panose="020B0609020101020101" pitchFamily="49" charset="-127"/>
               </a:rPr>
               <a:t>" + [기억 상태 </a:t>
             </a:r>
             <a:r>
-              <a:rPr lang="ko-KR" altLang="en-US" sz="1600" dirty="0" err="1">
+              <a:rPr lang="ko-KR" altLang="en-US" sz="1400" dirty="0" err="1">
+                <a:solidFill>
+                  <a:schemeClr val="accent5"/>
+                </a:solidFill>
                 <a:latin typeface="D2Coding" panose="020B0609020101020101" pitchFamily="49" charset="-127"/>
                 <a:ea typeface="D2Coding" panose="020B0609020101020101" pitchFamily="49" charset="-127"/>
               </a:rPr>
               <a:t>B</a:t>
             </a:r>
             <a:r>
-              <a:rPr lang="ko-KR" altLang="en-US" sz="1600" dirty="0">
+              <a:rPr lang="ko-KR" altLang="en-US" sz="1400" dirty="0">
+                <a:solidFill>
+                  <a:schemeClr val="accent5"/>
+                </a:solidFill>
                 <a:latin typeface="D2Coding" panose="020B0609020101020101" pitchFamily="49" charset="-127"/>
                 <a:ea typeface="D2Coding" panose="020B0609020101020101" pitchFamily="49" charset="-127"/>
               </a:rPr>
@@ -42133,26 +42467,30 @@
               <a:buChar char="v"/>
             </a:pPr>
             <a:r>
-              <a:rPr lang="ko-KR" altLang="en-US" sz="1600" dirty="0">
+              <a:rPr lang="ko-KR" altLang="en-US" sz="1400" dirty="0">
                 <a:latin typeface="D2Coding" panose="020B0609020101020101" pitchFamily="49" charset="-127"/>
                 <a:ea typeface="D2Coding" panose="020B0609020101020101" pitchFamily="49" charset="-127"/>
               </a:rPr>
               <a:t>출력: " </a:t>
             </a:r>
             <a:r>
-              <a:rPr lang="ko-KR" altLang="en-US" sz="1600" dirty="0" err="1">
+              <a:rPr lang="ko-KR" altLang="en-US" sz="1400" dirty="0" err="1">
                 <a:latin typeface="D2Coding" panose="020B0609020101020101" pitchFamily="49" charset="-127"/>
                 <a:ea typeface="D2Coding" panose="020B0609020101020101" pitchFamily="49" charset="-127"/>
               </a:rPr>
               <a:t>not</a:t>
             </a:r>
             <a:r>
-              <a:rPr lang="ko-KR" altLang="en-US" sz="1600" dirty="0">
+              <a:rPr lang="ko-KR" altLang="en-US" sz="1400" dirty="0">
                 <a:latin typeface="D2Coding" panose="020B0609020101020101" pitchFamily="49" charset="-127"/>
                 <a:ea typeface="D2Coding" panose="020B0609020101020101" pitchFamily="49" charset="-127"/>
               </a:rPr>
               <a:t>" + [기억 상태 C]</a:t>
             </a:r>
+            <a:endParaRPr lang="ko-KR" altLang="en-US" sz="1600" dirty="0">
+              <a:latin typeface="D2Coding" panose="020B0609020101020101" pitchFamily="49" charset="-127"/>
+              <a:ea typeface="D2Coding" panose="020B0609020101020101" pitchFamily="49" charset="-127"/>
+            </a:endParaRPr>
           </a:p>
         </p:txBody>
       </p:sp>

--- a/Chapter 15 Language models and the Transformer.pptx
+++ b/Chapter 15 Language models and the Transformer.pptx
@@ -316,7 +316,7 @@
                 <a:latin typeface="맑은 고딕" panose="020B0503020000020004" pitchFamily="50" charset="-127"/>
                 <a:ea typeface="맑은 고딕" panose="020B0503020000020004" pitchFamily="50" charset="-127"/>
               </a:rPr>
-              <a:t>2026-10-07</a:t>
+              <a:t>2026-10-10</a:t>
             </a:fld>
             <a:endParaRPr lang="ko-KR" altLang="en-US">
               <a:latin typeface="맑은 고딕" panose="020B0503020000020004" pitchFamily="50" charset="-127"/>
@@ -502,7 +502,7 @@
           <a:p>
             <a:fld id="{43E1C3DD-4A19-441D-907C-380838DB51C4}" type="datetime1">
               <a:rPr lang="ko-KR" altLang="en-US" noProof="0" smtClean="0"/>
-              <a:t>2026-10-07</a:t>
+              <a:t>2026-10-10</a:t>
             </a:fld>
             <a:endParaRPr lang="ko-KR" altLang="en-US" noProof="0"/>
           </a:p>
@@ -1683,7 +1683,7 @@
           <a:p>
             <a:fld id="{990475B5-67CA-4281-BDCA-DA943C3C8EB3}" type="datetime1">
               <a:rPr lang="ko-KR" altLang="en-US" noProof="0" smtClean="0"/>
-              <a:t>2026-10-07</a:t>
+              <a:t>2026-10-10</a:t>
             </a:fld>
             <a:endParaRPr lang="ko-KR" altLang="en-US" noProof="0"/>
           </a:p>
@@ -2337,7 +2337,7 @@
           <a:p>
             <a:fld id="{48A87A34-81AB-432B-8DAE-1953F412C126}" type="datetimeFigureOut">
               <a:rPr lang="en-US" smtClean="0"/>
-              <a:t>10/7/2026</a:t>
+              <a:t>10/10/2026</a:t>
             </a:fld>
             <a:endParaRPr lang="en-US" dirty="0"/>
           </a:p>
@@ -2633,7 +2633,7 @@
           <a:p>
             <a:fld id="{C655C81E-72E7-4D05-94B5-F45B321A525D}" type="datetime1">
               <a:rPr lang="ko-KR" altLang="en-US" noProof="0" smtClean="0"/>
-              <a:t>2026-10-07</a:t>
+              <a:t>2026-10-10</a:t>
             </a:fld>
             <a:endParaRPr lang="ko-KR" altLang="en-US" noProof="0" dirty="0">
               <a:latin typeface="맑은 고딕" panose="020B0503020000020004" pitchFamily="50" charset="-127"/>
@@ -8455,7 +8455,7 @@
         </p:nvSpPr>
         <p:spPr>
           <a:xfrm>
-            <a:off x="970319" y="4076700"/>
+            <a:off x="522644" y="4076700"/>
             <a:ext cx="614516" cy="614516"/>
           </a:xfrm>
           <a:prstGeom prst="roundRect">
@@ -8506,7 +8506,7 @@
         </p:nvSpPr>
         <p:spPr>
           <a:xfrm>
-            <a:off x="1985500" y="4076700"/>
+            <a:off x="1537825" y="4076700"/>
             <a:ext cx="614516" cy="614516"/>
           </a:xfrm>
           <a:prstGeom prst="roundRect">
@@ -8557,7 +8557,7 @@
         </p:nvSpPr>
         <p:spPr>
           <a:xfrm>
-            <a:off x="3000681" y="4076700"/>
+            <a:off x="2553006" y="4076700"/>
             <a:ext cx="614516" cy="614516"/>
           </a:xfrm>
           <a:prstGeom prst="roundRect">
@@ -8608,7 +8608,7 @@
         </p:nvSpPr>
         <p:spPr>
           <a:xfrm>
-            <a:off x="4015862" y="4076700"/>
+            <a:off x="3568187" y="4076700"/>
             <a:ext cx="614516" cy="614516"/>
           </a:xfrm>
           <a:prstGeom prst="roundRect">
@@ -8659,7 +8659,7 @@
         </p:nvSpPr>
         <p:spPr>
           <a:xfrm>
-            <a:off x="5031043" y="4076700"/>
+            <a:off x="4583368" y="4076700"/>
             <a:ext cx="614516" cy="614516"/>
           </a:xfrm>
           <a:prstGeom prst="roundRect">
@@ -8710,7 +8710,7 @@
         </p:nvSpPr>
         <p:spPr>
           <a:xfrm>
-            <a:off x="6503424" y="4076700"/>
+            <a:off x="7027299" y="4076700"/>
             <a:ext cx="614516" cy="614516"/>
           </a:xfrm>
           <a:prstGeom prst="roundRect">
@@ -8761,7 +8761,7 @@
         </p:nvSpPr>
         <p:spPr>
           <a:xfrm>
-            <a:off x="7518605" y="4076700"/>
+            <a:off x="8042480" y="4076700"/>
             <a:ext cx="614516" cy="614516"/>
           </a:xfrm>
           <a:prstGeom prst="roundRect">
@@ -8812,7 +8812,7 @@
         </p:nvSpPr>
         <p:spPr>
           <a:xfrm>
-            <a:off x="8533786" y="4076700"/>
+            <a:off x="9057661" y="4076700"/>
             <a:ext cx="614516" cy="614516"/>
           </a:xfrm>
           <a:prstGeom prst="roundRect">
@@ -8863,7 +8863,7 @@
         </p:nvSpPr>
         <p:spPr>
           <a:xfrm>
-            <a:off x="9548967" y="4076700"/>
+            <a:off x="10072842" y="4076700"/>
             <a:ext cx="614516" cy="614516"/>
           </a:xfrm>
           <a:prstGeom prst="roundRect">
@@ -8914,7 +8914,7 @@
         </p:nvSpPr>
         <p:spPr>
           <a:xfrm>
-            <a:off x="10564148" y="4076700"/>
+            <a:off x="11088023" y="4076700"/>
             <a:ext cx="614516" cy="614516"/>
           </a:xfrm>
           <a:prstGeom prst="roundRect">
@@ -8968,7 +8968,7 @@
         </p:nvCxnSpPr>
         <p:spPr>
           <a:xfrm>
-            <a:off x="1584835" y="4383958"/>
+            <a:off x="1137160" y="4383958"/>
             <a:ext cx="400665" cy="0"/>
           </a:xfrm>
           <a:prstGeom prst="straightConnector1">
@@ -9010,7 +9010,7 @@
         </p:nvCxnSpPr>
         <p:spPr>
           <a:xfrm>
-            <a:off x="2607389" y="4408536"/>
+            <a:off x="2159714" y="4408536"/>
             <a:ext cx="400665" cy="0"/>
           </a:xfrm>
           <a:prstGeom prst="straightConnector1">
@@ -9052,7 +9052,7 @@
         </p:nvCxnSpPr>
         <p:spPr>
           <a:xfrm>
-            <a:off x="3621517" y="4408536"/>
+            <a:off x="3173842" y="4408536"/>
             <a:ext cx="400665" cy="0"/>
           </a:xfrm>
           <a:prstGeom prst="straightConnector1">
@@ -9094,7 +9094,7 @@
         </p:nvCxnSpPr>
         <p:spPr>
           <a:xfrm>
-            <a:off x="4635645" y="4408536"/>
+            <a:off x="4187970" y="4408536"/>
             <a:ext cx="400665" cy="0"/>
           </a:xfrm>
           <a:prstGeom prst="straightConnector1">
@@ -9138,8 +9138,8 @@
         </p:nvCxnSpPr>
         <p:spPr>
           <a:xfrm>
-            <a:off x="5645559" y="4383958"/>
-            <a:ext cx="857865" cy="0"/>
+            <a:off x="5197884" y="4383958"/>
+            <a:ext cx="1829415" cy="0"/>
           </a:xfrm>
           <a:prstGeom prst="straightConnector1">
             <a:avLst/>
@@ -9180,7 +9180,7 @@
         </p:nvCxnSpPr>
         <p:spPr>
           <a:xfrm>
-            <a:off x="7121101" y="4408536"/>
+            <a:off x="7644976" y="4408536"/>
             <a:ext cx="400665" cy="0"/>
           </a:xfrm>
           <a:prstGeom prst="straightConnector1">
@@ -9222,7 +9222,7 @@
         </p:nvCxnSpPr>
         <p:spPr>
           <a:xfrm>
-            <a:off x="8135229" y="4408536"/>
+            <a:off x="8659104" y="4408536"/>
             <a:ext cx="400665" cy="0"/>
           </a:xfrm>
           <a:prstGeom prst="straightConnector1">
@@ -9264,7 +9264,7 @@
         </p:nvCxnSpPr>
         <p:spPr>
           <a:xfrm>
-            <a:off x="9149357" y="4408536"/>
+            <a:off x="9673232" y="4408536"/>
             <a:ext cx="400665" cy="0"/>
           </a:xfrm>
           <a:prstGeom prst="straightConnector1">
@@ -9306,7 +9306,7 @@
         </p:nvCxnSpPr>
         <p:spPr>
           <a:xfrm>
-            <a:off x="10163483" y="4408536"/>
+            <a:off x="10687358" y="4408536"/>
             <a:ext cx="400665" cy="0"/>
           </a:xfrm>
           <a:prstGeom prst="straightConnector1">
@@ -9348,7 +9348,7 @@
         </p:nvCxnSpPr>
         <p:spPr>
           <a:xfrm>
-            <a:off x="1277577" y="4677082"/>
+            <a:off x="829902" y="4677082"/>
             <a:ext cx="0" cy="614516"/>
           </a:xfrm>
           <a:prstGeom prst="straightConnector1">
@@ -9393,7 +9393,7 @@
         </p:nvCxnSpPr>
         <p:spPr>
           <a:xfrm>
-            <a:off x="2296752" y="4677082"/>
+            <a:off x="1849077" y="4677082"/>
             <a:ext cx="0" cy="614516"/>
           </a:xfrm>
           <a:prstGeom prst="straightConnector1">
@@ -9438,7 +9438,7 @@
         </p:nvCxnSpPr>
         <p:spPr>
           <a:xfrm>
-            <a:off x="3315927" y="4677082"/>
+            <a:off x="2868252" y="4677082"/>
             <a:ext cx="0" cy="614516"/>
           </a:xfrm>
           <a:prstGeom prst="straightConnector1">
@@ -9483,7 +9483,7 @@
         </p:nvCxnSpPr>
         <p:spPr>
           <a:xfrm>
-            <a:off x="4335102" y="4677082"/>
+            <a:off x="3887427" y="4677082"/>
             <a:ext cx="0" cy="614516"/>
           </a:xfrm>
           <a:prstGeom prst="straightConnector1">
@@ -9528,7 +9528,7 @@
         </p:nvCxnSpPr>
         <p:spPr>
           <a:xfrm>
-            <a:off x="5354277" y="4677082"/>
+            <a:off x="4906602" y="4677082"/>
             <a:ext cx="0" cy="614516"/>
           </a:xfrm>
           <a:prstGeom prst="straightConnector1">
@@ -9573,7 +9573,7 @@
         </p:nvCxnSpPr>
         <p:spPr>
           <a:xfrm>
-            <a:off x="6830652" y="4677082"/>
+            <a:off x="7354527" y="4677082"/>
             <a:ext cx="0" cy="614516"/>
           </a:xfrm>
           <a:prstGeom prst="straightConnector1">
@@ -9618,7 +9618,7 @@
         </p:nvCxnSpPr>
         <p:spPr>
           <a:xfrm>
-            <a:off x="7849827" y="4677082"/>
+            <a:off x="8373702" y="4677082"/>
             <a:ext cx="0" cy="614516"/>
           </a:xfrm>
           <a:prstGeom prst="straightConnector1">
@@ -9663,7 +9663,7 @@
         </p:nvCxnSpPr>
         <p:spPr>
           <a:xfrm>
-            <a:off x="8869002" y="4677082"/>
+            <a:off x="9392877" y="4677082"/>
             <a:ext cx="0" cy="614516"/>
           </a:xfrm>
           <a:prstGeom prst="straightConnector1">
@@ -9708,7 +9708,7 @@
         </p:nvCxnSpPr>
         <p:spPr>
           <a:xfrm>
-            <a:off x="9888177" y="4677082"/>
+            <a:off x="10412052" y="4677082"/>
             <a:ext cx="0" cy="614516"/>
           </a:xfrm>
           <a:prstGeom prst="straightConnector1">
@@ -9753,7 +9753,7 @@
         </p:nvCxnSpPr>
         <p:spPr>
           <a:xfrm>
-            <a:off x="10907352" y="4677082"/>
+            <a:off x="11431227" y="4677082"/>
             <a:ext cx="0" cy="614516"/>
           </a:xfrm>
           <a:prstGeom prst="straightConnector1">
@@ -9798,7 +9798,7 @@
         </p:nvCxnSpPr>
         <p:spPr>
           <a:xfrm>
-            <a:off x="6840177" y="3457882"/>
+            <a:off x="7364052" y="3457882"/>
             <a:ext cx="0" cy="614516"/>
           </a:xfrm>
           <a:prstGeom prst="straightConnector1">
@@ -9843,7 +9843,7 @@
         </p:nvCxnSpPr>
         <p:spPr>
           <a:xfrm>
-            <a:off x="7859352" y="3457882"/>
+            <a:off x="8383227" y="3457882"/>
             <a:ext cx="0" cy="614516"/>
           </a:xfrm>
           <a:prstGeom prst="straightConnector1">
@@ -9888,7 +9888,7 @@
         </p:nvCxnSpPr>
         <p:spPr>
           <a:xfrm>
-            <a:off x="8878527" y="3457882"/>
+            <a:off x="9402402" y="3457882"/>
             <a:ext cx="0" cy="614516"/>
           </a:xfrm>
           <a:prstGeom prst="straightConnector1">
@@ -9933,7 +9933,7 @@
         </p:nvCxnSpPr>
         <p:spPr>
           <a:xfrm>
-            <a:off x="9897702" y="3457882"/>
+            <a:off x="10421577" y="3457882"/>
             <a:ext cx="0" cy="614516"/>
           </a:xfrm>
           <a:prstGeom prst="straightConnector1">
@@ -9978,7 +9978,7 @@
         </p:nvCxnSpPr>
         <p:spPr>
           <a:xfrm>
-            <a:off x="10916877" y="3457882"/>
+            <a:off x="11440752" y="3457882"/>
             <a:ext cx="0" cy="614516"/>
           </a:xfrm>
           <a:prstGeom prst="straightConnector1">
@@ -10021,7 +10021,7 @@
         </p:nvSpPr>
         <p:spPr>
           <a:xfrm>
-            <a:off x="792279" y="3919691"/>
+            <a:off x="344604" y="3919691"/>
             <a:ext cx="5102774" cy="914400"/>
           </a:xfrm>
           <a:prstGeom prst="roundRect">
@@ -10068,7 +10068,7 @@
         </p:nvSpPr>
         <p:spPr>
           <a:xfrm>
-            <a:off x="6239929" y="3919691"/>
+            <a:off x="6763804" y="3919691"/>
             <a:ext cx="5312191" cy="914400"/>
           </a:xfrm>
           <a:prstGeom prst="roundRect">
@@ -10115,7 +10115,7 @@
         </p:nvSpPr>
         <p:spPr>
           <a:xfrm>
-            <a:off x="983574" y="5314051"/>
+            <a:off x="535899" y="5314051"/>
             <a:ext cx="582211" cy="369332"/>
           </a:xfrm>
           <a:prstGeom prst="rect">
@@ -10157,7 +10157,7 @@
         </p:nvSpPr>
         <p:spPr>
           <a:xfrm>
-            <a:off x="2130440" y="5314051"/>
+            <a:off x="1682765" y="5314051"/>
             <a:ext cx="688955" cy="369332"/>
           </a:xfrm>
           <a:prstGeom prst="rect">
@@ -10199,7 +10199,7 @@
         </p:nvSpPr>
         <p:spPr>
           <a:xfrm>
-            <a:off x="3033651" y="5314051"/>
+            <a:off x="2585976" y="5314051"/>
             <a:ext cx="466794" cy="369332"/>
           </a:xfrm>
           <a:prstGeom prst="rect">
@@ -10241,7 +10241,7 @@
         </p:nvSpPr>
         <p:spPr>
           <a:xfrm>
-            <a:off x="3817451" y="5314051"/>
+            <a:off x="3369776" y="5314051"/>
             <a:ext cx="915635" cy="369332"/>
           </a:xfrm>
           <a:prstGeom prst="rect">
@@ -10283,7 +10283,7 @@
         </p:nvSpPr>
         <p:spPr>
           <a:xfrm>
-            <a:off x="5011993" y="5314051"/>
+            <a:off x="4564318" y="5314051"/>
             <a:ext cx="697627" cy="369332"/>
           </a:xfrm>
           <a:prstGeom prst="rect">
@@ -10325,7 +10325,7 @@
         </p:nvSpPr>
         <p:spPr>
           <a:xfrm>
-            <a:off x="10560065" y="3007679"/>
+            <a:off x="11083940" y="3007679"/>
             <a:ext cx="769939" cy="369332"/>
           </a:xfrm>
           <a:prstGeom prst="rect">
@@ -10368,7 +10368,7 @@
         </p:nvSpPr>
         <p:spPr>
           <a:xfrm>
-            <a:off x="9590588" y="3007679"/>
+            <a:off x="10114463" y="3007679"/>
             <a:ext cx="574573" cy="369332"/>
           </a:xfrm>
           <a:prstGeom prst="rect">
@@ -10411,7 +10411,7 @@
         </p:nvSpPr>
         <p:spPr>
           <a:xfrm>
-            <a:off x="8573268" y="3007679"/>
+            <a:off x="9097143" y="3007679"/>
             <a:ext cx="469627" cy="369332"/>
           </a:xfrm>
           <a:prstGeom prst="rect">
@@ -10455,7 +10455,7 @@
         </p:nvSpPr>
         <p:spPr>
           <a:xfrm>
-            <a:off x="7360443" y="3007679"/>
+            <a:off x="7884318" y="3007679"/>
             <a:ext cx="732197" cy="369332"/>
           </a:xfrm>
           <a:prstGeom prst="rect">
@@ -10507,7 +10507,7 @@
         </p:nvSpPr>
         <p:spPr>
           <a:xfrm>
-            <a:off x="6404179" y="5317241"/>
+            <a:off x="6928054" y="5317241"/>
             <a:ext cx="844344" cy="369332"/>
           </a:xfrm>
           <a:prstGeom prst="rect">
@@ -10550,7 +10550,7 @@
         </p:nvSpPr>
         <p:spPr>
           <a:xfrm>
-            <a:off x="6300017" y="3007679"/>
+            <a:off x="6823892" y="3007679"/>
             <a:ext cx="770298" cy="369332"/>
           </a:xfrm>
           <a:prstGeom prst="rect">
@@ -10594,7 +10594,7 @@
         </p:nvSpPr>
         <p:spPr>
           <a:xfrm>
-            <a:off x="7585030" y="5317241"/>
+            <a:off x="8108905" y="5317241"/>
             <a:ext cx="770298" cy="369332"/>
           </a:xfrm>
           <a:prstGeom prst="rect">
@@ -10637,7 +10637,7 @@
         </p:nvSpPr>
         <p:spPr>
           <a:xfrm>
-            <a:off x="8691835" y="5317241"/>
+            <a:off x="9215710" y="5317241"/>
             <a:ext cx="732197" cy="369332"/>
           </a:xfrm>
           <a:prstGeom prst="rect">
@@ -10688,7 +10688,7 @@
         </p:nvSpPr>
         <p:spPr>
           <a:xfrm>
-            <a:off x="9760539" y="5317241"/>
+            <a:off x="10284414" y="5317241"/>
             <a:ext cx="450967" cy="369332"/>
           </a:xfrm>
           <a:prstGeom prst="rect">
@@ -10731,7 +10731,7 @@
         </p:nvSpPr>
         <p:spPr>
           <a:xfrm>
-            <a:off x="10548014" y="5317241"/>
+            <a:off x="11071889" y="5317241"/>
             <a:ext cx="574573" cy="369332"/>
           </a:xfrm>
           <a:prstGeom prst="rect">
@@ -10777,7 +10777,7 @@
         </p:nvCxnSpPr>
         <p:spPr>
           <a:xfrm rot="16200000" flipH="1">
-            <a:off x="5988225" y="3704620"/>
+            <a:off x="6512100" y="3704620"/>
             <a:ext cx="2678894" cy="1285013"/>
           </a:xfrm>
           <a:prstGeom prst="curvedConnector5">
@@ -10827,7 +10827,7 @@
         </p:nvCxnSpPr>
         <p:spPr>
           <a:xfrm rot="16200000" flipH="1">
-            <a:off x="7052791" y="3681430"/>
+            <a:off x="7576666" y="3681430"/>
             <a:ext cx="2678894" cy="1331392"/>
           </a:xfrm>
           <a:prstGeom prst="curvedConnector5">
@@ -10877,7 +10877,7 @@
         </p:nvCxnSpPr>
         <p:spPr>
           <a:xfrm rot="16200000" flipH="1">
-            <a:off x="8057605" y="3758156"/>
+            <a:off x="8581480" y="3758156"/>
             <a:ext cx="2678894" cy="1177941"/>
           </a:xfrm>
           <a:prstGeom prst="curvedConnector5">
@@ -10927,7 +10927,7 @@
         </p:nvCxnSpPr>
         <p:spPr>
           <a:xfrm rot="16200000" flipH="1">
-            <a:off x="9017141" y="3868413"/>
+            <a:off x="9541016" y="3868413"/>
             <a:ext cx="2678894" cy="957426"/>
           </a:xfrm>
           <a:prstGeom prst="curvedConnector5">
@@ -10973,7 +10973,7 @@
         </p:nvSpPr>
         <p:spPr>
           <a:xfrm>
-            <a:off x="2756405" y="6209216"/>
+            <a:off x="2308730" y="6209216"/>
             <a:ext cx="902811" cy="338554"/>
           </a:xfrm>
           <a:prstGeom prst="rect">
@@ -11015,7 +11015,7 @@
         </p:nvSpPr>
         <p:spPr>
           <a:xfrm>
-            <a:off x="8392238" y="6209216"/>
+            <a:off x="8916113" y="6209216"/>
             <a:ext cx="1415772" cy="338554"/>
           </a:xfrm>
           <a:prstGeom prst="rect">
@@ -11057,7 +11057,7 @@
         </p:nvCxnSpPr>
         <p:spPr>
           <a:xfrm>
-            <a:off x="792279" y="6134100"/>
+            <a:off x="344604" y="6134100"/>
             <a:ext cx="4955497" cy="0"/>
           </a:xfrm>
           <a:prstGeom prst="line">
@@ -11098,7 +11098,7 @@
         </p:nvCxnSpPr>
         <p:spPr>
           <a:xfrm>
-            <a:off x="6330332" y="6134100"/>
+            <a:off x="6854207" y="6134100"/>
             <a:ext cx="4955497" cy="0"/>
           </a:xfrm>
           <a:prstGeom prst="line">
@@ -11674,6 +11674,65 @@
               </a:rPr>
               <a:t> 출력과 정답을 1:1 비교해 손실을 계산함(패딩 오차는 제외) </a:t>
             </a:r>
+          </a:p>
+        </p:txBody>
+      </p:sp>
+      <p:sp>
+        <p:nvSpPr>
+          <p:cNvPr id="4" name="사각형: 둥근 모서리 3">
+            <a:extLst>
+              <a:ext uri="{FF2B5EF4-FFF2-40B4-BE49-F238E27FC236}">
+                <a16:creationId xmlns:a16="http://schemas.microsoft.com/office/drawing/2014/main" id="{4D3D1509-47BD-541C-AA25-C8FFC92BEB8C}"/>
+              </a:ext>
+            </a:extLst>
+          </p:cNvPr>
+          <p:cNvSpPr/>
+          <p:nvPr/>
+        </p:nvSpPr>
+        <p:spPr>
+          <a:xfrm>
+            <a:off x="5624838" y="4216783"/>
+            <a:ext cx="916952" cy="334350"/>
+          </a:xfrm>
+          <a:prstGeom prst="roundRect">
+            <a:avLst/>
+          </a:prstGeom>
+          <a:solidFill>
+            <a:schemeClr val="tx1"/>
+          </a:solidFill>
+        </p:spPr>
+        <p:style>
+          <a:lnRef idx="2">
+            <a:schemeClr val="accent1">
+              <a:shade val="15000"/>
+            </a:schemeClr>
+          </a:lnRef>
+          <a:fillRef idx="1">
+            <a:schemeClr val="accent1"/>
+          </a:fillRef>
+          <a:effectRef idx="0">
+            <a:schemeClr val="accent1"/>
+          </a:effectRef>
+          <a:fontRef idx="minor">
+            <a:schemeClr val="lt1"/>
+          </a:fontRef>
+        </p:style>
+        <p:txBody>
+          <a:bodyPr rtlCol="0" anchor="ctr"/>
+          <a:lstStyle/>
+          <a:p>
+            <a:pPr algn="ctr"/>
+            <a:r>
+              <a:rPr lang="en-US" altLang="ko-KR" sz="1200" b="1" dirty="0">
+                <a:latin typeface="D2Coding" panose="020B0609020101020101" pitchFamily="49" charset="-127"/>
+                <a:ea typeface="D2Coding" panose="020B0609020101020101" pitchFamily="49" charset="-127"/>
+              </a:rPr>
+              <a:t>Context vector</a:t>
+            </a:r>
+            <a:endParaRPr lang="ko-KR" altLang="en-US" sz="1200" b="1" dirty="0">
+              <a:latin typeface="D2Coding" panose="020B0609020101020101" pitchFamily="49" charset="-127"/>
+              <a:ea typeface="D2Coding" panose="020B0609020101020101" pitchFamily="49" charset="-127"/>
+            </a:endParaRPr>
           </a:p>
         </p:txBody>
       </p:sp>
@@ -39664,8 +39723,8 @@
           </a:p>
         </p:txBody>
       </p:sp>
-      <mc:AlternateContent xmlns:mc="http://schemas.openxmlformats.org/markup-compatibility/2006">
-        <mc:Choice xmlns:a14="http://schemas.microsoft.com/office/drawing/2010/main" Requires="a14">
+      <mc:AlternateContent xmlns:mc="http://schemas.openxmlformats.org/markup-compatibility/2006" xmlns:a14="http://schemas.microsoft.com/office/drawing/2010/main">
+        <mc:Choice Requires="a14">
           <p:sp>
             <p:nvSpPr>
               <p:cNvPr id="6" name="TextBox 5">
@@ -39899,7 +39958,7 @@
             </p:txBody>
           </p:sp>
         </mc:Choice>
-        <mc:Fallback>
+        <mc:Fallback xmlns="">
           <p:sp>
             <p:nvSpPr>
               <p:cNvPr id="6" name="TextBox 5">

--- a/Chapter 15 Language models and the Transformer.pptx
+++ b/Chapter 15 Language models and the Transformer.pptx
@@ -10068,8 +10068,8 @@
         </p:nvSpPr>
         <p:spPr>
           <a:xfrm>
-            <a:off x="6763804" y="3919691"/>
-            <a:ext cx="5312191" cy="914400"/>
+            <a:off x="6823892" y="3919691"/>
+            <a:ext cx="5029987" cy="914400"/>
           </a:xfrm>
           <a:prstGeom prst="roundRect">
             <a:avLst/>

--- a/Chapter 15 Language models and the Transformer.pptx
+++ b/Chapter 15 Language models and the Transformer.pptx
@@ -5,10 +5,10 @@
     <p:sldMasterId id="2147483660" r:id="rId1"/>
   </p:sldMasterIdLst>
   <p:notesMasterIdLst>
-    <p:notesMasterId r:id="rId39"/>
+    <p:notesMasterId r:id="rId40"/>
   </p:notesMasterIdLst>
   <p:handoutMasterIdLst>
-    <p:handoutMasterId r:id="rId40"/>
+    <p:handoutMasterId r:id="rId41"/>
   </p:handoutMasterIdLst>
   <p:sldIdLst>
     <p:sldId id="256" r:id="rId2"/>
@@ -34,20 +34,21 @@
     <p:sldId id="1153" r:id="rId22"/>
     <p:sldId id="1154" r:id="rId23"/>
     <p:sldId id="1172" r:id="rId24"/>
-    <p:sldId id="1155" r:id="rId25"/>
-    <p:sldId id="1159" r:id="rId26"/>
-    <p:sldId id="1160" r:id="rId27"/>
-    <p:sldId id="1156" r:id="rId28"/>
-    <p:sldId id="1157" r:id="rId29"/>
-    <p:sldId id="1158" r:id="rId30"/>
-    <p:sldId id="1176" r:id="rId31"/>
-    <p:sldId id="1162" r:id="rId32"/>
-    <p:sldId id="1178" r:id="rId33"/>
-    <p:sldId id="1179" r:id="rId34"/>
-    <p:sldId id="1177" r:id="rId35"/>
-    <p:sldId id="1161" r:id="rId36"/>
-    <p:sldId id="1163" r:id="rId37"/>
-    <p:sldId id="1165" r:id="rId38"/>
+    <p:sldId id="1180" r:id="rId25"/>
+    <p:sldId id="1155" r:id="rId26"/>
+    <p:sldId id="1159" r:id="rId27"/>
+    <p:sldId id="1160" r:id="rId28"/>
+    <p:sldId id="1156" r:id="rId29"/>
+    <p:sldId id="1157" r:id="rId30"/>
+    <p:sldId id="1158" r:id="rId31"/>
+    <p:sldId id="1176" r:id="rId32"/>
+    <p:sldId id="1162" r:id="rId33"/>
+    <p:sldId id="1178" r:id="rId34"/>
+    <p:sldId id="1179" r:id="rId35"/>
+    <p:sldId id="1177" r:id="rId36"/>
+    <p:sldId id="1161" r:id="rId37"/>
+    <p:sldId id="1163" r:id="rId38"/>
+    <p:sldId id="1165" r:id="rId39"/>
   </p:sldIdLst>
   <p:sldSz cx="12192000" cy="6858000"/>
   <p:notesSz cx="6858000" cy="9144000"/>
@@ -178,6 +179,7 @@
             <p14:sldId id="1153"/>
             <p14:sldId id="1154"/>
             <p14:sldId id="1172"/>
+            <p14:sldId id="1180"/>
             <p14:sldId id="1155"/>
             <p14:sldId id="1159"/>
             <p14:sldId id="1160"/>
@@ -316,7 +318,7 @@
                 <a:latin typeface="맑은 고딕" panose="020B0503020000020004" pitchFamily="50" charset="-127"/>
                 <a:ea typeface="맑은 고딕" panose="020B0503020000020004" pitchFamily="50" charset="-127"/>
               </a:rPr>
-              <a:t>2026-10-10</a:t>
+              <a:t>2026-10-14</a:t>
             </a:fld>
             <a:endParaRPr lang="ko-KR" altLang="en-US">
               <a:latin typeface="맑은 고딕" panose="020B0503020000020004" pitchFamily="50" charset="-127"/>
@@ -502,7 +504,7 @@
           <a:p>
             <a:fld id="{43E1C3DD-4A19-441D-907C-380838DB51C4}" type="datetime1">
               <a:rPr lang="ko-KR" altLang="en-US" noProof="0" smtClean="0"/>
-              <a:t>2026-10-10</a:t>
+              <a:t>2026-10-14</a:t>
             </a:fld>
             <a:endParaRPr lang="ko-KR" altLang="en-US" noProof="0"/>
           </a:p>
@@ -1215,6 +1217,115 @@
 </p:notes>
 </file>
 
+<file path=ppt/notesSlides/notesSlide5.xml><?xml version="1.0" encoding="utf-8"?>
+<p:notes xmlns:a="http://schemas.openxmlformats.org/drawingml/2006/main" xmlns:r="http://schemas.openxmlformats.org/officeDocument/2006/relationships" xmlns:p="http://schemas.openxmlformats.org/presentationml/2006/main">
+  <p:cSld>
+    <p:spTree>
+      <p:nvGrpSpPr>
+        <p:cNvPr id="1" name="">
+          <a:extLst>
+            <a:ext uri="{FF2B5EF4-FFF2-40B4-BE49-F238E27FC236}">
+              <a16:creationId xmlns:a16="http://schemas.microsoft.com/office/drawing/2014/main" id="{95F204BD-07BF-C332-E60D-DAD52F493861}"/>
+            </a:ext>
+          </a:extLst>
+        </p:cNvPr>
+        <p:cNvGrpSpPr/>
+        <p:nvPr/>
+      </p:nvGrpSpPr>
+      <p:grpSpPr>
+        <a:xfrm>
+          <a:off x="0" y="0"/>
+          <a:ext cx="0" cy="0"/>
+          <a:chOff x="0" y="0"/>
+          <a:chExt cx="0" cy="0"/>
+        </a:xfrm>
+      </p:grpSpPr>
+      <p:sp>
+        <p:nvSpPr>
+          <p:cNvPr id="2" name="슬라이드 이미지 개체 틀 1">
+            <a:extLst>
+              <a:ext uri="{FF2B5EF4-FFF2-40B4-BE49-F238E27FC236}">
+                <a16:creationId xmlns:a16="http://schemas.microsoft.com/office/drawing/2014/main" id="{D86C0408-A978-1E62-27DB-F158C7D48747}"/>
+              </a:ext>
+            </a:extLst>
+          </p:cNvPr>
+          <p:cNvSpPr>
+            <a:spLocks noGrp="1" noRot="1" noChangeAspect="1"/>
+          </p:cNvSpPr>
+          <p:nvPr>
+            <p:ph type="sldImg"/>
+          </p:nvPr>
+        </p:nvSpPr>
+        <p:spPr/>
+      </p:sp>
+      <p:sp>
+        <p:nvSpPr>
+          <p:cNvPr id="3" name="슬라이드 노트 개체 틀 2">
+            <a:extLst>
+              <a:ext uri="{FF2B5EF4-FFF2-40B4-BE49-F238E27FC236}">
+                <a16:creationId xmlns:a16="http://schemas.microsoft.com/office/drawing/2014/main" id="{2C4D7C3D-E657-94C5-4963-872EEF9D551C}"/>
+              </a:ext>
+            </a:extLst>
+          </p:cNvPr>
+          <p:cNvSpPr>
+            <a:spLocks noGrp="1"/>
+          </p:cNvSpPr>
+          <p:nvPr>
+            <p:ph type="body" idx="1"/>
+          </p:nvPr>
+        </p:nvSpPr>
+        <p:spPr/>
+        <p:txBody>
+          <a:bodyPr/>
+          <a:lstStyle/>
+          <a:p>
+            <a:endParaRPr lang="ko-KR" altLang="en-US" dirty="0"/>
+          </a:p>
+        </p:txBody>
+      </p:sp>
+      <p:sp>
+        <p:nvSpPr>
+          <p:cNvPr id="4" name="슬라이드 번호 개체 틀 3">
+            <a:extLst>
+              <a:ext uri="{FF2B5EF4-FFF2-40B4-BE49-F238E27FC236}">
+                <a16:creationId xmlns:a16="http://schemas.microsoft.com/office/drawing/2014/main" id="{5805D332-B9D1-F7F2-7EAF-3F0AB4FD626E}"/>
+              </a:ext>
+            </a:extLst>
+          </p:cNvPr>
+          <p:cNvSpPr>
+            <a:spLocks noGrp="1"/>
+          </p:cNvSpPr>
+          <p:nvPr>
+            <p:ph type="sldNum" sz="quarter" idx="5"/>
+          </p:nvPr>
+        </p:nvSpPr>
+        <p:spPr/>
+        <p:txBody>
+          <a:bodyPr/>
+          <a:lstStyle/>
+          <a:p>
+            <a:fld id="{DF61EA0F-A667-4B49-8422-0062BC55E249}" type="slidenum">
+              <a:rPr lang="en-US" altLang="ko-KR" noProof="0" smtClean="0"/>
+              <a:pPr/>
+              <a:t>24</a:t>
+            </a:fld>
+            <a:endParaRPr lang="ko-KR" altLang="en-US" noProof="0"/>
+          </a:p>
+        </p:txBody>
+      </p:sp>
+    </p:spTree>
+    <p:extLst>
+      <p:ext uri="{BB962C8B-B14F-4D97-AF65-F5344CB8AC3E}">
+        <p14:creationId xmlns:p14="http://schemas.microsoft.com/office/powerpoint/2010/main" val="2595000872"/>
+      </p:ext>
+    </p:extLst>
+  </p:cSld>
+  <p:clrMapOvr>
+    <a:masterClrMapping/>
+  </p:clrMapOvr>
+</p:notes>
+</file>
+
 <file path=ppt/slideLayouts/slideLayout1.xml><?xml version="1.0" encoding="utf-8"?>
 <p:sldLayout xmlns:a="http://schemas.openxmlformats.org/drawingml/2006/main" xmlns:r="http://schemas.openxmlformats.org/officeDocument/2006/relationships" xmlns:p="http://schemas.openxmlformats.org/presentationml/2006/main" preserve="1" userDrawn="1">
   <p:cSld name="제목 슬라이드">
@@ -1683,7 +1794,7 @@
           <a:p>
             <a:fld id="{990475B5-67CA-4281-BDCA-DA943C3C8EB3}" type="datetime1">
               <a:rPr lang="ko-KR" altLang="en-US" noProof="0" smtClean="0"/>
-              <a:t>2026-10-10</a:t>
+              <a:t>2026-10-14</a:t>
             </a:fld>
             <a:endParaRPr lang="ko-KR" altLang="en-US" noProof="0"/>
           </a:p>
@@ -2337,7 +2448,7 @@
           <a:p>
             <a:fld id="{48A87A34-81AB-432B-8DAE-1953F412C126}" type="datetimeFigureOut">
               <a:rPr lang="en-US" smtClean="0"/>
-              <a:t>10/10/2026</a:t>
+              <a:t>10/14/2026</a:t>
             </a:fld>
             <a:endParaRPr lang="en-US" dirty="0"/>
           </a:p>
@@ -2633,7 +2744,7 @@
           <a:p>
             <a:fld id="{C655C81E-72E7-4D05-94B5-F45B321A525D}" type="datetime1">
               <a:rPr lang="ko-KR" altLang="en-US" noProof="0" smtClean="0"/>
-              <a:t>2026-10-10</a:t>
+              <a:t>2026-10-14</a:t>
             </a:fld>
             <a:endParaRPr lang="ko-KR" altLang="en-US" noProof="0" dirty="0">
               <a:latin typeface="맑은 고딕" panose="020B0503020000020004" pitchFamily="50" charset="-127"/>
@@ -3607,254 +3718,10 @@
                 <a:solidFill>
                   <a:schemeClr val="bg1"/>
                 </a:solidFill>
-                <a:latin typeface="Lora" pitchFamily="2" charset="0"/>
               </a:rPr>
               <a:t>Sequence-to-sequence</a:t>
             </a:r>
             <a:endParaRPr lang="ko-KR" altLang="en-US" sz="4400" dirty="0">
-              <a:solidFill>
-                <a:schemeClr val="bg1"/>
-              </a:solidFill>
-              <a:latin typeface="Lora" pitchFamily="2" charset="0"/>
-            </a:endParaRPr>
-          </a:p>
-        </p:txBody>
-      </p:sp>
-      <p:sp>
-        <p:nvSpPr>
-          <p:cNvPr id="5" name="부제목 2">
-            <a:extLst>
-              <a:ext uri="{FF2B5EF4-FFF2-40B4-BE49-F238E27FC236}">
-                <a16:creationId xmlns:a16="http://schemas.microsoft.com/office/drawing/2014/main" id="{25A97A46-9E82-F6A6-B28B-408473F8E92A}"/>
-              </a:ext>
-            </a:extLst>
-          </p:cNvPr>
-          <p:cNvSpPr txBox="1">
-            <a:spLocks/>
-          </p:cNvSpPr>
-          <p:nvPr/>
-        </p:nvSpPr>
-        <p:spPr>
-          <a:xfrm>
-            <a:off x="855620" y="4555883"/>
-            <a:ext cx="9582736" cy="1137793"/>
-          </a:xfrm>
-          <a:prstGeom prst="rect">
-            <a:avLst/>
-          </a:prstGeom>
-        </p:spPr>
-        <p:txBody>
-          <a:bodyPr vert="horz" lIns="91440" tIns="45720" rIns="91440" bIns="45720" rtlCol="0">
-            <a:normAutofit fontScale="85000" lnSpcReduction="20000"/>
-          </a:bodyPr>
-          <a:lstStyle>
-            <a:lvl1pPr marL="0" indent="0" algn="l" defTabSz="914400" rtl="0" eaLnBrk="1" latinLnBrk="1" hangingPunct="1">
-              <a:lnSpc>
-                <a:spcPct val="150000"/>
-              </a:lnSpc>
-              <a:spcBef>
-                <a:spcPts val="1000"/>
-              </a:spcBef>
-              <a:spcAft>
-                <a:spcPts val="1200"/>
-              </a:spcAft>
-              <a:buFontTx/>
-              <a:buNone/>
-              <a:defRPr lang="en-US" sz="1200" kern="1200" dirty="0">
-                <a:solidFill>
-                  <a:schemeClr val="tx1"/>
-                </a:solidFill>
-                <a:latin typeface="맑은 고딕" panose="020B0503020000020004" pitchFamily="50" charset="-127"/>
-                <a:ea typeface="맑은 고딕" panose="020B0503020000020004" pitchFamily="50" charset="-127"/>
-                <a:cs typeface="+mn-cs"/>
-              </a:defRPr>
-            </a:lvl1pPr>
-            <a:lvl2pPr marL="228600" indent="-228600" algn="l" defTabSz="914400" rtl="0" eaLnBrk="1" latinLnBrk="1" hangingPunct="1">
-              <a:lnSpc>
-                <a:spcPct val="150000"/>
-              </a:lnSpc>
-              <a:spcBef>
-                <a:spcPts val="1000"/>
-              </a:spcBef>
-              <a:spcAft>
-                <a:spcPts val="1200"/>
-              </a:spcAft>
-              <a:buFont typeface="Arial" panose="020B0604020202020204" pitchFamily="34" charset="0"/>
-              <a:buChar char="•"/>
-              <a:defRPr lang="en-US" sz="1200" kern="1200" dirty="0">
-                <a:solidFill>
-                  <a:schemeClr val="tx1"/>
-                </a:solidFill>
-                <a:latin typeface="맑은 고딕" panose="020B0503020000020004" pitchFamily="50" charset="-127"/>
-                <a:ea typeface="맑은 고딕" panose="020B0503020000020004" pitchFamily="50" charset="-127"/>
-                <a:cs typeface="+mn-cs"/>
-              </a:defRPr>
-            </a:lvl2pPr>
-            <a:lvl3pPr marL="685800" indent="-228600" algn="l" defTabSz="914400" rtl="0" eaLnBrk="1" latinLnBrk="1" hangingPunct="1">
-              <a:lnSpc>
-                <a:spcPct val="150000"/>
-              </a:lnSpc>
-              <a:spcBef>
-                <a:spcPts val="1000"/>
-              </a:spcBef>
-              <a:spcAft>
-                <a:spcPts val="1200"/>
-              </a:spcAft>
-              <a:buFont typeface="Arial" panose="020B0604020202020204" pitchFamily="34" charset="0"/>
-              <a:buChar char="•"/>
-              <a:defRPr lang="en-US" sz="1200" kern="1200" dirty="0">
-                <a:solidFill>
-                  <a:schemeClr val="tx1"/>
-                </a:solidFill>
-                <a:latin typeface="맑은 고딕" panose="020B0503020000020004" pitchFamily="50" charset="-127"/>
-                <a:ea typeface="맑은 고딕" panose="020B0503020000020004" pitchFamily="50" charset="-127"/>
-                <a:cs typeface="+mn-cs"/>
-              </a:defRPr>
-            </a:lvl3pPr>
-            <a:lvl4pPr marL="1143000" indent="-228600" algn="l" defTabSz="914400" rtl="0" eaLnBrk="1" latinLnBrk="1" hangingPunct="1">
-              <a:lnSpc>
-                <a:spcPct val="150000"/>
-              </a:lnSpc>
-              <a:spcBef>
-                <a:spcPts val="1000"/>
-              </a:spcBef>
-              <a:spcAft>
-                <a:spcPts val="1200"/>
-              </a:spcAft>
-              <a:buFont typeface="Arial" panose="020B0604020202020204" pitchFamily="34" charset="0"/>
-              <a:buChar char="•"/>
-              <a:defRPr lang="en-US" sz="1200" kern="1200" dirty="0" smtClean="0">
-                <a:solidFill>
-                  <a:schemeClr val="tx1"/>
-                </a:solidFill>
-                <a:latin typeface="맑은 고딕" panose="020B0503020000020004" pitchFamily="50" charset="-127"/>
-                <a:ea typeface="맑은 고딕" panose="020B0503020000020004" pitchFamily="50" charset="-127"/>
-                <a:cs typeface="+mn-cs"/>
-              </a:defRPr>
-            </a:lvl4pPr>
-            <a:lvl5pPr marL="1600200" indent="-228600" algn="l" defTabSz="914400" rtl="0" eaLnBrk="1" latinLnBrk="1" hangingPunct="1">
-              <a:lnSpc>
-                <a:spcPct val="150000"/>
-              </a:lnSpc>
-              <a:spcBef>
-                <a:spcPts val="1000"/>
-              </a:spcBef>
-              <a:spcAft>
-                <a:spcPts val="1200"/>
-              </a:spcAft>
-              <a:buFont typeface="Arial" panose="020B0604020202020204" pitchFamily="34" charset="0"/>
-              <a:buChar char="•"/>
-              <a:defRPr lang="en-US" sz="1200" kern="1200" dirty="0" smtClean="0">
-                <a:solidFill>
-                  <a:schemeClr val="tx1"/>
-                </a:solidFill>
-                <a:latin typeface="맑은 고딕" panose="020B0503020000020004" pitchFamily="50" charset="-127"/>
-                <a:ea typeface="맑은 고딕" panose="020B0503020000020004" pitchFamily="50" charset="-127"/>
-                <a:cs typeface="+mn-cs"/>
-              </a:defRPr>
-            </a:lvl5pPr>
-            <a:lvl6pPr marL="2057400" indent="-228600" algn="l" defTabSz="914400" rtl="0" eaLnBrk="1" latinLnBrk="1" hangingPunct="1">
-              <a:lnSpc>
-                <a:spcPct val="150000"/>
-              </a:lnSpc>
-              <a:spcBef>
-                <a:spcPts val="1000"/>
-              </a:spcBef>
-              <a:spcAft>
-                <a:spcPts val="1200"/>
-              </a:spcAft>
-              <a:buFont typeface="Arial" panose="020B0604020202020204" pitchFamily="34" charset="0"/>
-              <a:buChar char="•"/>
-              <a:defRPr lang="en-US" sz="1200" kern="1200" dirty="0" smtClean="0">
-                <a:solidFill>
-                  <a:schemeClr val="tx1"/>
-                </a:solidFill>
-                <a:latin typeface="+mn-lt"/>
-                <a:ea typeface="+mn-ea"/>
-                <a:cs typeface="+mn-cs"/>
-              </a:defRPr>
-            </a:lvl6pPr>
-            <a:lvl7pPr marL="2514600" indent="-228600" algn="l" defTabSz="914400" rtl="0" eaLnBrk="1" latinLnBrk="1" hangingPunct="1">
-              <a:lnSpc>
-                <a:spcPct val="150000"/>
-              </a:lnSpc>
-              <a:spcBef>
-                <a:spcPts val="1000"/>
-              </a:spcBef>
-              <a:spcAft>
-                <a:spcPts val="1200"/>
-              </a:spcAft>
-              <a:buFont typeface="Arial" panose="020B0604020202020204" pitchFamily="34" charset="0"/>
-              <a:buChar char="•"/>
-              <a:defRPr lang="en-US" sz="1200" kern="1200" dirty="0" smtClean="0">
-                <a:solidFill>
-                  <a:schemeClr val="tx1"/>
-                </a:solidFill>
-                <a:latin typeface="+mn-lt"/>
-                <a:ea typeface="+mn-ea"/>
-                <a:cs typeface="+mn-cs"/>
-              </a:defRPr>
-            </a:lvl7pPr>
-            <a:lvl8pPr marL="2971800" indent="-228600" algn="l" defTabSz="914400" rtl="0" eaLnBrk="1" latinLnBrk="1" hangingPunct="1">
-              <a:lnSpc>
-                <a:spcPct val="150000"/>
-              </a:lnSpc>
-              <a:spcBef>
-                <a:spcPts val="1000"/>
-              </a:spcBef>
-              <a:spcAft>
-                <a:spcPts val="1200"/>
-              </a:spcAft>
-              <a:buFont typeface="Arial" panose="020B0604020202020204" pitchFamily="34" charset="0"/>
-              <a:buChar char="•"/>
-              <a:defRPr lang="en-US" sz="1200" kern="1200" dirty="0" smtClean="0">
-                <a:solidFill>
-                  <a:schemeClr val="tx1"/>
-                </a:solidFill>
-                <a:latin typeface="+mn-lt"/>
-                <a:ea typeface="+mn-ea"/>
-                <a:cs typeface="+mn-cs"/>
-              </a:defRPr>
-            </a:lvl8pPr>
-            <a:lvl9pPr marL="3429000" indent="-228600" algn="l" defTabSz="914400" rtl="0" eaLnBrk="1" latinLnBrk="1" hangingPunct="1">
-              <a:lnSpc>
-                <a:spcPct val="90000"/>
-              </a:lnSpc>
-              <a:spcBef>
-                <a:spcPct val="30000"/>
-              </a:spcBef>
-              <a:buFont typeface="Arial" panose="020B0604020202020204" pitchFamily="34" charset="0"/>
-              <a:buNone/>
-              <a:defRPr sz="1200" kern="1200">
-                <a:solidFill>
-                  <a:schemeClr val="tx1"/>
-                </a:solidFill>
-                <a:latin typeface="+mn-lt"/>
-                <a:ea typeface="+mn-ea"/>
-                <a:cs typeface="+mn-cs"/>
-              </a:defRPr>
-            </a:lvl9pPr>
-          </a:lstStyle>
-          <a:p>
-            <a:r>
-              <a:rPr lang="en-US" altLang="ko-KR" sz="2400" dirty="0">
-                <a:solidFill>
-                  <a:schemeClr val="bg1"/>
-                </a:solidFill>
-              </a:rPr>
-              <a:t>2026 Fall</a:t>
-            </a:r>
-          </a:p>
-          <a:p>
-            <a:r>
-              <a:rPr lang="ko-KR" altLang="en-US" sz="2400" dirty="0" err="1">
-                <a:solidFill>
-                  <a:schemeClr val="bg1"/>
-                </a:solidFill>
-              </a:rPr>
-              <a:t>조상구교수</a:t>
-            </a:r>
-            <a:endParaRPr lang="en-US" altLang="ko-KR" sz="2400" dirty="0">
               <a:solidFill>
                 <a:schemeClr val="bg1"/>
               </a:solidFill>
@@ -13755,8 +13622,8 @@
         </p:nvSpPr>
         <p:spPr>
           <a:xfrm>
-            <a:off x="559313" y="1419057"/>
-            <a:ext cx="11073374" cy="4306628"/>
+            <a:off x="559313" y="1228557"/>
+            <a:ext cx="11073374" cy="4675960"/>
           </a:xfrm>
           <a:prstGeom prst="rect">
             <a:avLst/>
@@ -13915,6 +13782,18 @@
               </a:rPr>
               <a:t>layers)</a:t>
             </a:r>
+          </a:p>
+          <a:p>
+            <a:pPr>
+              <a:lnSpc>
+                <a:spcPct val="150000"/>
+              </a:lnSpc>
+              <a:buNone/>
+            </a:pPr>
+            <a:endParaRPr lang="en-US" altLang="ko-KR" sz="1600" dirty="0">
+              <a:latin typeface="D2Coding" panose="020B0609020101020101" pitchFamily="49" charset="-127"/>
+              <a:ea typeface="D2Coding" panose="020B0609020101020101" pitchFamily="49" charset="-127"/>
+            </a:endParaRPr>
           </a:p>
           <a:p>
             <a:pPr>
@@ -14587,254 +14466,10 @@
                 <a:solidFill>
                   <a:schemeClr val="bg1"/>
                 </a:solidFill>
-                <a:latin typeface="Lora" pitchFamily="2" charset="0"/>
               </a:rPr>
               <a:t>Transformer</a:t>
             </a:r>
             <a:endParaRPr lang="ko-KR" altLang="en-US" sz="4400" dirty="0">
-              <a:solidFill>
-                <a:schemeClr val="bg1"/>
-              </a:solidFill>
-              <a:latin typeface="Lora" pitchFamily="2" charset="0"/>
-            </a:endParaRPr>
-          </a:p>
-        </p:txBody>
-      </p:sp>
-      <p:sp>
-        <p:nvSpPr>
-          <p:cNvPr id="5" name="부제목 2">
-            <a:extLst>
-              <a:ext uri="{FF2B5EF4-FFF2-40B4-BE49-F238E27FC236}">
-                <a16:creationId xmlns:a16="http://schemas.microsoft.com/office/drawing/2014/main" id="{A300CBE6-A68F-D4FD-925F-A3BB91E3EC87}"/>
-              </a:ext>
-            </a:extLst>
-          </p:cNvPr>
-          <p:cNvSpPr txBox="1">
-            <a:spLocks/>
-          </p:cNvSpPr>
-          <p:nvPr/>
-        </p:nvSpPr>
-        <p:spPr>
-          <a:xfrm>
-            <a:off x="855620" y="4555883"/>
-            <a:ext cx="9582736" cy="1137793"/>
-          </a:xfrm>
-          <a:prstGeom prst="rect">
-            <a:avLst/>
-          </a:prstGeom>
-        </p:spPr>
-        <p:txBody>
-          <a:bodyPr vert="horz" lIns="91440" tIns="45720" rIns="91440" bIns="45720" rtlCol="0">
-            <a:normAutofit fontScale="85000" lnSpcReduction="20000"/>
-          </a:bodyPr>
-          <a:lstStyle>
-            <a:lvl1pPr marL="0" indent="0" algn="l" defTabSz="914400" rtl="0" eaLnBrk="1" latinLnBrk="1" hangingPunct="1">
-              <a:lnSpc>
-                <a:spcPct val="150000"/>
-              </a:lnSpc>
-              <a:spcBef>
-                <a:spcPts val="1000"/>
-              </a:spcBef>
-              <a:spcAft>
-                <a:spcPts val="1200"/>
-              </a:spcAft>
-              <a:buFontTx/>
-              <a:buNone/>
-              <a:defRPr lang="en-US" sz="1200" kern="1200" dirty="0">
-                <a:solidFill>
-                  <a:schemeClr val="tx1"/>
-                </a:solidFill>
-                <a:latin typeface="맑은 고딕" panose="020B0503020000020004" pitchFamily="50" charset="-127"/>
-                <a:ea typeface="맑은 고딕" panose="020B0503020000020004" pitchFamily="50" charset="-127"/>
-                <a:cs typeface="+mn-cs"/>
-              </a:defRPr>
-            </a:lvl1pPr>
-            <a:lvl2pPr marL="228600" indent="-228600" algn="l" defTabSz="914400" rtl="0" eaLnBrk="1" latinLnBrk="1" hangingPunct="1">
-              <a:lnSpc>
-                <a:spcPct val="150000"/>
-              </a:lnSpc>
-              <a:spcBef>
-                <a:spcPts val="1000"/>
-              </a:spcBef>
-              <a:spcAft>
-                <a:spcPts val="1200"/>
-              </a:spcAft>
-              <a:buFont typeface="Arial" panose="020B0604020202020204" pitchFamily="34" charset="0"/>
-              <a:buChar char="•"/>
-              <a:defRPr lang="en-US" sz="1200" kern="1200" dirty="0">
-                <a:solidFill>
-                  <a:schemeClr val="tx1"/>
-                </a:solidFill>
-                <a:latin typeface="맑은 고딕" panose="020B0503020000020004" pitchFamily="50" charset="-127"/>
-                <a:ea typeface="맑은 고딕" panose="020B0503020000020004" pitchFamily="50" charset="-127"/>
-                <a:cs typeface="+mn-cs"/>
-              </a:defRPr>
-            </a:lvl2pPr>
-            <a:lvl3pPr marL="685800" indent="-228600" algn="l" defTabSz="914400" rtl="0" eaLnBrk="1" latinLnBrk="1" hangingPunct="1">
-              <a:lnSpc>
-                <a:spcPct val="150000"/>
-              </a:lnSpc>
-              <a:spcBef>
-                <a:spcPts val="1000"/>
-              </a:spcBef>
-              <a:spcAft>
-                <a:spcPts val="1200"/>
-              </a:spcAft>
-              <a:buFont typeface="Arial" panose="020B0604020202020204" pitchFamily="34" charset="0"/>
-              <a:buChar char="•"/>
-              <a:defRPr lang="en-US" sz="1200" kern="1200" dirty="0">
-                <a:solidFill>
-                  <a:schemeClr val="tx1"/>
-                </a:solidFill>
-                <a:latin typeface="맑은 고딕" panose="020B0503020000020004" pitchFamily="50" charset="-127"/>
-                <a:ea typeface="맑은 고딕" panose="020B0503020000020004" pitchFamily="50" charset="-127"/>
-                <a:cs typeface="+mn-cs"/>
-              </a:defRPr>
-            </a:lvl3pPr>
-            <a:lvl4pPr marL="1143000" indent="-228600" algn="l" defTabSz="914400" rtl="0" eaLnBrk="1" latinLnBrk="1" hangingPunct="1">
-              <a:lnSpc>
-                <a:spcPct val="150000"/>
-              </a:lnSpc>
-              <a:spcBef>
-                <a:spcPts val="1000"/>
-              </a:spcBef>
-              <a:spcAft>
-                <a:spcPts val="1200"/>
-              </a:spcAft>
-              <a:buFont typeface="Arial" panose="020B0604020202020204" pitchFamily="34" charset="0"/>
-              <a:buChar char="•"/>
-              <a:defRPr lang="en-US" sz="1200" kern="1200" dirty="0" smtClean="0">
-                <a:solidFill>
-                  <a:schemeClr val="tx1"/>
-                </a:solidFill>
-                <a:latin typeface="맑은 고딕" panose="020B0503020000020004" pitchFamily="50" charset="-127"/>
-                <a:ea typeface="맑은 고딕" panose="020B0503020000020004" pitchFamily="50" charset="-127"/>
-                <a:cs typeface="+mn-cs"/>
-              </a:defRPr>
-            </a:lvl4pPr>
-            <a:lvl5pPr marL="1600200" indent="-228600" algn="l" defTabSz="914400" rtl="0" eaLnBrk="1" latinLnBrk="1" hangingPunct="1">
-              <a:lnSpc>
-                <a:spcPct val="150000"/>
-              </a:lnSpc>
-              <a:spcBef>
-                <a:spcPts val="1000"/>
-              </a:spcBef>
-              <a:spcAft>
-                <a:spcPts val="1200"/>
-              </a:spcAft>
-              <a:buFont typeface="Arial" panose="020B0604020202020204" pitchFamily="34" charset="0"/>
-              <a:buChar char="•"/>
-              <a:defRPr lang="en-US" sz="1200" kern="1200" dirty="0" smtClean="0">
-                <a:solidFill>
-                  <a:schemeClr val="tx1"/>
-                </a:solidFill>
-                <a:latin typeface="맑은 고딕" panose="020B0503020000020004" pitchFamily="50" charset="-127"/>
-                <a:ea typeface="맑은 고딕" panose="020B0503020000020004" pitchFamily="50" charset="-127"/>
-                <a:cs typeface="+mn-cs"/>
-              </a:defRPr>
-            </a:lvl5pPr>
-            <a:lvl6pPr marL="2057400" indent="-228600" algn="l" defTabSz="914400" rtl="0" eaLnBrk="1" latinLnBrk="1" hangingPunct="1">
-              <a:lnSpc>
-                <a:spcPct val="150000"/>
-              </a:lnSpc>
-              <a:spcBef>
-                <a:spcPts val="1000"/>
-              </a:spcBef>
-              <a:spcAft>
-                <a:spcPts val="1200"/>
-              </a:spcAft>
-              <a:buFont typeface="Arial" panose="020B0604020202020204" pitchFamily="34" charset="0"/>
-              <a:buChar char="•"/>
-              <a:defRPr lang="en-US" sz="1200" kern="1200" dirty="0" smtClean="0">
-                <a:solidFill>
-                  <a:schemeClr val="tx1"/>
-                </a:solidFill>
-                <a:latin typeface="+mn-lt"/>
-                <a:ea typeface="+mn-ea"/>
-                <a:cs typeface="+mn-cs"/>
-              </a:defRPr>
-            </a:lvl6pPr>
-            <a:lvl7pPr marL="2514600" indent="-228600" algn="l" defTabSz="914400" rtl="0" eaLnBrk="1" latinLnBrk="1" hangingPunct="1">
-              <a:lnSpc>
-                <a:spcPct val="150000"/>
-              </a:lnSpc>
-              <a:spcBef>
-                <a:spcPts val="1000"/>
-              </a:spcBef>
-              <a:spcAft>
-                <a:spcPts val="1200"/>
-              </a:spcAft>
-              <a:buFont typeface="Arial" panose="020B0604020202020204" pitchFamily="34" charset="0"/>
-              <a:buChar char="•"/>
-              <a:defRPr lang="en-US" sz="1200" kern="1200" dirty="0" smtClean="0">
-                <a:solidFill>
-                  <a:schemeClr val="tx1"/>
-                </a:solidFill>
-                <a:latin typeface="+mn-lt"/>
-                <a:ea typeface="+mn-ea"/>
-                <a:cs typeface="+mn-cs"/>
-              </a:defRPr>
-            </a:lvl7pPr>
-            <a:lvl8pPr marL="2971800" indent="-228600" algn="l" defTabSz="914400" rtl="0" eaLnBrk="1" latinLnBrk="1" hangingPunct="1">
-              <a:lnSpc>
-                <a:spcPct val="150000"/>
-              </a:lnSpc>
-              <a:spcBef>
-                <a:spcPts val="1000"/>
-              </a:spcBef>
-              <a:spcAft>
-                <a:spcPts val="1200"/>
-              </a:spcAft>
-              <a:buFont typeface="Arial" panose="020B0604020202020204" pitchFamily="34" charset="0"/>
-              <a:buChar char="•"/>
-              <a:defRPr lang="en-US" sz="1200" kern="1200" dirty="0" smtClean="0">
-                <a:solidFill>
-                  <a:schemeClr val="tx1"/>
-                </a:solidFill>
-                <a:latin typeface="+mn-lt"/>
-                <a:ea typeface="+mn-ea"/>
-                <a:cs typeface="+mn-cs"/>
-              </a:defRPr>
-            </a:lvl8pPr>
-            <a:lvl9pPr marL="3429000" indent="-228600" algn="l" defTabSz="914400" rtl="0" eaLnBrk="1" latinLnBrk="1" hangingPunct="1">
-              <a:lnSpc>
-                <a:spcPct val="90000"/>
-              </a:lnSpc>
-              <a:spcBef>
-                <a:spcPct val="30000"/>
-              </a:spcBef>
-              <a:buFont typeface="Arial" panose="020B0604020202020204" pitchFamily="34" charset="0"/>
-              <a:buNone/>
-              <a:defRPr sz="1200" kern="1200">
-                <a:solidFill>
-                  <a:schemeClr val="tx1"/>
-                </a:solidFill>
-                <a:latin typeface="+mn-lt"/>
-                <a:ea typeface="+mn-ea"/>
-                <a:cs typeface="+mn-cs"/>
-              </a:defRPr>
-            </a:lvl9pPr>
-          </a:lstStyle>
-          <a:p>
-            <a:r>
-              <a:rPr lang="en-US" altLang="ko-KR" sz="2400" dirty="0">
-                <a:solidFill>
-                  <a:schemeClr val="bg1"/>
-                </a:solidFill>
-              </a:rPr>
-              <a:t>2026 Fall</a:t>
-            </a:r>
-          </a:p>
-          <a:p>
-            <a:r>
-              <a:rPr lang="ko-KR" altLang="en-US" sz="2400" dirty="0" err="1">
-                <a:solidFill>
-                  <a:schemeClr val="bg1"/>
-                </a:solidFill>
-              </a:rPr>
-              <a:t>조상구교수</a:t>
-            </a:r>
-            <a:endParaRPr lang="en-US" altLang="ko-KR" sz="2400" dirty="0">
               <a:solidFill>
                 <a:schemeClr val="bg1"/>
               </a:solidFill>
@@ -14963,27 +14598,13 @@
           <a:p>
             <a:pPr algn="l"/>
             <a:r>
-              <a:rPr lang="en-US" altLang="ko-KR" sz="2800" cap="none" dirty="0">
-                <a:solidFill>
-                  <a:schemeClr val="bg2">
-                    <a:lumMod val="25000"/>
-                  </a:schemeClr>
-                </a:solidFill>
-                <a:latin typeface="D2Coding" panose="020B0609020101020101" pitchFamily="49" charset="-127"/>
-                <a:ea typeface="D2Coding" panose="020B0609020101020101" pitchFamily="49" charset="-127"/>
-                <a:cs typeface="Segoe UI Light" panose="020B0502040204020203" pitchFamily="34" charset="0"/>
+              <a:rPr lang="en-US" altLang="ko-KR" sz="2800" b="1" cap="none" dirty="0">
+                <a:latin typeface="Lora" pitchFamily="2" charset="0"/>
               </a:rPr>
               <a:t>Goals</a:t>
             </a:r>
-            <a:endParaRPr lang="ko-KR" altLang="en-US" sz="2800" cap="none" dirty="0">
-              <a:solidFill>
-                <a:schemeClr val="bg2">
-                  <a:lumMod val="25000"/>
-                </a:schemeClr>
-              </a:solidFill>
-              <a:latin typeface="D2Coding" panose="020B0609020101020101" pitchFamily="49" charset="-127"/>
-              <a:ea typeface="D2Coding" panose="020B0609020101020101" pitchFamily="49" charset="-127"/>
-              <a:cs typeface="Segoe UI Light" panose="020B0502040204020203" pitchFamily="34" charset="0"/>
+            <a:endParaRPr lang="ko-KR" altLang="en-US" sz="2800" b="1" cap="none" dirty="0">
+              <a:latin typeface="Lora" pitchFamily="2" charset="0"/>
             </a:endParaRPr>
           </a:p>
         </p:txBody>
@@ -15778,7 +15399,7 @@
         </p:nvSpPr>
         <p:spPr>
           <a:xfrm>
-            <a:off x="5006109" y="1488141"/>
+            <a:off x="5006109" y="1383366"/>
             <a:ext cx="6096000" cy="4583627"/>
           </a:xfrm>
           <a:prstGeom prst="rect">
@@ -16702,7 +16323,7 @@
         <p:spPr>
           <a:xfrm>
             <a:off x="563417" y="1185280"/>
-            <a:ext cx="11152937" cy="1162498"/>
+            <a:ext cx="11152937" cy="1028808"/>
           </a:xfrm>
           <a:prstGeom prst="rect">
             <a:avLst/>
@@ -16721,154 +16342,154 @@
               </a:lnSpc>
             </a:pPr>
             <a:r>
-              <a:rPr lang="en-US" altLang="ko-KR" sz="1600" dirty="0">
+              <a:rPr lang="en-US" altLang="ko-KR" sz="1400" dirty="0">
                 <a:latin typeface="D2Coding" panose="020B0609020101020101" pitchFamily="49" charset="-127"/>
                 <a:ea typeface="D2Coding" panose="020B0609020101020101" pitchFamily="49" charset="-127"/>
               </a:rPr>
               <a:t>“</a:t>
             </a:r>
             <a:r>
-              <a:rPr lang="ko-KR" altLang="ko-KR" sz="1600" dirty="0" err="1">
+              <a:rPr lang="ko-KR" altLang="ko-KR" sz="1400" dirty="0" err="1">
                 <a:latin typeface="D2Coding" panose="020B0609020101020101" pitchFamily="49" charset="-127"/>
                 <a:ea typeface="D2Coding" panose="020B0609020101020101" pitchFamily="49" charset="-127"/>
               </a:rPr>
               <a:t>CNN에</a:t>
             </a:r>
             <a:r>
-              <a:rPr lang="ko-KR" altLang="ko-KR" sz="1600" dirty="0">
+              <a:rPr lang="ko-KR" altLang="ko-KR" sz="1400" dirty="0">
                 <a:latin typeface="D2Coding" panose="020B0609020101020101" pitchFamily="49" charset="-127"/>
                 <a:ea typeface="D2Coding" panose="020B0609020101020101" pitchFamily="49" charset="-127"/>
               </a:rPr>
               <a:t> </a:t>
             </a:r>
             <a:r>
-              <a:rPr lang="ko-KR" altLang="ko-KR" sz="1600" dirty="0" err="1">
+              <a:rPr lang="ko-KR" altLang="ko-KR" sz="1400" dirty="0" err="1">
                 <a:latin typeface="D2Coding" panose="020B0609020101020101" pitchFamily="49" charset="-127"/>
                 <a:ea typeface="D2Coding" panose="020B0609020101020101" pitchFamily="49" charset="-127"/>
               </a:rPr>
               <a:t>어텐션</a:t>
             </a:r>
             <a:r>
-              <a:rPr lang="en-US" altLang="ko-KR" sz="1600" dirty="0">
+              <a:rPr lang="en-US" altLang="ko-KR" sz="1400" dirty="0">
                 <a:latin typeface="D2Coding" panose="020B0609020101020101" pitchFamily="49" charset="-127"/>
                 <a:ea typeface="D2Coding" panose="020B0609020101020101" pitchFamily="49" charset="-127"/>
               </a:rPr>
               <a:t>(attention) </a:t>
             </a:r>
             <a:r>
-              <a:rPr lang="ko-KR" altLang="en-US" sz="1600" dirty="0" err="1">
+              <a:rPr lang="ko-KR" altLang="en-US" sz="1400" dirty="0" err="1">
                 <a:latin typeface="D2Coding" panose="020B0609020101020101" pitchFamily="49" charset="-127"/>
                 <a:ea typeface="D2Coding" panose="020B0609020101020101" pitchFamily="49" charset="-127"/>
               </a:rPr>
               <a:t>매커니즘</a:t>
             </a:r>
             <a:r>
-              <a:rPr lang="ko-KR" altLang="ko-KR" sz="1600" dirty="0" err="1">
+              <a:rPr lang="ko-KR" altLang="ko-KR" sz="1400" dirty="0" err="1">
                 <a:latin typeface="D2Coding" panose="020B0609020101020101" pitchFamily="49" charset="-127"/>
                 <a:ea typeface="D2Coding" panose="020B0609020101020101" pitchFamily="49" charset="-127"/>
               </a:rPr>
               <a:t>을</a:t>
             </a:r>
             <a:r>
-              <a:rPr lang="ko-KR" altLang="ko-KR" sz="1600" dirty="0">
+              <a:rPr lang="ko-KR" altLang="ko-KR" sz="1400" dirty="0">
                 <a:latin typeface="D2Coding" panose="020B0609020101020101" pitchFamily="49" charset="-127"/>
                 <a:ea typeface="D2Coding" panose="020B0609020101020101" pitchFamily="49" charset="-127"/>
               </a:rPr>
               <a:t> 결합했더니, 레이어가 깊어질수록 인간처럼 영상 속에서 배경에 현혹되지 않고 '행동의 핵심이 되는 인물과 </a:t>
             </a:r>
             <a:r>
-              <a:rPr lang="ko-KR" altLang="ko-KR" sz="1600" dirty="0" err="1">
+              <a:rPr lang="ko-KR" altLang="ko-KR" sz="1400" dirty="0" err="1">
                 <a:latin typeface="D2Coding" panose="020B0609020101020101" pitchFamily="49" charset="-127"/>
                 <a:ea typeface="D2Coding" panose="020B0609020101020101" pitchFamily="49" charset="-127"/>
               </a:rPr>
               <a:t>사물'을</a:t>
             </a:r>
             <a:r>
-              <a:rPr lang="ko-KR" altLang="ko-KR" sz="1600" dirty="0">
+              <a:rPr lang="ko-KR" altLang="ko-KR" sz="1400" dirty="0">
                 <a:latin typeface="D2Coding" panose="020B0609020101020101" pitchFamily="49" charset="-127"/>
                 <a:ea typeface="D2Coding" panose="020B0609020101020101" pitchFamily="49" charset="-127"/>
               </a:rPr>
               <a:t> 스스로 기가 막히게 찾아내어 집중하더라</a:t>
             </a:r>
             <a:r>
-              <a:rPr lang="en-US" altLang="ko-KR" sz="1600" dirty="0">
+              <a:rPr lang="en-US" altLang="ko-KR" sz="1400" dirty="0">
                 <a:latin typeface="D2Coding" panose="020B0609020101020101" pitchFamily="49" charset="-127"/>
                 <a:ea typeface="D2Coding" panose="020B0609020101020101" pitchFamily="49" charset="-127"/>
               </a:rPr>
               <a:t>”</a:t>
             </a:r>
             <a:r>
-              <a:rPr lang="ko-KR" altLang="ko-KR" sz="1600" dirty="0">
+              <a:rPr lang="ko-KR" altLang="ko-KR" sz="1400" dirty="0">
                 <a:latin typeface="D2Coding" panose="020B0609020101020101" pitchFamily="49" charset="-127"/>
                 <a:ea typeface="D2Coding" panose="020B0609020101020101" pitchFamily="49" charset="-127"/>
               </a:rPr>
               <a:t>는 것을 증명하는 </a:t>
             </a:r>
             <a:r>
-              <a:rPr lang="ko-KR" altLang="en-US" sz="1600" dirty="0">
+              <a:rPr lang="ko-KR" altLang="en-US" sz="1400" dirty="0">
                 <a:latin typeface="D2Coding" panose="020B0609020101020101" pitchFamily="49" charset="-127"/>
                 <a:ea typeface="D2Coding" panose="020B0609020101020101" pitchFamily="49" charset="-127"/>
               </a:rPr>
               <a:t>시각 자료</a:t>
             </a:r>
             <a:r>
-              <a:rPr lang="en-US" altLang="ko-KR" sz="1600" dirty="0">
+              <a:rPr lang="en-US" altLang="ko-KR" sz="1400" dirty="0">
                 <a:latin typeface="D2Coding" panose="020B0609020101020101" pitchFamily="49" charset="-127"/>
                 <a:ea typeface="D2Coding" panose="020B0609020101020101" pitchFamily="49" charset="-127"/>
               </a:rPr>
               <a:t>(</a:t>
             </a:r>
             <a:r>
-              <a:rPr lang="ko-KR" altLang="en-US" sz="1600" dirty="0">
+              <a:rPr lang="ko-KR" altLang="en-US" sz="1400" dirty="0">
                 <a:latin typeface="D2Coding" panose="020B0609020101020101" pitchFamily="49" charset="-127"/>
                 <a:ea typeface="D2Coding" panose="020B0609020101020101" pitchFamily="49" charset="-127"/>
               </a:rPr>
               <a:t>논문</a:t>
             </a:r>
             <a:r>
-              <a:rPr lang="en-US" altLang="ko-KR" sz="1600" dirty="0">
+              <a:rPr lang="en-US" altLang="ko-KR" sz="1400" dirty="0">
                 <a:latin typeface="D2Coding" panose="020B0609020101020101" pitchFamily="49" charset="-127"/>
                 <a:ea typeface="D2Coding" panose="020B0609020101020101" pitchFamily="49" charset="-127"/>
               </a:rPr>
               <a:t>)</a:t>
             </a:r>
             <a:r>
-              <a:rPr lang="ko-KR" altLang="en-US" sz="1600" dirty="0">
+              <a:rPr lang="ko-KR" altLang="en-US" sz="1400" dirty="0">
                 <a:latin typeface="D2Coding" panose="020B0609020101020101" pitchFamily="49" charset="-127"/>
                 <a:ea typeface="D2Coding" panose="020B0609020101020101" pitchFamily="49" charset="-127"/>
               </a:rPr>
               <a:t>로 비</a:t>
             </a:r>
             <a:r>
-              <a:rPr lang="ko-KR" altLang="ko-KR" sz="1600" dirty="0">
+              <a:rPr lang="ko-KR" altLang="ko-KR" sz="1400" dirty="0">
                 <a:latin typeface="D2Coding" panose="020B0609020101020101" pitchFamily="49" charset="-127"/>
                 <a:ea typeface="D2Coding" panose="020B0609020101020101" pitchFamily="49" charset="-127"/>
               </a:rPr>
               <a:t>지도 학습(</a:t>
             </a:r>
             <a:r>
-              <a:rPr lang="ko-KR" altLang="ko-KR" sz="1600" dirty="0" err="1">
+              <a:rPr lang="ko-KR" altLang="ko-KR" sz="1400" dirty="0" err="1">
                 <a:latin typeface="D2Coding" panose="020B0609020101020101" pitchFamily="49" charset="-127"/>
                 <a:ea typeface="D2Coding" panose="020B0609020101020101" pitchFamily="49" charset="-127"/>
               </a:rPr>
               <a:t>Unsupervised</a:t>
             </a:r>
             <a:r>
-              <a:rPr lang="ko-KR" altLang="ko-KR" sz="1600" dirty="0">
+              <a:rPr lang="ko-KR" altLang="ko-KR" sz="1400" dirty="0">
                 <a:latin typeface="D2Coding" panose="020B0609020101020101" pitchFamily="49" charset="-127"/>
                 <a:ea typeface="D2Coding" panose="020B0609020101020101" pitchFamily="49" charset="-127"/>
               </a:rPr>
               <a:t>)인데도 정답 없이 스스로 이 핵심 맥락</a:t>
             </a:r>
             <a:r>
-              <a:rPr lang="en-US" altLang="ko-KR" sz="1600" dirty="0">
+              <a:rPr lang="en-US" altLang="ko-KR" sz="1400" dirty="0">
                 <a:latin typeface="D2Coding" panose="020B0609020101020101" pitchFamily="49" charset="-127"/>
                 <a:ea typeface="D2Coding" panose="020B0609020101020101" pitchFamily="49" charset="-127"/>
               </a:rPr>
               <a:t> </a:t>
             </a:r>
             <a:r>
-              <a:rPr lang="ko-KR" altLang="en-US" sz="1600" dirty="0">
+              <a:rPr lang="ko-KR" altLang="en-US" sz="1400" dirty="0">
                 <a:latin typeface="D2Coding" panose="020B0609020101020101" pitchFamily="49" charset="-127"/>
                 <a:ea typeface="D2Coding" panose="020B0609020101020101" pitchFamily="49" charset="-127"/>
               </a:rPr>
@@ -17111,53 +16732,6 @@
           <a:chExt cx="0" cy="0"/>
         </a:xfrm>
       </p:grpSpPr>
-      <p:pic>
-        <p:nvPicPr>
-          <p:cNvPr id="3082" name="Picture 10">
-            <a:extLst>
-              <a:ext uri="{FF2B5EF4-FFF2-40B4-BE49-F238E27FC236}">
-                <a16:creationId xmlns:a16="http://schemas.microsoft.com/office/drawing/2014/main" id="{7C6071FA-7C1A-CB7F-607E-63BFF4BAFFA9}"/>
-              </a:ext>
-            </a:extLst>
-          </p:cNvPr>
-          <p:cNvPicPr>
-            <a:picLocks noChangeAspect="1" noChangeArrowheads="1"/>
-          </p:cNvPicPr>
-          <p:nvPr/>
-        </p:nvPicPr>
-        <p:blipFill>
-          <a:blip r:embed="rId3">
-            <a:extLst>
-              <a:ext uri="{28A0092B-C50C-407E-A947-70E740481C1C}">
-                <a14:useLocalDpi xmlns:a14="http://schemas.microsoft.com/office/drawing/2010/main" val="0"/>
-              </a:ext>
-            </a:extLst>
-          </a:blip>
-          <a:srcRect/>
-          <a:stretch>
-            <a:fillRect/>
-          </a:stretch>
-        </p:blipFill>
-        <p:spPr bwMode="auto">
-          <a:xfrm>
-            <a:off x="313698" y="2499995"/>
-            <a:ext cx="7251057" cy="3449533"/>
-          </a:xfrm>
-          <a:prstGeom prst="rect">
-            <a:avLst/>
-          </a:prstGeom>
-          <a:noFill/>
-          <a:extLst>
-            <a:ext uri="{909E8E84-426E-40DD-AFC4-6F175D3DCCD1}">
-              <a14:hiddenFill xmlns:a14="http://schemas.microsoft.com/office/drawing/2010/main">
-                <a:solidFill>
-                  <a:srgbClr val="FFFFFF"/>
-                </a:solidFill>
-              </a14:hiddenFill>
-            </a:ext>
-          </a:extLst>
-        </p:spPr>
-      </p:pic>
       <p:sp>
         <p:nvSpPr>
           <p:cNvPr id="3" name="제목 1">
@@ -17208,6 +16782,598 @@
           <a:p>
             <a:pPr algn="l"/>
             <a:r>
+              <a:rPr lang="en-US" altLang="ko-KR" sz="2800" b="1" cap="none" dirty="0">
+                <a:latin typeface="Lora" pitchFamily="2" charset="0"/>
+              </a:rPr>
+              <a:t>cosine similarity &amp;</a:t>
+            </a:r>
+            <a:r>
+              <a:rPr lang="ko-KR" altLang="en-US" sz="2800" b="1" cap="none" dirty="0">
+                <a:latin typeface="Lora" pitchFamily="2" charset="0"/>
+              </a:rPr>
+              <a:t> </a:t>
+            </a:r>
+            <a:r>
+              <a:rPr lang="en-US" altLang="ko-KR" sz="2800" b="1" cap="none" dirty="0">
+                <a:latin typeface="Lora" pitchFamily="2" charset="0"/>
+              </a:rPr>
+              <a:t>d</a:t>
+            </a:r>
+            <a:r>
+              <a:rPr lang="ko-KR" altLang="ko-KR" sz="2800" b="1" cap="none" dirty="0" err="1">
+                <a:latin typeface="Lora" pitchFamily="2" charset="0"/>
+              </a:rPr>
+              <a:t>ot-product</a:t>
+            </a:r>
+            <a:endParaRPr lang="en-US" altLang="ko-KR" sz="2800" b="1" cap="none" dirty="0">
+              <a:latin typeface="Lora" pitchFamily="2" charset="0"/>
+            </a:endParaRPr>
+          </a:p>
+        </p:txBody>
+      </p:sp>
+      <p:sp>
+        <p:nvSpPr>
+          <p:cNvPr id="2" name="슬라이드 번호 개체 틀 3">
+            <a:extLst>
+              <a:ext uri="{FF2B5EF4-FFF2-40B4-BE49-F238E27FC236}">
+                <a16:creationId xmlns:a16="http://schemas.microsoft.com/office/drawing/2014/main" id="{AB193797-BAB0-C015-0C4A-F2F879C4F472}"/>
+              </a:ext>
+            </a:extLst>
+          </p:cNvPr>
+          <p:cNvSpPr txBox="1">
+            <a:spLocks/>
+          </p:cNvSpPr>
+          <p:nvPr/>
+        </p:nvSpPr>
+        <p:spPr>
+          <a:xfrm>
+            <a:off x="11123611" y="299420"/>
+            <a:ext cx="753545" cy="365125"/>
+          </a:xfrm>
+          <a:prstGeom prst="rect">
+            <a:avLst/>
+          </a:prstGeom>
+        </p:spPr>
+        <p:txBody>
+          <a:bodyPr vert="horz" lIns="91440" tIns="45720" rIns="91440" bIns="45720" rtlCol="0" anchor="ctr"/>
+          <a:lstStyle>
+            <a:defPPr rtl="0">
+              <a:defRPr lang="ko-KR"/>
+            </a:defPPr>
+            <a:lvl1pPr marL="0" algn="r" defTabSz="914400" rtl="0" eaLnBrk="1" latinLnBrk="0" hangingPunct="1">
+              <a:defRPr sz="1200" kern="1200" baseline="0">
+                <a:solidFill>
+                  <a:schemeClr val="tx1">
+                    <a:lumMod val="65000"/>
+                    <a:lumOff val="35000"/>
+                  </a:schemeClr>
+                </a:solidFill>
+                <a:latin typeface="맑은 고딕" panose="020B0503020000020004" pitchFamily="50" charset="-127"/>
+                <a:ea typeface="맑은 고딕" panose="020B0503020000020004" pitchFamily="50" charset="-127"/>
+                <a:cs typeface="+mn-cs"/>
+              </a:defRPr>
+            </a:lvl1pPr>
+            <a:lvl2pPr marL="457200" algn="l" defTabSz="914400" rtl="0" eaLnBrk="1" latinLnBrk="0" hangingPunct="1">
+              <a:defRPr sz="1800" kern="1200">
+                <a:solidFill>
+                  <a:schemeClr val="tx1"/>
+                </a:solidFill>
+                <a:latin typeface="+mn-lt"/>
+                <a:ea typeface="+mn-ea"/>
+                <a:cs typeface="+mn-cs"/>
+              </a:defRPr>
+            </a:lvl2pPr>
+            <a:lvl3pPr marL="914400" algn="l" defTabSz="914400" rtl="0" eaLnBrk="1" latinLnBrk="0" hangingPunct="1">
+              <a:defRPr sz="1800" kern="1200">
+                <a:solidFill>
+                  <a:schemeClr val="tx1"/>
+                </a:solidFill>
+                <a:latin typeface="+mn-lt"/>
+                <a:ea typeface="+mn-ea"/>
+                <a:cs typeface="+mn-cs"/>
+              </a:defRPr>
+            </a:lvl3pPr>
+            <a:lvl4pPr marL="1371600" algn="l" defTabSz="914400" rtl="0" eaLnBrk="1" latinLnBrk="0" hangingPunct="1">
+              <a:defRPr sz="1800" kern="1200">
+                <a:solidFill>
+                  <a:schemeClr val="tx1"/>
+                </a:solidFill>
+                <a:latin typeface="+mn-lt"/>
+                <a:ea typeface="+mn-ea"/>
+                <a:cs typeface="+mn-cs"/>
+              </a:defRPr>
+            </a:lvl4pPr>
+            <a:lvl5pPr marL="1828800" algn="l" defTabSz="914400" rtl="0" eaLnBrk="1" latinLnBrk="0" hangingPunct="1">
+              <a:defRPr sz="1800" kern="1200">
+                <a:solidFill>
+                  <a:schemeClr val="tx1"/>
+                </a:solidFill>
+                <a:latin typeface="+mn-lt"/>
+                <a:ea typeface="+mn-ea"/>
+                <a:cs typeface="+mn-cs"/>
+              </a:defRPr>
+            </a:lvl5pPr>
+            <a:lvl6pPr marL="2286000" algn="l" defTabSz="914400" rtl="0" eaLnBrk="1" latinLnBrk="0" hangingPunct="1">
+              <a:defRPr sz="1800" kern="1200">
+                <a:solidFill>
+                  <a:schemeClr val="tx1"/>
+                </a:solidFill>
+                <a:latin typeface="+mn-lt"/>
+                <a:ea typeface="+mn-ea"/>
+                <a:cs typeface="+mn-cs"/>
+              </a:defRPr>
+            </a:lvl6pPr>
+            <a:lvl7pPr marL="2743200" algn="l" defTabSz="914400" rtl="0" eaLnBrk="1" latinLnBrk="0" hangingPunct="1">
+              <a:defRPr sz="1800" kern="1200">
+                <a:solidFill>
+                  <a:schemeClr val="tx1"/>
+                </a:solidFill>
+                <a:latin typeface="+mn-lt"/>
+                <a:ea typeface="+mn-ea"/>
+                <a:cs typeface="+mn-cs"/>
+              </a:defRPr>
+            </a:lvl7pPr>
+            <a:lvl8pPr marL="3200400" algn="l" defTabSz="914400" rtl="0" eaLnBrk="1" latinLnBrk="0" hangingPunct="1">
+              <a:defRPr sz="1800" kern="1200">
+                <a:solidFill>
+                  <a:schemeClr val="tx1"/>
+                </a:solidFill>
+                <a:latin typeface="+mn-lt"/>
+                <a:ea typeface="+mn-ea"/>
+                <a:cs typeface="+mn-cs"/>
+              </a:defRPr>
+            </a:lvl8pPr>
+            <a:lvl9pPr marL="3657600" algn="l" defTabSz="914400" rtl="0" eaLnBrk="1" latinLnBrk="0" hangingPunct="1">
+              <a:defRPr sz="1800" kern="1200">
+                <a:solidFill>
+                  <a:schemeClr val="tx1"/>
+                </a:solidFill>
+                <a:latin typeface="+mn-lt"/>
+                <a:ea typeface="+mn-ea"/>
+                <a:cs typeface="+mn-cs"/>
+              </a:defRPr>
+            </a:lvl9pPr>
+          </a:lstStyle>
+          <a:p>
+            <a:fld id="{D57F1E4F-1CFF-5643-939E-217C01CDF565}" type="slidenum">
+              <a:rPr lang="en-US" sz="1400" b="1" smtClean="0">
+                <a:latin typeface="D2Coding" panose="020B0609020101020101" pitchFamily="49" charset="-127"/>
+                <a:ea typeface="D2Coding" panose="020B0609020101020101" pitchFamily="49" charset="-127"/>
+              </a:rPr>
+              <a:pPr/>
+              <a:t>23</a:t>
+            </a:fld>
+            <a:endParaRPr lang="en-US" sz="1400" b="1" dirty="0">
+              <a:latin typeface="D2Coding" panose="020B0609020101020101" pitchFamily="49" charset="-127"/>
+              <a:ea typeface="D2Coding" panose="020B0609020101020101" pitchFamily="49" charset="-127"/>
+            </a:endParaRPr>
+          </a:p>
+        </p:txBody>
+      </p:sp>
+      <p:sp>
+        <p:nvSpPr>
+          <p:cNvPr id="4" name="TextBox 3">
+            <a:extLst>
+              <a:ext uri="{FF2B5EF4-FFF2-40B4-BE49-F238E27FC236}">
+                <a16:creationId xmlns:a16="http://schemas.microsoft.com/office/drawing/2014/main" id="{DEC521B8-E374-12B4-D20B-2956211D5F0C}"/>
+              </a:ext>
+            </a:extLst>
+          </p:cNvPr>
+          <p:cNvSpPr txBox="1"/>
+          <p:nvPr/>
+        </p:nvSpPr>
+        <p:spPr>
+          <a:xfrm>
+            <a:off x="1681104" y="2103418"/>
+            <a:ext cx="2067041" cy="369332"/>
+          </a:xfrm>
+          <a:prstGeom prst="rect">
+            <a:avLst/>
+          </a:prstGeom>
+          <a:noFill/>
+        </p:spPr>
+        <p:txBody>
+          <a:bodyPr wrap="square">
+            <a:spAutoFit/>
+          </a:bodyPr>
+          <a:lstStyle/>
+          <a:p>
+            <a:r>
+              <a:rPr lang="en-US" altLang="ko-KR" dirty="0">
+                <a:solidFill>
+                  <a:srgbClr val="00B0F0"/>
+                </a:solidFill>
+                <a:latin typeface="D2Coding" panose="020B0609020101020101" pitchFamily="49" charset="-127"/>
+                <a:ea typeface="D2Coding" panose="020B0609020101020101" pitchFamily="49" charset="-127"/>
+                <a:sym typeface="Wingdings" panose="05000000000000000000" pitchFamily="2" charset="2"/>
+                <a:hlinkClick r:id="rId3">
+                  <a:extLst>
+                    <a:ext uri="{A12FA001-AC4F-418D-AE19-62706E023703}">
+                      <ahyp:hlinkClr xmlns:ahyp="http://schemas.microsoft.com/office/drawing/2018/hyperlinkcolor" val="tx"/>
+                    </a:ext>
+                  </a:extLst>
+                </a:hlinkClick>
+              </a:rPr>
+              <a:t>Word Embedding</a:t>
+            </a:r>
+            <a:endParaRPr lang="en-US" altLang="ko-KR" dirty="0">
+              <a:solidFill>
+                <a:srgbClr val="00B0F0"/>
+              </a:solidFill>
+              <a:latin typeface="D2Coding" panose="020B0609020101020101" pitchFamily="49" charset="-127"/>
+              <a:ea typeface="D2Coding" panose="020B0609020101020101" pitchFamily="49" charset="-127"/>
+              <a:sym typeface="Wingdings" panose="05000000000000000000" pitchFamily="2" charset="2"/>
+              <a:hlinkClick r:id="rId4">
+                <a:extLst>
+                  <a:ext uri="{A12FA001-AC4F-418D-AE19-62706E023703}">
+                    <ahyp:hlinkClr xmlns:ahyp="http://schemas.microsoft.com/office/drawing/2018/hyperlinkcolor" val="tx"/>
+                  </a:ext>
+                </a:extLst>
+              </a:hlinkClick>
+            </a:endParaRPr>
+          </a:p>
+        </p:txBody>
+      </p:sp>
+      <p:pic>
+        <p:nvPicPr>
+          <p:cNvPr id="5" name="그림 4">
+            <a:extLst>
+              <a:ext uri="{FF2B5EF4-FFF2-40B4-BE49-F238E27FC236}">
+                <a16:creationId xmlns:a16="http://schemas.microsoft.com/office/drawing/2014/main" id="{8DFE1774-6F16-F43C-6EC9-7E6B3A39178A}"/>
+              </a:ext>
+            </a:extLst>
+          </p:cNvPr>
+          <p:cNvPicPr>
+            <a:picLocks noChangeAspect="1"/>
+          </p:cNvPicPr>
+          <p:nvPr/>
+        </p:nvPicPr>
+        <p:blipFill>
+          <a:blip r:embed="rId5"/>
+          <a:stretch>
+            <a:fillRect/>
+          </a:stretch>
+        </p:blipFill>
+        <p:spPr>
+          <a:xfrm>
+            <a:off x="1681104" y="2472750"/>
+            <a:ext cx="2757546" cy="3955110"/>
+          </a:xfrm>
+          <a:prstGeom prst="rect">
+            <a:avLst/>
+          </a:prstGeom>
+          <a:ln>
+            <a:solidFill>
+              <a:schemeClr val="tx1"/>
+            </a:solidFill>
+          </a:ln>
+        </p:spPr>
+      </p:pic>
+      <p:pic>
+        <p:nvPicPr>
+          <p:cNvPr id="6" name="그림 5">
+            <a:extLst>
+              <a:ext uri="{FF2B5EF4-FFF2-40B4-BE49-F238E27FC236}">
+                <a16:creationId xmlns:a16="http://schemas.microsoft.com/office/drawing/2014/main" id="{1FCD1B31-94E7-936E-09C1-D6F1D0E614A3}"/>
+              </a:ext>
+            </a:extLst>
+          </p:cNvPr>
+          <p:cNvPicPr>
+            <a:picLocks noChangeAspect="1"/>
+          </p:cNvPicPr>
+          <p:nvPr/>
+        </p:nvPicPr>
+        <p:blipFill>
+          <a:blip r:embed="rId6"/>
+          <a:stretch>
+            <a:fillRect/>
+          </a:stretch>
+        </p:blipFill>
+        <p:spPr>
+          <a:xfrm>
+            <a:off x="5292522" y="2472749"/>
+            <a:ext cx="5204356" cy="3903267"/>
+          </a:xfrm>
+          <a:prstGeom prst="rect">
+            <a:avLst/>
+          </a:prstGeom>
+          <a:ln>
+            <a:solidFill>
+              <a:schemeClr val="tx1"/>
+            </a:solidFill>
+          </a:ln>
+        </p:spPr>
+      </p:pic>
+      <p:sp>
+        <p:nvSpPr>
+          <p:cNvPr id="10" name="TextBox 9">
+            <a:extLst>
+              <a:ext uri="{FF2B5EF4-FFF2-40B4-BE49-F238E27FC236}">
+                <a16:creationId xmlns:a16="http://schemas.microsoft.com/office/drawing/2014/main" id="{369EE908-39F8-08CA-8C47-B99D4969EC4A}"/>
+              </a:ext>
+            </a:extLst>
+          </p:cNvPr>
+          <p:cNvSpPr txBox="1"/>
+          <p:nvPr/>
+        </p:nvSpPr>
+        <p:spPr>
+          <a:xfrm>
+            <a:off x="590550" y="1216054"/>
+            <a:ext cx="11068050" cy="465320"/>
+          </a:xfrm>
+          <a:prstGeom prst="rect">
+            <a:avLst/>
+          </a:prstGeom>
+          <a:noFill/>
+        </p:spPr>
+        <p:txBody>
+          <a:bodyPr wrap="square">
+            <a:spAutoFit/>
+          </a:bodyPr>
+          <a:lstStyle/>
+          <a:p>
+            <a:pPr marL="285750" indent="-285750">
+              <a:lnSpc>
+                <a:spcPct val="150000"/>
+              </a:lnSpc>
+              <a:buFont typeface="Wingdings" panose="05000000000000000000" pitchFamily="2" charset="2"/>
+              <a:buChar char="v"/>
+            </a:pPr>
+            <a:r>
+              <a:rPr lang="ko-KR" altLang="en-US" dirty="0">
+                <a:latin typeface="D2Coding" panose="020B0609020101020101" pitchFamily="49" charset="-127"/>
+                <a:ea typeface="D2Coding" panose="020B0609020101020101" pitchFamily="49" charset="-127"/>
+              </a:rPr>
+              <a:t>아래</a:t>
+            </a:r>
+            <a:r>
+              <a:rPr lang="en-US" altLang="ko-KR" dirty="0">
+                <a:latin typeface="D2Coding" panose="020B0609020101020101" pitchFamily="49" charset="-127"/>
+                <a:ea typeface="D2Coding" panose="020B0609020101020101" pitchFamily="49" charset="-127"/>
+              </a:rPr>
+              <a:t> </a:t>
+            </a:r>
+            <a:r>
+              <a:rPr lang="ko-KR" altLang="en-US" dirty="0">
+                <a:latin typeface="D2Coding" panose="020B0609020101020101" pitchFamily="49" charset="-127"/>
+                <a:ea typeface="D2Coding" panose="020B0609020101020101" pitchFamily="49" charset="-127"/>
+              </a:rPr>
+              <a:t>단어 간의 내적</a:t>
+            </a:r>
+            <a:r>
+              <a:rPr lang="en-US" altLang="ko-KR" dirty="0">
+                <a:latin typeface="D2Coding" panose="020B0609020101020101" pitchFamily="49" charset="-127"/>
+                <a:ea typeface="D2Coding" panose="020B0609020101020101" pitchFamily="49" charset="-127"/>
+              </a:rPr>
+              <a:t>(dot-product)</a:t>
+            </a:r>
+            <a:r>
+              <a:rPr lang="ko-KR" altLang="en-US" dirty="0">
+                <a:latin typeface="D2Coding" panose="020B0609020101020101" pitchFamily="49" charset="-127"/>
+                <a:ea typeface="D2Coding" panose="020B0609020101020101" pitchFamily="49" charset="-127"/>
+              </a:rPr>
+              <a:t>과 코사인 유사성</a:t>
+            </a:r>
+            <a:r>
+              <a:rPr lang="en-US" altLang="ko-KR" dirty="0">
+                <a:latin typeface="D2Coding" panose="020B0609020101020101" pitchFamily="49" charset="-127"/>
+                <a:ea typeface="D2Coding" panose="020B0609020101020101" pitchFamily="49" charset="-127"/>
+              </a:rPr>
+              <a:t>(cosine similarity)</a:t>
+            </a:r>
+            <a:r>
+              <a:rPr lang="ko-KR" altLang="en-US" dirty="0">
+                <a:latin typeface="D2Coding" panose="020B0609020101020101" pitchFamily="49" charset="-127"/>
+                <a:ea typeface="D2Coding" panose="020B0609020101020101" pitchFamily="49" charset="-127"/>
+              </a:rPr>
+              <a:t>을</a:t>
+            </a:r>
+            <a:r>
+              <a:rPr lang="en-US" altLang="ko-KR" dirty="0">
+                <a:latin typeface="D2Coding" panose="020B0609020101020101" pitchFamily="49" charset="-127"/>
+                <a:ea typeface="D2Coding" panose="020B0609020101020101" pitchFamily="49" charset="-127"/>
+              </a:rPr>
+              <a:t> </a:t>
+            </a:r>
+            <a:r>
+              <a:rPr lang="ko-KR" altLang="en-US" dirty="0">
+                <a:latin typeface="D2Coding" panose="020B0609020101020101" pitchFamily="49" charset="-127"/>
+                <a:ea typeface="D2Coding" panose="020B0609020101020101" pitchFamily="49" charset="-127"/>
+              </a:rPr>
+              <a:t>모두 구하라</a:t>
+            </a:r>
+            <a:endParaRPr lang="ko-KR" altLang="en-US" sz="2000" dirty="0">
+              <a:latin typeface="D2Coding" panose="020B0609020101020101" pitchFamily="49" charset="-127"/>
+              <a:ea typeface="D2Coding" panose="020B0609020101020101" pitchFamily="49" charset="-127"/>
+            </a:endParaRPr>
+          </a:p>
+        </p:txBody>
+      </p:sp>
+      <p:pic>
+        <p:nvPicPr>
+          <p:cNvPr id="1026" name="Picture 2" descr="calculation of cosine of the angle between A and B">
+            <a:extLst>
+              <a:ext uri="{FF2B5EF4-FFF2-40B4-BE49-F238E27FC236}">
+                <a16:creationId xmlns:a16="http://schemas.microsoft.com/office/drawing/2014/main" id="{02212AE0-DE7D-A556-161A-AEC9E2926A16}"/>
+              </a:ext>
+            </a:extLst>
+          </p:cNvPr>
+          <p:cNvPicPr>
+            <a:picLocks noChangeAspect="1" noChangeArrowheads="1"/>
+          </p:cNvPicPr>
+          <p:nvPr/>
+        </p:nvPicPr>
+        <p:blipFill>
+          <a:blip r:embed="rId7">
+            <a:extLst>
+              <a:ext uri="{28A0092B-C50C-407E-A947-70E740481C1C}">
+                <a14:useLocalDpi xmlns:a14="http://schemas.microsoft.com/office/drawing/2010/main" val="0"/>
+              </a:ext>
+            </a:extLst>
+          </a:blip>
+          <a:srcRect/>
+          <a:stretch>
+            <a:fillRect/>
+          </a:stretch>
+        </p:blipFill>
+        <p:spPr bwMode="auto">
+          <a:xfrm>
+            <a:off x="7365929" y="1838031"/>
+            <a:ext cx="3125917" cy="1114422"/>
+          </a:xfrm>
+          <a:prstGeom prst="rect">
+            <a:avLst/>
+          </a:prstGeom>
+          <a:noFill/>
+          <a:ln>
+            <a:solidFill>
+              <a:schemeClr val="tx1"/>
+            </a:solidFill>
+          </a:ln>
+          <a:extLst>
+            <a:ext uri="{909E8E84-426E-40DD-AFC4-6F175D3DCCD1}">
+              <a14:hiddenFill xmlns:a14="http://schemas.microsoft.com/office/drawing/2010/main">
+                <a:solidFill>
+                  <a:srgbClr val="FFFFFF"/>
+                </a:solidFill>
+              </a14:hiddenFill>
+            </a:ext>
+          </a:extLst>
+        </p:spPr>
+      </p:pic>
+    </p:spTree>
+    <p:extLst>
+      <p:ext uri="{BB962C8B-B14F-4D97-AF65-F5344CB8AC3E}">
+        <p14:creationId xmlns:p14="http://schemas.microsoft.com/office/powerpoint/2010/main" val="1268207376"/>
+      </p:ext>
+    </p:extLst>
+  </p:cSld>
+  <p:clrMapOvr>
+    <a:masterClrMapping/>
+  </p:clrMapOvr>
+</p:sld>
+</file>
+
+<file path=ppt/slides/slide24.xml><?xml version="1.0" encoding="utf-8"?>
+<p:sld xmlns:a="http://schemas.openxmlformats.org/drawingml/2006/main" xmlns:r="http://schemas.openxmlformats.org/officeDocument/2006/relationships" xmlns:p="http://schemas.openxmlformats.org/presentationml/2006/main">
+  <p:cSld>
+    <p:spTree>
+      <p:nvGrpSpPr>
+        <p:cNvPr id="1" name="">
+          <a:extLst>
+            <a:ext uri="{FF2B5EF4-FFF2-40B4-BE49-F238E27FC236}">
+              <a16:creationId xmlns:a16="http://schemas.microsoft.com/office/drawing/2014/main" id="{58E43B56-3AB8-6208-001C-955D9B89621E}"/>
+            </a:ext>
+          </a:extLst>
+        </p:cNvPr>
+        <p:cNvGrpSpPr/>
+        <p:nvPr/>
+      </p:nvGrpSpPr>
+      <p:grpSpPr>
+        <a:xfrm>
+          <a:off x="0" y="0"/>
+          <a:ext cx="0" cy="0"/>
+          <a:chOff x="0" y="0"/>
+          <a:chExt cx="0" cy="0"/>
+        </a:xfrm>
+      </p:grpSpPr>
+      <p:pic>
+        <p:nvPicPr>
+          <p:cNvPr id="3082" name="Picture 10">
+            <a:extLst>
+              <a:ext uri="{FF2B5EF4-FFF2-40B4-BE49-F238E27FC236}">
+                <a16:creationId xmlns:a16="http://schemas.microsoft.com/office/drawing/2014/main" id="{1C97C0A8-BD55-E377-C5DB-53C51BBDCC20}"/>
+              </a:ext>
+            </a:extLst>
+          </p:cNvPr>
+          <p:cNvPicPr>
+            <a:picLocks noChangeAspect="1" noChangeArrowheads="1"/>
+          </p:cNvPicPr>
+          <p:nvPr/>
+        </p:nvPicPr>
+        <p:blipFill>
+          <a:blip r:embed="rId3">
+            <a:extLst>
+              <a:ext uri="{28A0092B-C50C-407E-A947-70E740481C1C}">
+                <a14:useLocalDpi xmlns:a14="http://schemas.microsoft.com/office/drawing/2010/main" val="0"/>
+              </a:ext>
+            </a:extLst>
+          </a:blip>
+          <a:srcRect/>
+          <a:stretch>
+            <a:fillRect/>
+          </a:stretch>
+        </p:blipFill>
+        <p:spPr bwMode="auto">
+          <a:xfrm>
+            <a:off x="313698" y="2499995"/>
+            <a:ext cx="7251057" cy="3449533"/>
+          </a:xfrm>
+          <a:prstGeom prst="rect">
+            <a:avLst/>
+          </a:prstGeom>
+          <a:noFill/>
+          <a:extLst>
+            <a:ext uri="{909E8E84-426E-40DD-AFC4-6F175D3DCCD1}">
+              <a14:hiddenFill xmlns:a14="http://schemas.microsoft.com/office/drawing/2010/main">
+                <a:solidFill>
+                  <a:srgbClr val="FFFFFF"/>
+                </a:solidFill>
+              </a14:hiddenFill>
+            </a:ext>
+          </a:extLst>
+        </p:spPr>
+      </p:pic>
+      <p:sp>
+        <p:nvSpPr>
+          <p:cNvPr id="3" name="제목 1">
+            <a:extLst>
+              <a:ext uri="{FF2B5EF4-FFF2-40B4-BE49-F238E27FC236}">
+                <a16:creationId xmlns:a16="http://schemas.microsoft.com/office/drawing/2014/main" id="{4A44F9FF-4873-CC2F-50C5-B80873536457}"/>
+              </a:ext>
+            </a:extLst>
+          </p:cNvPr>
+          <p:cNvSpPr txBox="1">
+            <a:spLocks/>
+          </p:cNvSpPr>
+          <p:nvPr/>
+        </p:nvSpPr>
+        <p:spPr>
+          <a:xfrm>
+            <a:off x="475645" y="481983"/>
+            <a:ext cx="10353762" cy="766439"/>
+          </a:xfrm>
+          <a:prstGeom prst="rect">
+            <a:avLst/>
+          </a:prstGeom>
+        </p:spPr>
+        <p:txBody>
+          <a:bodyPr vert="horz" lIns="91440" tIns="45720" rIns="91440" bIns="45720" rtlCol="0" anchor="ctr">
+            <a:normAutofit/>
+          </a:bodyPr>
+          <a:lstStyle>
+            <a:lvl1pPr algn="ctr" defTabSz="914400" rtl="0" eaLnBrk="1" latinLnBrk="1" hangingPunct="1">
+              <a:lnSpc>
+                <a:spcPct val="90000"/>
+              </a:lnSpc>
+              <a:spcBef>
+                <a:spcPct val="0"/>
+              </a:spcBef>
+              <a:buNone/>
+              <a:defRPr sz="3200" kern="1200" cap="all" baseline="0">
+                <a:solidFill>
+                  <a:schemeClr val="tx1"/>
+                </a:solidFill>
+                <a:effectLst/>
+                <a:latin typeface="Batang" panose="02030600000101010101" pitchFamily="18" charset="-127"/>
+                <a:ea typeface="Batang" panose="02030600000101010101" pitchFamily="18" charset="-127"/>
+                <a:cs typeface="+mj-cs"/>
+              </a:defRPr>
+            </a:lvl1pPr>
+          </a:lstStyle>
+          <a:p>
+            <a:pPr algn="l"/>
+            <a:r>
               <a:rPr lang="ko-KR" altLang="ko-KR" sz="2800" b="1" cap="none" dirty="0" err="1">
                 <a:latin typeface="Lora" pitchFamily="2" charset="0"/>
               </a:rPr>
@@ -17239,7 +17405,7 @@
           <p:cNvPr id="3076" name="Picture 4">
             <a:extLst>
               <a:ext uri="{FF2B5EF4-FFF2-40B4-BE49-F238E27FC236}">
-                <a16:creationId xmlns:a16="http://schemas.microsoft.com/office/drawing/2014/main" id="{CD669AAA-54B3-98CF-C051-BF2F06E8A0C9}"/>
+                <a16:creationId xmlns:a16="http://schemas.microsoft.com/office/drawing/2014/main" id="{29F0CE62-6F9F-A881-7658-690856E5B135}"/>
               </a:ext>
             </a:extLst>
           </p:cNvPr>
@@ -17286,7 +17452,7 @@
           <p:cNvPr id="7" name="그림 6">
             <a:extLst>
               <a:ext uri="{FF2B5EF4-FFF2-40B4-BE49-F238E27FC236}">
-                <a16:creationId xmlns:a16="http://schemas.microsoft.com/office/drawing/2014/main" id="{9878B6AB-E92F-575A-2BB1-A9BE449105BB}"/>
+                <a16:creationId xmlns:a16="http://schemas.microsoft.com/office/drawing/2014/main" id="{DCE07A69-4DEF-BB11-0AF7-9DA2F7B412DF}"/>
               </a:ext>
             </a:extLst>
           </p:cNvPr>
@@ -17316,7 +17482,7 @@
           <p:cNvPr id="11" name="그림 10">
             <a:extLst>
               <a:ext uri="{FF2B5EF4-FFF2-40B4-BE49-F238E27FC236}">
-                <a16:creationId xmlns:a16="http://schemas.microsoft.com/office/drawing/2014/main" id="{22D3A837-B3CC-CBED-65B8-CE7CE1B28E98}"/>
+                <a16:creationId xmlns:a16="http://schemas.microsoft.com/office/drawing/2014/main" id="{B5060E88-1A3A-D901-C26B-3331FC72F3DD}"/>
               </a:ext>
             </a:extLst>
           </p:cNvPr>
@@ -17346,7 +17512,7 @@
           <p:cNvPr id="12" name="TextBox 11">
             <a:extLst>
               <a:ext uri="{FF2B5EF4-FFF2-40B4-BE49-F238E27FC236}">
-                <a16:creationId xmlns:a16="http://schemas.microsoft.com/office/drawing/2014/main" id="{ACF5F620-4B5E-E90A-BF27-690A6AEB5EF1}"/>
+                <a16:creationId xmlns:a16="http://schemas.microsoft.com/office/drawing/2014/main" id="{2C50A4BA-C061-C143-6781-16049570F5E2}"/>
               </a:ext>
             </a:extLst>
           </p:cNvPr>
@@ -17355,7 +17521,7 @@
         </p:nvSpPr>
         <p:spPr>
           <a:xfrm>
-            <a:off x="599440" y="1248422"/>
+            <a:off x="599440" y="1210322"/>
             <a:ext cx="11318240" cy="793166"/>
           </a:xfrm>
           <a:prstGeom prst="rect">
@@ -17466,7 +17632,7 @@
           <p:cNvPr id="2" name="슬라이드 번호 개체 틀 3">
             <a:extLst>
               <a:ext uri="{FF2B5EF4-FFF2-40B4-BE49-F238E27FC236}">
-                <a16:creationId xmlns:a16="http://schemas.microsoft.com/office/drawing/2014/main" id="{AB193797-BAB0-C015-0C4A-F2F879C4F472}"/>
+                <a16:creationId xmlns:a16="http://schemas.microsoft.com/office/drawing/2014/main" id="{3EDB40D1-30F7-D8DD-BEBB-514D7801CDA5}"/>
               </a:ext>
             </a:extLst>
           </p:cNvPr>
@@ -17591,7 +17757,7 @@
                 <a:ea typeface="D2Coding" panose="020B0609020101020101" pitchFamily="49" charset="-127"/>
               </a:rPr>
               <a:pPr/>
-              <a:t>23</a:t>
+              <a:t>24</a:t>
             </a:fld>
             <a:endParaRPr lang="en-US" sz="1400" b="1" dirty="0">
               <a:latin typeface="D2Coding" panose="020B0609020101020101" pitchFamily="49" charset="-127"/>
@@ -17603,7 +17769,7 @@
     </p:spTree>
     <p:extLst>
       <p:ext uri="{BB962C8B-B14F-4D97-AF65-F5344CB8AC3E}">
-        <p14:creationId xmlns:p14="http://schemas.microsoft.com/office/powerpoint/2010/main" val="1268207376"/>
+        <p14:creationId xmlns:p14="http://schemas.microsoft.com/office/powerpoint/2010/main" val="1707588756"/>
       </p:ext>
     </p:extLst>
   </p:cSld>
@@ -17613,7 +17779,7 @@
 </p:sld>
 </file>
 
-<file path=ppt/slides/slide24.xml><?xml version="1.0" encoding="utf-8"?>
+<file path=ppt/slides/slide25.xml><?xml version="1.0" encoding="utf-8"?>
 <p:sld xmlns:a="http://schemas.openxmlformats.org/drawingml/2006/main" xmlns:r="http://schemas.openxmlformats.org/officeDocument/2006/relationships" xmlns:p="http://schemas.openxmlformats.org/presentationml/2006/main">
   <p:cSld>
     <p:spTree>
@@ -18622,7 +18788,7 @@
                 <a:ea typeface="D2Coding" panose="020B0609020101020101" pitchFamily="49" charset="-127"/>
               </a:rPr>
               <a:pPr/>
-              <a:t>24</a:t>
+              <a:t>25</a:t>
             </a:fld>
             <a:endParaRPr lang="en-US" sz="1400" b="1" dirty="0">
               <a:latin typeface="D2Coding" panose="020B0609020101020101" pitchFamily="49" charset="-127"/>
@@ -19596,7 +19762,7 @@
 </p:sld>
 </file>
 
-<file path=ppt/slides/slide25.xml><?xml version="1.0" encoding="utf-8"?>
+<file path=ppt/slides/slide26.xml><?xml version="1.0" encoding="utf-8"?>
 <p:sld xmlns:a="http://schemas.openxmlformats.org/drawingml/2006/main" xmlns:r="http://schemas.openxmlformats.org/officeDocument/2006/relationships" xmlns:p="http://schemas.openxmlformats.org/presentationml/2006/main">
   <p:cSld>
     <p:spTree>
@@ -20900,7 +21066,7 @@
                 <a:ea typeface="D2Coding" panose="020B0609020101020101" pitchFamily="49" charset="-127"/>
               </a:rPr>
               <a:pPr/>
-              <a:t>25</a:t>
+              <a:t>26</a:t>
             </a:fld>
             <a:endParaRPr lang="en-US" sz="1400" b="1" dirty="0">
               <a:latin typeface="D2Coding" panose="020B0609020101020101" pitchFamily="49" charset="-127"/>
@@ -20922,7 +21088,7 @@
 </p:sld>
 </file>
 
-<file path=ppt/slides/slide26.xml><?xml version="1.0" encoding="utf-8"?>
+<file path=ppt/slides/slide27.xml><?xml version="1.0" encoding="utf-8"?>
 <p:sld xmlns:a="http://schemas.openxmlformats.org/drawingml/2006/main" xmlns:r="http://schemas.openxmlformats.org/officeDocument/2006/relationships" xmlns:p="http://schemas.openxmlformats.org/presentationml/2006/main">
   <p:cSld>
     <p:spTree>
@@ -22389,7 +22555,7 @@
                 <a:ea typeface="D2Coding" panose="020B0609020101020101" pitchFamily="49" charset="-127"/>
               </a:rPr>
               <a:pPr/>
-              <a:t>26</a:t>
+              <a:t>27</a:t>
             </a:fld>
             <a:endParaRPr lang="en-US" sz="1400" b="1" dirty="0">
               <a:latin typeface="D2Coding" panose="020B0609020101020101" pitchFamily="49" charset="-127"/>
@@ -22411,7 +22577,7 @@
 </p:sld>
 </file>
 
-<file path=ppt/slides/slide27.xml><?xml version="1.0" encoding="utf-8"?>
+<file path=ppt/slides/slide28.xml><?xml version="1.0" encoding="utf-8"?>
 <p:sld xmlns:a="http://schemas.openxmlformats.org/drawingml/2006/main" xmlns:r="http://schemas.openxmlformats.org/officeDocument/2006/relationships" xmlns:p="http://schemas.openxmlformats.org/presentationml/2006/main">
   <p:cSld>
     <p:spTree>
@@ -23790,7 +23956,7 @@
                 <a:ea typeface="D2Coding" panose="020B0609020101020101" pitchFamily="49" charset="-127"/>
               </a:rPr>
               <a:pPr/>
-              <a:t>27</a:t>
+              <a:t>28</a:t>
             </a:fld>
             <a:endParaRPr lang="en-US" sz="1400" b="1" dirty="0">
               <a:latin typeface="D2Coding" panose="020B0609020101020101" pitchFamily="49" charset="-127"/>
@@ -23854,7 +24020,7 @@
 </p:sld>
 </file>
 
-<file path=ppt/slides/slide28.xml><?xml version="1.0" encoding="utf-8"?>
+<file path=ppt/slides/slide29.xml><?xml version="1.0" encoding="utf-8"?>
 <p:sld xmlns:a="http://schemas.openxmlformats.org/drawingml/2006/main" xmlns:r="http://schemas.openxmlformats.org/officeDocument/2006/relationships" xmlns:p="http://schemas.openxmlformats.org/presentationml/2006/main">
   <p:cSld>
     <p:spTree>
@@ -24718,7 +24884,7 @@
                 <a:ea typeface="D2Coding" panose="020B0609020101020101" pitchFamily="49" charset="-127"/>
               </a:rPr>
               <a:pPr/>
-              <a:t>28</a:t>
+              <a:t>29</a:t>
             </a:fld>
             <a:endParaRPr lang="en-US" sz="1400" b="1" dirty="0">
               <a:latin typeface="D2Coding" panose="020B0609020101020101" pitchFamily="49" charset="-127"/>
@@ -24901,1932 +25067,6 @@
 </p:sld>
 </file>
 
-<file path=ppt/slides/slide29.xml><?xml version="1.0" encoding="utf-8"?>
-<p:sld xmlns:a="http://schemas.openxmlformats.org/drawingml/2006/main" xmlns:r="http://schemas.openxmlformats.org/officeDocument/2006/relationships" xmlns:p="http://schemas.openxmlformats.org/presentationml/2006/main">
-  <p:cSld>
-    <p:spTree>
-      <p:nvGrpSpPr>
-        <p:cNvPr id="1" name="">
-          <a:extLst>
-            <a:ext uri="{FF2B5EF4-FFF2-40B4-BE49-F238E27FC236}">
-              <a16:creationId xmlns:a16="http://schemas.microsoft.com/office/drawing/2014/main" id="{EDD5BA04-637B-645C-99DF-7D88A1253A68}"/>
-            </a:ext>
-          </a:extLst>
-        </p:cNvPr>
-        <p:cNvGrpSpPr/>
-        <p:nvPr/>
-      </p:nvGrpSpPr>
-      <p:grpSpPr>
-        <a:xfrm>
-          <a:off x="0" y="0"/>
-          <a:ext cx="0" cy="0"/>
-          <a:chOff x="0" y="0"/>
-          <a:chExt cx="0" cy="0"/>
-        </a:xfrm>
-      </p:grpSpPr>
-      <p:sp>
-        <p:nvSpPr>
-          <p:cNvPr id="3" name="제목 1">
-            <a:extLst>
-              <a:ext uri="{FF2B5EF4-FFF2-40B4-BE49-F238E27FC236}">
-                <a16:creationId xmlns:a16="http://schemas.microsoft.com/office/drawing/2014/main" id="{3CF5DFFC-9095-DCA0-C08C-70FAA0EC7501}"/>
-              </a:ext>
-            </a:extLst>
-          </p:cNvPr>
-          <p:cNvSpPr txBox="1">
-            <a:spLocks/>
-          </p:cNvSpPr>
-          <p:nvPr/>
-        </p:nvSpPr>
-        <p:spPr>
-          <a:xfrm>
-            <a:off x="475645" y="481983"/>
-            <a:ext cx="10353762" cy="766439"/>
-          </a:xfrm>
-          <a:prstGeom prst="rect">
-            <a:avLst/>
-          </a:prstGeom>
-        </p:spPr>
-        <p:txBody>
-          <a:bodyPr vert="horz" lIns="91440" tIns="45720" rIns="91440" bIns="45720" rtlCol="0" anchor="ctr">
-            <a:normAutofit/>
-          </a:bodyPr>
-          <a:lstStyle>
-            <a:lvl1pPr algn="ctr" defTabSz="914400" rtl="0" eaLnBrk="1" latinLnBrk="1" hangingPunct="1">
-              <a:lnSpc>
-                <a:spcPct val="90000"/>
-              </a:lnSpc>
-              <a:spcBef>
-                <a:spcPct val="0"/>
-              </a:spcBef>
-              <a:buNone/>
-              <a:defRPr sz="3200" kern="1200" cap="all" baseline="0">
-                <a:solidFill>
-                  <a:schemeClr val="tx1"/>
-                </a:solidFill>
-                <a:effectLst/>
-                <a:latin typeface="Batang" panose="02030600000101010101" pitchFamily="18" charset="-127"/>
-                <a:ea typeface="Batang" panose="02030600000101010101" pitchFamily="18" charset="-127"/>
-                <a:cs typeface="+mj-cs"/>
-              </a:defRPr>
-            </a:lvl1pPr>
-          </a:lstStyle>
-          <a:p>
-            <a:pPr algn="l"/>
-            <a:r>
-              <a:rPr lang="en-US" altLang="ko-KR" sz="2800" b="1" cap="none" dirty="0">
-                <a:latin typeface="Lora" pitchFamily="2" charset="0"/>
-              </a:rPr>
-              <a:t>Q, K, V Attention(Query, Key, Value Attention)</a:t>
-            </a:r>
-          </a:p>
-        </p:txBody>
-      </p:sp>
-      <p:sp>
-        <p:nvSpPr>
-          <p:cNvPr id="5" name="TextBox 4">
-            <a:extLst>
-              <a:ext uri="{FF2B5EF4-FFF2-40B4-BE49-F238E27FC236}">
-                <a16:creationId xmlns:a16="http://schemas.microsoft.com/office/drawing/2014/main" id="{36742539-1047-AADF-A318-E21EC294A720}"/>
-              </a:ext>
-            </a:extLst>
-          </p:cNvPr>
-          <p:cNvSpPr txBox="1"/>
-          <p:nvPr/>
-        </p:nvSpPr>
-        <p:spPr>
-          <a:xfrm>
-            <a:off x="600074" y="1383864"/>
-            <a:ext cx="8686801" cy="1246495"/>
-          </a:xfrm>
-          <a:prstGeom prst="rect">
-            <a:avLst/>
-          </a:prstGeom>
-          <a:solidFill>
-            <a:srgbClr val="76E3FF"/>
-          </a:solidFill>
-        </p:spPr>
-        <p:txBody>
-          <a:bodyPr wrap="square">
-            <a:spAutoFit/>
-          </a:bodyPr>
-          <a:lstStyle/>
-          <a:p>
-            <a:r>
-              <a:rPr lang="ko-KR" altLang="en-US" sz="1500" dirty="0">
-                <a:latin typeface="D2Coding" panose="020B0609020101020101" pitchFamily="49" charset="-127"/>
-                <a:ea typeface="D2Coding" panose="020B0609020101020101" pitchFamily="49" charset="-127"/>
-              </a:rPr>
-              <a:t># </a:t>
-            </a:r>
-            <a:r>
-              <a:rPr lang="ko-KR" altLang="en-US" sz="1500" dirty="0" err="1">
-                <a:latin typeface="D2Coding" panose="020B0609020101020101" pitchFamily="49" charset="-127"/>
-                <a:ea typeface="D2Coding" panose="020B0609020101020101" pitchFamily="49" charset="-127"/>
-              </a:rPr>
-              <a:t>target</a:t>
-            </a:r>
-            <a:r>
-              <a:rPr lang="ko-KR" altLang="en-US" sz="1500" dirty="0">
-                <a:latin typeface="D2Coding" panose="020B0609020101020101" pitchFamily="49" charset="-127"/>
-                <a:ea typeface="D2Coding" panose="020B0609020101020101" pitchFamily="49" charset="-127"/>
-              </a:rPr>
-              <a:t> = </a:t>
-            </a:r>
-            <a:r>
-              <a:rPr lang="ko-KR" altLang="en-US" sz="1500" dirty="0" err="1">
-                <a:latin typeface="D2Coding" panose="020B0609020101020101" pitchFamily="49" charset="-127"/>
-                <a:ea typeface="D2Coding" panose="020B0609020101020101" pitchFamily="49" charset="-127"/>
-              </a:rPr>
-              <a:t>Query</a:t>
-            </a:r>
-            <a:r>
-              <a:rPr lang="ko-KR" altLang="en-US" sz="1500" dirty="0">
-                <a:latin typeface="D2Coding" panose="020B0609020101020101" pitchFamily="49" charset="-127"/>
-                <a:ea typeface="D2Coding" panose="020B0609020101020101" pitchFamily="49" charset="-127"/>
-              </a:rPr>
-              <a:t> 역할 / </a:t>
-            </a:r>
-            <a:r>
-              <a:rPr lang="ko-KR" altLang="en-US" sz="1500" dirty="0" err="1">
-                <a:latin typeface="D2Coding" panose="020B0609020101020101" pitchFamily="49" charset="-127"/>
-                <a:ea typeface="D2Coding" panose="020B0609020101020101" pitchFamily="49" charset="-127"/>
-              </a:rPr>
-              <a:t>s</a:t>
-            </a:r>
-            <a:r>
-              <a:rPr lang="ko-KR" altLang="en-US" sz="1500" dirty="0">
-                <a:latin typeface="D2Coding" panose="020B0609020101020101" pitchFamily="49" charset="-127"/>
-                <a:ea typeface="D2Coding" panose="020B0609020101020101" pitchFamily="49" charset="-127"/>
-              </a:rPr>
-              <a:t> = </a:t>
-            </a:r>
-            <a:r>
-              <a:rPr lang="ko-KR" altLang="en-US" sz="1500" dirty="0" err="1">
-                <a:latin typeface="D2Coding" panose="020B0609020101020101" pitchFamily="49" charset="-127"/>
-                <a:ea typeface="D2Coding" panose="020B0609020101020101" pitchFamily="49" charset="-127"/>
-              </a:rPr>
-              <a:t>Key와</a:t>
-            </a:r>
-            <a:r>
-              <a:rPr lang="ko-KR" altLang="en-US" sz="1500" dirty="0">
-                <a:latin typeface="D2Coding" panose="020B0609020101020101" pitchFamily="49" charset="-127"/>
-                <a:ea typeface="D2Coding" panose="020B0609020101020101" pitchFamily="49" charset="-127"/>
-              </a:rPr>
-              <a:t> </a:t>
-            </a:r>
-            <a:r>
-              <a:rPr lang="ko-KR" altLang="en-US" sz="1500" dirty="0" err="1">
-                <a:latin typeface="D2Coding" panose="020B0609020101020101" pitchFamily="49" charset="-127"/>
-                <a:ea typeface="D2Coding" panose="020B0609020101020101" pitchFamily="49" charset="-127"/>
-              </a:rPr>
-              <a:t>Value</a:t>
-            </a:r>
-            <a:r>
-              <a:rPr lang="ko-KR" altLang="en-US" sz="1500" dirty="0">
-                <a:latin typeface="D2Coding" panose="020B0609020101020101" pitchFamily="49" charset="-127"/>
-                <a:ea typeface="D2Coding" panose="020B0609020101020101" pitchFamily="49" charset="-127"/>
-              </a:rPr>
-              <a:t> 역할을 동시에 함 (재탕)</a:t>
-            </a:r>
-          </a:p>
-          <a:p>
-            <a:r>
-              <a:rPr lang="ko-KR" altLang="en-US" sz="1500" dirty="0" err="1">
-                <a:latin typeface="D2Coding" panose="020B0609020101020101" pitchFamily="49" charset="-127"/>
-                <a:ea typeface="D2Coding" panose="020B0609020101020101" pitchFamily="49" charset="-127"/>
-              </a:rPr>
-              <a:t>raw_scores</a:t>
-            </a:r>
-            <a:r>
-              <a:rPr lang="ko-KR" altLang="en-US" sz="1500" dirty="0">
-                <a:latin typeface="D2Coding" panose="020B0609020101020101" pitchFamily="49" charset="-127"/>
-                <a:ea typeface="D2Coding" panose="020B0609020101020101" pitchFamily="49" charset="-127"/>
-              </a:rPr>
-              <a:t> = </a:t>
-            </a:r>
-            <a:r>
-              <a:rPr lang="ko-KR" altLang="en-US" sz="1500" dirty="0" err="1">
-                <a:latin typeface="D2Coding" panose="020B0609020101020101" pitchFamily="49" charset="-127"/>
-                <a:ea typeface="D2Coding" panose="020B0609020101020101" pitchFamily="49" charset="-127"/>
-              </a:rPr>
-              <a:t>np.array</a:t>
-            </a:r>
-            <a:r>
-              <a:rPr lang="ko-KR" altLang="en-US" sz="1500" dirty="0">
-                <a:latin typeface="D2Coding" panose="020B0609020101020101" pitchFamily="49" charset="-127"/>
-                <a:ea typeface="D2Coding" panose="020B0609020101020101" pitchFamily="49" charset="-127"/>
-              </a:rPr>
-              <a:t>([</a:t>
-            </a:r>
-            <a:r>
-              <a:rPr lang="ko-KR" altLang="en-US" sz="1500" dirty="0" err="1">
-                <a:latin typeface="D2Coding" panose="020B0609020101020101" pitchFamily="49" charset="-127"/>
-                <a:ea typeface="D2Coding" panose="020B0609020101020101" pitchFamily="49" charset="-127"/>
-              </a:rPr>
-              <a:t>score</a:t>
-            </a:r>
-            <a:r>
-              <a:rPr lang="ko-KR" altLang="en-US" sz="1500" dirty="0">
-                <a:latin typeface="D2Coding" panose="020B0609020101020101" pitchFamily="49" charset="-127"/>
-                <a:ea typeface="D2Coding" panose="020B0609020101020101" pitchFamily="49" charset="-127"/>
-              </a:rPr>
-              <a:t>(</a:t>
-            </a:r>
-            <a:r>
-              <a:rPr lang="ko-KR" altLang="en-US" sz="1500" dirty="0" err="1">
-                <a:latin typeface="D2Coding" panose="020B0609020101020101" pitchFamily="49" charset="-127"/>
-                <a:ea typeface="D2Coding" panose="020B0609020101020101" pitchFamily="49" charset="-127"/>
-              </a:rPr>
-              <a:t>target</a:t>
-            </a:r>
-            <a:r>
-              <a:rPr lang="ko-KR" altLang="en-US" sz="1500" dirty="0">
-                <a:latin typeface="D2Coding" panose="020B0609020101020101" pitchFamily="49" charset="-127"/>
-                <a:ea typeface="D2Coding" panose="020B0609020101020101" pitchFamily="49" charset="-127"/>
-              </a:rPr>
-              <a:t>, </a:t>
-            </a:r>
-            <a:r>
-              <a:rPr lang="ko-KR" altLang="en-US" sz="1500" dirty="0" err="1">
-                <a:latin typeface="D2Coding" panose="020B0609020101020101" pitchFamily="49" charset="-127"/>
-                <a:ea typeface="D2Coding" panose="020B0609020101020101" pitchFamily="49" charset="-127"/>
-              </a:rPr>
-              <a:t>s</a:t>
-            </a:r>
-            <a:r>
-              <a:rPr lang="ko-KR" altLang="en-US" sz="1500" dirty="0">
-                <a:latin typeface="D2Coding" panose="020B0609020101020101" pitchFamily="49" charset="-127"/>
-                <a:ea typeface="D2Coding" panose="020B0609020101020101" pitchFamily="49" charset="-127"/>
-              </a:rPr>
-              <a:t>) </a:t>
-            </a:r>
-            <a:r>
-              <a:rPr lang="ko-KR" altLang="en-US" sz="1500" dirty="0" err="1">
-                <a:latin typeface="D2Coding" panose="020B0609020101020101" pitchFamily="49" charset="-127"/>
-                <a:ea typeface="D2Coding" panose="020B0609020101020101" pitchFamily="49" charset="-127"/>
-              </a:rPr>
-              <a:t>for</a:t>
-            </a:r>
-            <a:r>
-              <a:rPr lang="ko-KR" altLang="en-US" sz="1500" dirty="0">
-                <a:latin typeface="D2Coding" panose="020B0609020101020101" pitchFamily="49" charset="-127"/>
-                <a:ea typeface="D2Coding" panose="020B0609020101020101" pitchFamily="49" charset="-127"/>
-              </a:rPr>
-              <a:t> </a:t>
-            </a:r>
-            <a:r>
-              <a:rPr lang="ko-KR" altLang="en-US" sz="1500" dirty="0" err="1">
-                <a:latin typeface="D2Coding" panose="020B0609020101020101" pitchFamily="49" charset="-127"/>
-                <a:ea typeface="D2Coding" panose="020B0609020101020101" pitchFamily="49" charset="-127"/>
-              </a:rPr>
-              <a:t>s</a:t>
-            </a:r>
-            <a:r>
-              <a:rPr lang="ko-KR" altLang="en-US" sz="1500" dirty="0">
-                <a:latin typeface="D2Coding" panose="020B0609020101020101" pitchFamily="49" charset="-127"/>
-                <a:ea typeface="D2Coding" panose="020B0609020101020101" pitchFamily="49" charset="-127"/>
-              </a:rPr>
-              <a:t> </a:t>
-            </a:r>
-            <a:r>
-              <a:rPr lang="ko-KR" altLang="en-US" sz="1500" dirty="0" err="1">
-                <a:latin typeface="D2Coding" panose="020B0609020101020101" pitchFamily="49" charset="-127"/>
-                <a:ea typeface="D2Coding" panose="020B0609020101020101" pitchFamily="49" charset="-127"/>
-              </a:rPr>
-              <a:t>in</a:t>
-            </a:r>
-            <a:r>
-              <a:rPr lang="ko-KR" altLang="en-US" sz="1500" dirty="0">
-                <a:latin typeface="D2Coding" panose="020B0609020101020101" pitchFamily="49" charset="-127"/>
-                <a:ea typeface="D2Coding" panose="020B0609020101020101" pitchFamily="49" charset="-127"/>
-              </a:rPr>
-              <a:t> </a:t>
-            </a:r>
-            <a:r>
-              <a:rPr lang="ko-KR" altLang="en-US" sz="1500" dirty="0" err="1">
-                <a:latin typeface="D2Coding" panose="020B0609020101020101" pitchFamily="49" charset="-127"/>
-                <a:ea typeface="D2Coding" panose="020B0609020101020101" pitchFamily="49" charset="-127"/>
-              </a:rPr>
-              <a:t>sources</a:t>
-            </a:r>
-            <a:r>
-              <a:rPr lang="ko-KR" altLang="en-US" sz="1500" dirty="0">
-                <a:latin typeface="D2Coding" panose="020B0609020101020101" pitchFamily="49" charset="-127"/>
-                <a:ea typeface="D2Coding" panose="020B0609020101020101" pitchFamily="49" charset="-127"/>
-              </a:rPr>
-              <a:t>]) # 여기서 </a:t>
-            </a:r>
-            <a:r>
-              <a:rPr lang="ko-KR" altLang="en-US" sz="1500" dirty="0" err="1">
-                <a:latin typeface="D2Coding" panose="020B0609020101020101" pitchFamily="49" charset="-127"/>
-                <a:ea typeface="D2Coding" panose="020B0609020101020101" pitchFamily="49" charset="-127"/>
-              </a:rPr>
-              <a:t>s</a:t>
-            </a:r>
-            <a:r>
-              <a:rPr lang="ko-KR" altLang="en-US" sz="1500" dirty="0">
-                <a:latin typeface="D2Coding" panose="020B0609020101020101" pitchFamily="49" charset="-127"/>
-                <a:ea typeface="D2Coding" panose="020B0609020101020101" pitchFamily="49" charset="-127"/>
-              </a:rPr>
-              <a:t> (기준)</a:t>
-            </a:r>
-          </a:p>
-          <a:p>
-            <a:r>
-              <a:rPr lang="ko-KR" altLang="en-US" sz="1500" dirty="0" err="1">
-                <a:latin typeface="D2Coding" panose="020B0609020101020101" pitchFamily="49" charset="-127"/>
-                <a:ea typeface="D2Coding" panose="020B0609020101020101" pitchFamily="49" charset="-127"/>
-              </a:rPr>
-              <a:t>attention_weights</a:t>
-            </a:r>
-            <a:r>
-              <a:rPr lang="ko-KR" altLang="en-US" sz="1500" dirty="0">
-                <a:latin typeface="D2Coding" panose="020B0609020101020101" pitchFamily="49" charset="-127"/>
-                <a:ea typeface="D2Coding" panose="020B0609020101020101" pitchFamily="49" charset="-127"/>
-              </a:rPr>
-              <a:t> = </a:t>
-            </a:r>
-            <a:r>
-              <a:rPr lang="ko-KR" altLang="en-US" sz="1500" dirty="0" err="1">
-                <a:latin typeface="D2Coding" panose="020B0609020101020101" pitchFamily="49" charset="-127"/>
-                <a:ea typeface="D2Coding" panose="020B0609020101020101" pitchFamily="49" charset="-127"/>
-              </a:rPr>
-              <a:t>softmax</a:t>
-            </a:r>
-            <a:r>
-              <a:rPr lang="ko-KR" altLang="en-US" sz="1500" dirty="0">
-                <a:latin typeface="D2Coding" panose="020B0609020101020101" pitchFamily="49" charset="-127"/>
-                <a:ea typeface="D2Coding" panose="020B0609020101020101" pitchFamily="49" charset="-127"/>
-              </a:rPr>
-              <a:t>(</a:t>
-            </a:r>
-            <a:r>
-              <a:rPr lang="ko-KR" altLang="en-US" sz="1500" dirty="0" err="1">
-                <a:latin typeface="D2Coding" panose="020B0609020101020101" pitchFamily="49" charset="-127"/>
-                <a:ea typeface="D2Coding" panose="020B0609020101020101" pitchFamily="49" charset="-127"/>
-              </a:rPr>
-              <a:t>raw_scores</a:t>
-            </a:r>
-            <a:r>
-              <a:rPr lang="ko-KR" altLang="en-US" sz="1500" dirty="0">
-                <a:latin typeface="D2Coding" panose="020B0609020101020101" pitchFamily="49" charset="-127"/>
-                <a:ea typeface="D2Coding" panose="020B0609020101020101" pitchFamily="49" charset="-127"/>
-              </a:rPr>
-              <a:t>)</a:t>
-            </a:r>
-          </a:p>
-          <a:p>
-            <a:r>
-              <a:rPr lang="ko-KR" altLang="en-US" sz="1500" dirty="0">
-                <a:latin typeface="D2Coding" panose="020B0609020101020101" pitchFamily="49" charset="-127"/>
-                <a:ea typeface="D2Coding" panose="020B0609020101020101" pitchFamily="49" charset="-127"/>
-              </a:rPr>
-              <a:t># 최종 합산</a:t>
-            </a:r>
-          </a:p>
-          <a:p>
-            <a:r>
-              <a:rPr lang="ko-KR" altLang="en-US" sz="1500" dirty="0" err="1">
-                <a:latin typeface="D2Coding" panose="020B0609020101020101" pitchFamily="49" charset="-127"/>
-                <a:ea typeface="D2Coding" panose="020B0609020101020101" pitchFamily="49" charset="-127"/>
-              </a:rPr>
-              <a:t>combined</a:t>
-            </a:r>
-            <a:r>
-              <a:rPr lang="ko-KR" altLang="en-US" sz="1500" dirty="0">
-                <a:latin typeface="D2Coding" panose="020B0609020101020101" pitchFamily="49" charset="-127"/>
-                <a:ea typeface="D2Coding" panose="020B0609020101020101" pitchFamily="49" charset="-127"/>
-              </a:rPr>
-              <a:t> = </a:t>
-            </a:r>
-            <a:r>
-              <a:rPr lang="ko-KR" altLang="en-US" sz="1500" dirty="0" err="1">
-                <a:latin typeface="D2Coding" panose="020B0609020101020101" pitchFamily="49" charset="-127"/>
-                <a:ea typeface="D2Coding" panose="020B0609020101020101" pitchFamily="49" charset="-127"/>
-              </a:rPr>
-              <a:t>np.sum</a:t>
-            </a:r>
-            <a:r>
-              <a:rPr lang="ko-KR" altLang="en-US" sz="1500" dirty="0">
-                <a:latin typeface="D2Coding" panose="020B0609020101020101" pitchFamily="49" charset="-127"/>
-                <a:ea typeface="D2Coding" panose="020B0609020101020101" pitchFamily="49" charset="-127"/>
-              </a:rPr>
-              <a:t>(</a:t>
-            </a:r>
-            <a:r>
-              <a:rPr lang="ko-KR" altLang="en-US" sz="1500" dirty="0" err="1">
-                <a:latin typeface="D2Coding" panose="020B0609020101020101" pitchFamily="49" charset="-127"/>
-                <a:ea typeface="D2Coding" panose="020B0609020101020101" pitchFamily="49" charset="-127"/>
-              </a:rPr>
-              <a:t>attention_weights</a:t>
-            </a:r>
-            <a:r>
-              <a:rPr lang="ko-KR" altLang="en-US" sz="1500" dirty="0">
-                <a:latin typeface="D2Coding" panose="020B0609020101020101" pitchFamily="49" charset="-127"/>
-                <a:ea typeface="D2Coding" panose="020B0609020101020101" pitchFamily="49" charset="-127"/>
-              </a:rPr>
-              <a:t>[:, </a:t>
-            </a:r>
-            <a:r>
-              <a:rPr lang="ko-KR" altLang="en-US" sz="1500" dirty="0" err="1">
-                <a:latin typeface="D2Coding" panose="020B0609020101020101" pitchFamily="49" charset="-127"/>
-                <a:ea typeface="D2Coding" panose="020B0609020101020101" pitchFamily="49" charset="-127"/>
-              </a:rPr>
-              <a:t>np.newaxis</a:t>
-            </a:r>
-            <a:r>
-              <a:rPr lang="ko-KR" altLang="en-US" sz="1500" dirty="0">
-                <a:latin typeface="D2Coding" panose="020B0609020101020101" pitchFamily="49" charset="-127"/>
-                <a:ea typeface="D2Coding" panose="020B0609020101020101" pitchFamily="49" charset="-127"/>
-              </a:rPr>
-              <a:t>] * </a:t>
-            </a:r>
-            <a:r>
-              <a:rPr lang="ko-KR" altLang="en-US" sz="1500" dirty="0" err="1">
-                <a:latin typeface="D2Coding" panose="020B0609020101020101" pitchFamily="49" charset="-127"/>
-                <a:ea typeface="D2Coding" panose="020B0609020101020101" pitchFamily="49" charset="-127"/>
-              </a:rPr>
-              <a:t>sources</a:t>
-            </a:r>
-            <a:r>
-              <a:rPr lang="ko-KR" altLang="en-US" sz="1500" dirty="0">
-                <a:latin typeface="D2Coding" panose="020B0609020101020101" pitchFamily="49" charset="-127"/>
-                <a:ea typeface="D2Coding" panose="020B0609020101020101" pitchFamily="49" charset="-127"/>
-              </a:rPr>
-              <a:t>, </a:t>
-            </a:r>
-            <a:r>
-              <a:rPr lang="ko-KR" altLang="en-US" sz="1500" dirty="0" err="1">
-                <a:latin typeface="D2Coding" panose="020B0609020101020101" pitchFamily="49" charset="-127"/>
-                <a:ea typeface="D2Coding" panose="020B0609020101020101" pitchFamily="49" charset="-127"/>
-              </a:rPr>
-              <a:t>axis</a:t>
-            </a:r>
-            <a:r>
-              <a:rPr lang="ko-KR" altLang="en-US" sz="1500" dirty="0">
-                <a:latin typeface="D2Coding" panose="020B0609020101020101" pitchFamily="49" charset="-127"/>
-                <a:ea typeface="D2Coding" panose="020B0609020101020101" pitchFamily="49" charset="-127"/>
-              </a:rPr>
-              <a:t>=0) # 여기서 또 </a:t>
-            </a:r>
-            <a:r>
-              <a:rPr lang="ko-KR" altLang="en-US" sz="1500" dirty="0" err="1">
-                <a:latin typeface="D2Coding" panose="020B0609020101020101" pitchFamily="49" charset="-127"/>
-                <a:ea typeface="D2Coding" panose="020B0609020101020101" pitchFamily="49" charset="-127"/>
-              </a:rPr>
-              <a:t>sources</a:t>
-            </a:r>
-            <a:endParaRPr lang="ko-KR" altLang="en-US" sz="1500" dirty="0">
-              <a:latin typeface="D2Coding" panose="020B0609020101020101" pitchFamily="49" charset="-127"/>
-              <a:ea typeface="D2Coding" panose="020B0609020101020101" pitchFamily="49" charset="-127"/>
-            </a:endParaRPr>
-          </a:p>
-        </p:txBody>
-      </p:sp>
-      <p:sp>
-        <p:nvSpPr>
-          <p:cNvPr id="7" name="TextBox 6">
-            <a:extLst>
-              <a:ext uri="{FF2B5EF4-FFF2-40B4-BE49-F238E27FC236}">
-                <a16:creationId xmlns:a16="http://schemas.microsoft.com/office/drawing/2014/main" id="{87B95FD4-7953-6D6C-949B-752175600DF8}"/>
-              </a:ext>
-            </a:extLst>
-          </p:cNvPr>
-          <p:cNvSpPr txBox="1"/>
-          <p:nvPr/>
-        </p:nvSpPr>
-        <p:spPr>
-          <a:xfrm>
-            <a:off x="600074" y="3400425"/>
-            <a:ext cx="7981952" cy="2631490"/>
-          </a:xfrm>
-          <a:prstGeom prst="rect">
-            <a:avLst/>
-          </a:prstGeom>
-          <a:solidFill>
-            <a:srgbClr val="76E3FF"/>
-          </a:solidFill>
-        </p:spPr>
-        <p:txBody>
-          <a:bodyPr wrap="square">
-            <a:spAutoFit/>
-          </a:bodyPr>
-          <a:lstStyle/>
-          <a:p>
-            <a:r>
-              <a:rPr lang="ko-KR" altLang="en-US" sz="1500" dirty="0">
-                <a:latin typeface="D2Coding" panose="020B0609020101020101" pitchFamily="49" charset="-127"/>
-                <a:ea typeface="D2Coding" panose="020B0609020101020101" pitchFamily="49" charset="-127"/>
-              </a:rPr>
-              <a:t># </a:t>
-            </a:r>
-            <a:r>
-              <a:rPr lang="en-US" altLang="ko-KR" sz="1500" dirty="0">
-                <a:latin typeface="D2Coding" panose="020B0609020101020101" pitchFamily="49" charset="-127"/>
-                <a:ea typeface="D2Coding" panose="020B0609020101020101" pitchFamily="49" charset="-127"/>
-              </a:rPr>
-              <a:t>1</a:t>
-            </a:r>
-            <a:r>
-              <a:rPr lang="ko-KR" altLang="en-US" sz="1500" dirty="0">
-                <a:latin typeface="D2Coding" panose="020B0609020101020101" pitchFamily="49" charset="-127"/>
-                <a:ea typeface="D2Coding" panose="020B0609020101020101" pitchFamily="49" charset="-127"/>
-              </a:rPr>
-              <a:t>. 먼저 가중치 행렬(</a:t>
-            </a:r>
-            <a:r>
-              <a:rPr lang="ko-KR" altLang="en-US" sz="1500" dirty="0" err="1">
-                <a:latin typeface="D2Coding" panose="020B0609020101020101" pitchFamily="49" charset="-127"/>
-                <a:ea typeface="D2Coding" panose="020B0609020101020101" pitchFamily="49" charset="-127"/>
-              </a:rPr>
-              <a:t>W</a:t>
-            </a:r>
-            <a:r>
-              <a:rPr lang="ko-KR" altLang="en-US" sz="1500" dirty="0">
-                <a:latin typeface="D2Coding" panose="020B0609020101020101" pitchFamily="49" charset="-127"/>
-                <a:ea typeface="D2Coding" panose="020B0609020101020101" pitchFamily="49" charset="-127"/>
-              </a:rPr>
-              <a:t>)을 곱해 </a:t>
-            </a:r>
-            <a:r>
-              <a:rPr lang="ko-KR" altLang="en-US" sz="1500" dirty="0" err="1">
-                <a:latin typeface="D2Coding" panose="020B0609020101020101" pitchFamily="49" charset="-127"/>
-                <a:ea typeface="D2Coding" panose="020B0609020101020101" pitchFamily="49" charset="-127"/>
-              </a:rPr>
-              <a:t>sources를</a:t>
-            </a:r>
-            <a:r>
-              <a:rPr lang="ko-KR" altLang="en-US" sz="1500" dirty="0">
-                <a:latin typeface="D2Coding" panose="020B0609020101020101" pitchFamily="49" charset="-127"/>
-                <a:ea typeface="D2Coding" panose="020B0609020101020101" pitchFamily="49" charset="-127"/>
-              </a:rPr>
-              <a:t> </a:t>
-            </a:r>
-            <a:r>
-              <a:rPr lang="ko-KR" altLang="en-US" sz="1500" dirty="0" err="1">
-                <a:latin typeface="D2Coding" panose="020B0609020101020101" pitchFamily="49" charset="-127"/>
-                <a:ea typeface="D2Coding" panose="020B0609020101020101" pitchFamily="49" charset="-127"/>
-              </a:rPr>
-              <a:t>keys와</a:t>
-            </a:r>
-            <a:r>
-              <a:rPr lang="ko-KR" altLang="en-US" sz="1500" dirty="0">
-                <a:latin typeface="D2Coding" panose="020B0609020101020101" pitchFamily="49" charset="-127"/>
-                <a:ea typeface="D2Coding" panose="020B0609020101020101" pitchFamily="49" charset="-127"/>
-              </a:rPr>
-              <a:t> </a:t>
-            </a:r>
-            <a:r>
-              <a:rPr lang="ko-KR" altLang="en-US" sz="1500" dirty="0" err="1">
-                <a:latin typeface="D2Coding" panose="020B0609020101020101" pitchFamily="49" charset="-127"/>
-                <a:ea typeface="D2Coding" panose="020B0609020101020101" pitchFamily="49" charset="-127"/>
-              </a:rPr>
-              <a:t>values로</a:t>
-            </a:r>
-            <a:r>
-              <a:rPr lang="ko-KR" altLang="en-US" sz="1500" dirty="0">
-                <a:latin typeface="D2Coding" panose="020B0609020101020101" pitchFamily="49" charset="-127"/>
-                <a:ea typeface="D2Coding" panose="020B0609020101020101" pitchFamily="49" charset="-127"/>
-              </a:rPr>
-              <a:t> 완전히 분리해 둡니다.</a:t>
-            </a:r>
-          </a:p>
-          <a:p>
-            <a:r>
-              <a:rPr lang="ko-KR" altLang="en-US" sz="1500" dirty="0" err="1">
-                <a:latin typeface="D2Coding" panose="020B0609020101020101" pitchFamily="49" charset="-127"/>
-                <a:ea typeface="D2Coding" panose="020B0609020101020101" pitchFamily="49" charset="-127"/>
-              </a:rPr>
-              <a:t>query</a:t>
-            </a:r>
-            <a:r>
-              <a:rPr lang="ko-KR" altLang="en-US" sz="1500" dirty="0">
-                <a:latin typeface="D2Coding" panose="020B0609020101020101" pitchFamily="49" charset="-127"/>
-                <a:ea typeface="D2Coding" panose="020B0609020101020101" pitchFamily="49" charset="-127"/>
-              </a:rPr>
-              <a:t> = </a:t>
-            </a:r>
-            <a:r>
-              <a:rPr lang="ko-KR" altLang="en-US" sz="1500" dirty="0" err="1">
-                <a:latin typeface="D2Coding" panose="020B0609020101020101" pitchFamily="49" charset="-127"/>
-                <a:ea typeface="D2Coding" panose="020B0609020101020101" pitchFamily="49" charset="-127"/>
-              </a:rPr>
-              <a:t>np.dot</a:t>
-            </a:r>
-            <a:r>
-              <a:rPr lang="ko-KR" altLang="en-US" sz="1500" dirty="0">
-                <a:latin typeface="D2Coding" panose="020B0609020101020101" pitchFamily="49" charset="-127"/>
-                <a:ea typeface="D2Coding" panose="020B0609020101020101" pitchFamily="49" charset="-127"/>
-              </a:rPr>
-              <a:t>(</a:t>
-            </a:r>
-            <a:r>
-              <a:rPr lang="ko-KR" altLang="en-US" sz="1500" dirty="0" err="1">
-                <a:latin typeface="D2Coding" panose="020B0609020101020101" pitchFamily="49" charset="-127"/>
-                <a:ea typeface="D2Coding" panose="020B0609020101020101" pitchFamily="49" charset="-127"/>
-              </a:rPr>
-              <a:t>target</a:t>
-            </a:r>
-            <a:r>
-              <a:rPr lang="ko-KR" altLang="en-US" sz="1500" dirty="0">
-                <a:latin typeface="D2Coding" panose="020B0609020101020101" pitchFamily="49" charset="-127"/>
-                <a:ea typeface="D2Coding" panose="020B0609020101020101" pitchFamily="49" charset="-127"/>
-              </a:rPr>
-              <a:t>, W_Q)</a:t>
-            </a:r>
-          </a:p>
-          <a:p>
-            <a:r>
-              <a:rPr lang="ko-KR" altLang="en-US" sz="1500" dirty="0" err="1">
-                <a:latin typeface="D2Coding" panose="020B0609020101020101" pitchFamily="49" charset="-127"/>
-                <a:ea typeface="D2Coding" panose="020B0609020101020101" pitchFamily="49" charset="-127"/>
-              </a:rPr>
-              <a:t>keys</a:t>
-            </a:r>
-            <a:r>
-              <a:rPr lang="ko-KR" altLang="en-US" sz="1500" dirty="0">
-                <a:latin typeface="D2Coding" panose="020B0609020101020101" pitchFamily="49" charset="-127"/>
-                <a:ea typeface="D2Coding" panose="020B0609020101020101" pitchFamily="49" charset="-127"/>
-              </a:rPr>
-              <a:t> = </a:t>
-            </a:r>
-            <a:r>
-              <a:rPr lang="ko-KR" altLang="en-US" sz="1500" dirty="0" err="1">
-                <a:latin typeface="D2Coding" panose="020B0609020101020101" pitchFamily="49" charset="-127"/>
-                <a:ea typeface="D2Coding" panose="020B0609020101020101" pitchFamily="49" charset="-127"/>
-              </a:rPr>
-              <a:t>np.dot</a:t>
-            </a:r>
-            <a:r>
-              <a:rPr lang="ko-KR" altLang="en-US" sz="1500" dirty="0">
-                <a:latin typeface="D2Coding" panose="020B0609020101020101" pitchFamily="49" charset="-127"/>
-                <a:ea typeface="D2Coding" panose="020B0609020101020101" pitchFamily="49" charset="-127"/>
-              </a:rPr>
-              <a:t>(</a:t>
-            </a:r>
-            <a:r>
-              <a:rPr lang="ko-KR" altLang="en-US" sz="1500" dirty="0" err="1">
-                <a:latin typeface="D2Coding" panose="020B0609020101020101" pitchFamily="49" charset="-127"/>
-                <a:ea typeface="D2Coding" panose="020B0609020101020101" pitchFamily="49" charset="-127"/>
-              </a:rPr>
-              <a:t>sources</a:t>
-            </a:r>
-            <a:r>
-              <a:rPr lang="ko-KR" altLang="en-US" sz="1500" dirty="0">
-                <a:latin typeface="D2Coding" panose="020B0609020101020101" pitchFamily="49" charset="-127"/>
-                <a:ea typeface="D2Coding" panose="020B0609020101020101" pitchFamily="49" charset="-127"/>
-              </a:rPr>
-              <a:t>, W_K)    # 점수 매기기 전용 (기존의 </a:t>
-            </a:r>
-            <a:r>
-              <a:rPr lang="ko-KR" altLang="en-US" sz="1500" dirty="0" err="1">
-                <a:latin typeface="D2Coding" panose="020B0609020101020101" pitchFamily="49" charset="-127"/>
-                <a:ea typeface="D2Coding" panose="020B0609020101020101" pitchFamily="49" charset="-127"/>
-              </a:rPr>
-              <a:t>score</a:t>
-            </a:r>
-            <a:r>
-              <a:rPr lang="ko-KR" altLang="en-US" sz="1500" dirty="0">
-                <a:latin typeface="D2Coding" panose="020B0609020101020101" pitchFamily="49" charset="-127"/>
-                <a:ea typeface="D2Coding" panose="020B0609020101020101" pitchFamily="49" charset="-127"/>
-              </a:rPr>
-              <a:t> 함수 안의 </a:t>
-            </a:r>
-            <a:r>
-              <a:rPr lang="ko-KR" altLang="en-US" sz="1500" dirty="0" err="1">
-                <a:latin typeface="D2Coding" panose="020B0609020101020101" pitchFamily="49" charset="-127"/>
-                <a:ea typeface="D2Coding" panose="020B0609020101020101" pitchFamily="49" charset="-127"/>
-              </a:rPr>
-              <a:t>s</a:t>
-            </a:r>
-            <a:r>
-              <a:rPr lang="ko-KR" altLang="en-US" sz="1500" dirty="0">
-                <a:latin typeface="D2Coding" panose="020B0609020101020101" pitchFamily="49" charset="-127"/>
-                <a:ea typeface="D2Coding" panose="020B0609020101020101" pitchFamily="49" charset="-127"/>
-              </a:rPr>
-              <a:t> 대체)</a:t>
-            </a:r>
-          </a:p>
-          <a:p>
-            <a:r>
-              <a:rPr lang="ko-KR" altLang="en-US" sz="1500" dirty="0" err="1">
-                <a:latin typeface="D2Coding" panose="020B0609020101020101" pitchFamily="49" charset="-127"/>
-                <a:ea typeface="D2Coding" panose="020B0609020101020101" pitchFamily="49" charset="-127"/>
-              </a:rPr>
-              <a:t>values</a:t>
-            </a:r>
-            <a:r>
-              <a:rPr lang="ko-KR" altLang="en-US" sz="1500" dirty="0">
-                <a:latin typeface="D2Coding" panose="020B0609020101020101" pitchFamily="49" charset="-127"/>
-                <a:ea typeface="D2Coding" panose="020B0609020101020101" pitchFamily="49" charset="-127"/>
-              </a:rPr>
-              <a:t> = </a:t>
-            </a:r>
-            <a:r>
-              <a:rPr lang="ko-KR" altLang="en-US" sz="1500" dirty="0" err="1">
-                <a:latin typeface="D2Coding" panose="020B0609020101020101" pitchFamily="49" charset="-127"/>
-                <a:ea typeface="D2Coding" panose="020B0609020101020101" pitchFamily="49" charset="-127"/>
-              </a:rPr>
-              <a:t>np.dot</a:t>
-            </a:r>
-            <a:r>
-              <a:rPr lang="ko-KR" altLang="en-US" sz="1500" dirty="0">
-                <a:latin typeface="D2Coding" panose="020B0609020101020101" pitchFamily="49" charset="-127"/>
-                <a:ea typeface="D2Coding" panose="020B0609020101020101" pitchFamily="49" charset="-127"/>
-              </a:rPr>
-              <a:t>(</a:t>
-            </a:r>
-            <a:r>
-              <a:rPr lang="ko-KR" altLang="en-US" sz="1500" dirty="0" err="1">
-                <a:latin typeface="D2Coding" panose="020B0609020101020101" pitchFamily="49" charset="-127"/>
-                <a:ea typeface="D2Coding" panose="020B0609020101020101" pitchFamily="49" charset="-127"/>
-              </a:rPr>
-              <a:t>sources</a:t>
-            </a:r>
-            <a:r>
-              <a:rPr lang="ko-KR" altLang="en-US" sz="1500" dirty="0">
-                <a:latin typeface="D2Coding" panose="020B0609020101020101" pitchFamily="49" charset="-127"/>
-                <a:ea typeface="D2Coding" panose="020B0609020101020101" pitchFamily="49" charset="-127"/>
-              </a:rPr>
-              <a:t>, W_V)  # 실제 알맹이 전용 (기존의 최종 합산 </a:t>
-            </a:r>
-            <a:r>
-              <a:rPr lang="ko-KR" altLang="en-US" sz="1500" dirty="0" err="1">
-                <a:latin typeface="D2Coding" panose="020B0609020101020101" pitchFamily="49" charset="-127"/>
-                <a:ea typeface="D2Coding" panose="020B0609020101020101" pitchFamily="49" charset="-127"/>
-              </a:rPr>
-              <a:t>sources</a:t>
-            </a:r>
-            <a:r>
-              <a:rPr lang="ko-KR" altLang="en-US" sz="1500" dirty="0">
-                <a:latin typeface="D2Coding" panose="020B0609020101020101" pitchFamily="49" charset="-127"/>
-                <a:ea typeface="D2Coding" panose="020B0609020101020101" pitchFamily="49" charset="-127"/>
-              </a:rPr>
-              <a:t> 대체)</a:t>
-            </a:r>
-          </a:p>
-          <a:p>
-            <a:endParaRPr lang="ko-KR" altLang="en-US" sz="1500" dirty="0">
-              <a:latin typeface="D2Coding" panose="020B0609020101020101" pitchFamily="49" charset="-127"/>
-              <a:ea typeface="D2Coding" panose="020B0609020101020101" pitchFamily="49" charset="-127"/>
-            </a:endParaRPr>
-          </a:p>
-          <a:p>
-            <a:r>
-              <a:rPr lang="ko-KR" altLang="en-US" sz="1500" dirty="0">
-                <a:latin typeface="D2Coding" panose="020B0609020101020101" pitchFamily="49" charset="-127"/>
-                <a:ea typeface="D2Coding" panose="020B0609020101020101" pitchFamily="49" charset="-127"/>
-              </a:rPr>
-              <a:t># </a:t>
-            </a:r>
-            <a:r>
-              <a:rPr lang="en-US" altLang="ko-KR" sz="1500" dirty="0">
-                <a:latin typeface="D2Coding" panose="020B0609020101020101" pitchFamily="49" charset="-127"/>
-                <a:ea typeface="D2Coding" panose="020B0609020101020101" pitchFamily="49" charset="-127"/>
-              </a:rPr>
-              <a:t>2</a:t>
-            </a:r>
-            <a:r>
-              <a:rPr lang="ko-KR" altLang="en-US" sz="1500" dirty="0">
-                <a:latin typeface="D2Coding" panose="020B0609020101020101" pitchFamily="49" charset="-127"/>
-                <a:ea typeface="D2Coding" panose="020B0609020101020101" pitchFamily="49" charset="-127"/>
-              </a:rPr>
-              <a:t>. 점수 계산 (</a:t>
-            </a:r>
-            <a:r>
-              <a:rPr lang="ko-KR" altLang="en-US" sz="1500" dirty="0" err="1">
-                <a:latin typeface="D2Coding" panose="020B0609020101020101" pitchFamily="49" charset="-127"/>
-                <a:ea typeface="D2Coding" panose="020B0609020101020101" pitchFamily="49" charset="-127"/>
-              </a:rPr>
-              <a:t>Query와</a:t>
-            </a:r>
-            <a:r>
-              <a:rPr lang="ko-KR" altLang="en-US" sz="1500" dirty="0">
-                <a:latin typeface="D2Coding" panose="020B0609020101020101" pitchFamily="49" charset="-127"/>
-                <a:ea typeface="D2Coding" panose="020B0609020101020101" pitchFamily="49" charset="-127"/>
-              </a:rPr>
-              <a:t> </a:t>
-            </a:r>
-            <a:r>
-              <a:rPr lang="ko-KR" altLang="en-US" sz="1500" dirty="0" err="1">
-                <a:latin typeface="D2Coding" panose="020B0609020101020101" pitchFamily="49" charset="-127"/>
-                <a:ea typeface="D2Coding" panose="020B0609020101020101" pitchFamily="49" charset="-127"/>
-              </a:rPr>
-              <a:t>Key를</a:t>
-            </a:r>
-            <a:r>
-              <a:rPr lang="ko-KR" altLang="en-US" sz="1500" dirty="0">
-                <a:latin typeface="D2Coding" panose="020B0609020101020101" pitchFamily="49" charset="-127"/>
-                <a:ea typeface="D2Coding" panose="020B0609020101020101" pitchFamily="49" charset="-127"/>
-              </a:rPr>
-              <a:t> 비교)</a:t>
-            </a:r>
-          </a:p>
-          <a:p>
-            <a:r>
-              <a:rPr lang="ko-KR" altLang="en-US" sz="1500" dirty="0" err="1">
-                <a:latin typeface="D2Coding" panose="020B0609020101020101" pitchFamily="49" charset="-127"/>
-                <a:ea typeface="D2Coding" panose="020B0609020101020101" pitchFamily="49" charset="-127"/>
-              </a:rPr>
-              <a:t>raw_scores</a:t>
-            </a:r>
-            <a:r>
-              <a:rPr lang="ko-KR" altLang="en-US" sz="1500" dirty="0">
-                <a:latin typeface="D2Coding" panose="020B0609020101020101" pitchFamily="49" charset="-127"/>
-                <a:ea typeface="D2Coding" panose="020B0609020101020101" pitchFamily="49" charset="-127"/>
-              </a:rPr>
-              <a:t> = </a:t>
-            </a:r>
-            <a:r>
-              <a:rPr lang="ko-KR" altLang="en-US" sz="1500" dirty="0" err="1">
-                <a:latin typeface="D2Coding" panose="020B0609020101020101" pitchFamily="49" charset="-127"/>
-                <a:ea typeface="D2Coding" panose="020B0609020101020101" pitchFamily="49" charset="-127"/>
-              </a:rPr>
-              <a:t>np.array</a:t>
-            </a:r>
-            <a:r>
-              <a:rPr lang="ko-KR" altLang="en-US" sz="1500" dirty="0">
-                <a:latin typeface="D2Coding" panose="020B0609020101020101" pitchFamily="49" charset="-127"/>
-                <a:ea typeface="D2Coding" panose="020B0609020101020101" pitchFamily="49" charset="-127"/>
-              </a:rPr>
-              <a:t>([</a:t>
-            </a:r>
-            <a:r>
-              <a:rPr lang="ko-KR" altLang="en-US" sz="1500" dirty="0" err="1">
-                <a:latin typeface="D2Coding" panose="020B0609020101020101" pitchFamily="49" charset="-127"/>
-                <a:ea typeface="D2Coding" panose="020B0609020101020101" pitchFamily="49" charset="-127"/>
-              </a:rPr>
-              <a:t>score</a:t>
-            </a:r>
-            <a:r>
-              <a:rPr lang="ko-KR" altLang="en-US" sz="1500" dirty="0">
-                <a:latin typeface="D2Coding" panose="020B0609020101020101" pitchFamily="49" charset="-127"/>
-                <a:ea typeface="D2Coding" panose="020B0609020101020101" pitchFamily="49" charset="-127"/>
-              </a:rPr>
-              <a:t>(</a:t>
-            </a:r>
-            <a:r>
-              <a:rPr lang="ko-KR" altLang="en-US" sz="1500" dirty="0" err="1">
-                <a:latin typeface="D2Coding" panose="020B0609020101020101" pitchFamily="49" charset="-127"/>
-                <a:ea typeface="D2Coding" panose="020B0609020101020101" pitchFamily="49" charset="-127"/>
-              </a:rPr>
-              <a:t>query</a:t>
-            </a:r>
-            <a:r>
-              <a:rPr lang="ko-KR" altLang="en-US" sz="1500" dirty="0">
-                <a:latin typeface="D2Coding" panose="020B0609020101020101" pitchFamily="49" charset="-127"/>
-                <a:ea typeface="D2Coding" panose="020B0609020101020101" pitchFamily="49" charset="-127"/>
-              </a:rPr>
-              <a:t>, k) </a:t>
-            </a:r>
-            <a:r>
-              <a:rPr lang="ko-KR" altLang="en-US" sz="1500" dirty="0" err="1">
-                <a:latin typeface="D2Coding" panose="020B0609020101020101" pitchFamily="49" charset="-127"/>
-                <a:ea typeface="D2Coding" panose="020B0609020101020101" pitchFamily="49" charset="-127"/>
-              </a:rPr>
-              <a:t>for</a:t>
-            </a:r>
-            <a:r>
-              <a:rPr lang="ko-KR" altLang="en-US" sz="1500" dirty="0">
-                <a:latin typeface="D2Coding" panose="020B0609020101020101" pitchFamily="49" charset="-127"/>
-                <a:ea typeface="D2Coding" panose="020B0609020101020101" pitchFamily="49" charset="-127"/>
-              </a:rPr>
-              <a:t> k </a:t>
-            </a:r>
-            <a:r>
-              <a:rPr lang="ko-KR" altLang="en-US" sz="1500" dirty="0" err="1">
-                <a:latin typeface="D2Coding" panose="020B0609020101020101" pitchFamily="49" charset="-127"/>
-                <a:ea typeface="D2Coding" panose="020B0609020101020101" pitchFamily="49" charset="-127"/>
-              </a:rPr>
-              <a:t>in</a:t>
-            </a:r>
-            <a:r>
-              <a:rPr lang="ko-KR" altLang="en-US" sz="1500" dirty="0">
-                <a:latin typeface="D2Coding" panose="020B0609020101020101" pitchFamily="49" charset="-127"/>
-                <a:ea typeface="D2Coding" panose="020B0609020101020101" pitchFamily="49" charset="-127"/>
-              </a:rPr>
-              <a:t> </a:t>
-            </a:r>
-            <a:r>
-              <a:rPr lang="ko-KR" altLang="en-US" sz="1500" dirty="0" err="1">
-                <a:latin typeface="D2Coding" panose="020B0609020101020101" pitchFamily="49" charset="-127"/>
-                <a:ea typeface="D2Coding" panose="020B0609020101020101" pitchFamily="49" charset="-127"/>
-              </a:rPr>
-              <a:t>keys</a:t>
-            </a:r>
-            <a:r>
-              <a:rPr lang="ko-KR" altLang="en-US" sz="1500" dirty="0">
-                <a:latin typeface="D2Coding" panose="020B0609020101020101" pitchFamily="49" charset="-127"/>
-                <a:ea typeface="D2Coding" panose="020B0609020101020101" pitchFamily="49" charset="-127"/>
-              </a:rPr>
-              <a:t>]) </a:t>
-            </a:r>
-          </a:p>
-          <a:p>
-            <a:r>
-              <a:rPr lang="ko-KR" altLang="en-US" sz="1500" dirty="0" err="1">
-                <a:latin typeface="D2Coding" panose="020B0609020101020101" pitchFamily="49" charset="-127"/>
-                <a:ea typeface="D2Coding" panose="020B0609020101020101" pitchFamily="49" charset="-127"/>
-              </a:rPr>
-              <a:t>attention_weights</a:t>
-            </a:r>
-            <a:r>
-              <a:rPr lang="ko-KR" altLang="en-US" sz="1500" dirty="0">
-                <a:latin typeface="D2Coding" panose="020B0609020101020101" pitchFamily="49" charset="-127"/>
-                <a:ea typeface="D2Coding" panose="020B0609020101020101" pitchFamily="49" charset="-127"/>
-              </a:rPr>
-              <a:t> = </a:t>
-            </a:r>
-            <a:r>
-              <a:rPr lang="ko-KR" altLang="en-US" sz="1500" dirty="0" err="1">
-                <a:latin typeface="D2Coding" panose="020B0609020101020101" pitchFamily="49" charset="-127"/>
-                <a:ea typeface="D2Coding" panose="020B0609020101020101" pitchFamily="49" charset="-127"/>
-              </a:rPr>
-              <a:t>softmax</a:t>
-            </a:r>
-            <a:r>
-              <a:rPr lang="ko-KR" altLang="en-US" sz="1500" dirty="0">
-                <a:latin typeface="D2Coding" panose="020B0609020101020101" pitchFamily="49" charset="-127"/>
-                <a:ea typeface="D2Coding" panose="020B0609020101020101" pitchFamily="49" charset="-127"/>
-              </a:rPr>
-              <a:t>(</a:t>
-            </a:r>
-            <a:r>
-              <a:rPr lang="ko-KR" altLang="en-US" sz="1500" dirty="0" err="1">
-                <a:latin typeface="D2Coding" panose="020B0609020101020101" pitchFamily="49" charset="-127"/>
-                <a:ea typeface="D2Coding" panose="020B0609020101020101" pitchFamily="49" charset="-127"/>
-              </a:rPr>
-              <a:t>raw_scores</a:t>
-            </a:r>
-            <a:r>
-              <a:rPr lang="ko-KR" altLang="en-US" sz="1500" dirty="0">
-                <a:latin typeface="D2Coding" panose="020B0609020101020101" pitchFamily="49" charset="-127"/>
-                <a:ea typeface="D2Coding" panose="020B0609020101020101" pitchFamily="49" charset="-127"/>
-              </a:rPr>
-              <a:t>)</a:t>
-            </a:r>
-          </a:p>
-          <a:p>
-            <a:endParaRPr lang="ko-KR" altLang="en-US" sz="1500" dirty="0">
-              <a:latin typeface="D2Coding" panose="020B0609020101020101" pitchFamily="49" charset="-127"/>
-              <a:ea typeface="D2Coding" panose="020B0609020101020101" pitchFamily="49" charset="-127"/>
-            </a:endParaRPr>
-          </a:p>
-          <a:p>
-            <a:r>
-              <a:rPr lang="ko-KR" altLang="en-US" sz="1500" dirty="0">
-                <a:latin typeface="D2Coding" panose="020B0609020101020101" pitchFamily="49" charset="-127"/>
-                <a:ea typeface="D2Coding" panose="020B0609020101020101" pitchFamily="49" charset="-127"/>
-              </a:rPr>
-              <a:t># </a:t>
-            </a:r>
-            <a:r>
-              <a:rPr lang="en-US" altLang="ko-KR" sz="1500" dirty="0">
-                <a:latin typeface="D2Coding" panose="020B0609020101020101" pitchFamily="49" charset="-127"/>
-                <a:ea typeface="D2Coding" panose="020B0609020101020101" pitchFamily="49" charset="-127"/>
-              </a:rPr>
-              <a:t>3</a:t>
-            </a:r>
-            <a:r>
-              <a:rPr lang="ko-KR" altLang="en-US" sz="1500" dirty="0">
-                <a:latin typeface="D2Coding" panose="020B0609020101020101" pitchFamily="49" charset="-127"/>
-                <a:ea typeface="D2Coding" panose="020B0609020101020101" pitchFamily="49" charset="-127"/>
-              </a:rPr>
-              <a:t>. 최종 합산 (</a:t>
-            </a:r>
-            <a:r>
-              <a:rPr lang="ko-KR" altLang="en-US" sz="1500" dirty="0" err="1">
-                <a:latin typeface="D2Coding" panose="020B0609020101020101" pitchFamily="49" charset="-127"/>
-                <a:ea typeface="D2Coding" panose="020B0609020101020101" pitchFamily="49" charset="-127"/>
-              </a:rPr>
-              <a:t>Value를</a:t>
-            </a:r>
-            <a:r>
-              <a:rPr lang="ko-KR" altLang="en-US" sz="1500" dirty="0">
-                <a:latin typeface="D2Coding" panose="020B0609020101020101" pitchFamily="49" charset="-127"/>
-                <a:ea typeface="D2Coding" panose="020B0609020101020101" pitchFamily="49" charset="-127"/>
-              </a:rPr>
-              <a:t> 곱함)</a:t>
-            </a:r>
-          </a:p>
-          <a:p>
-            <a:r>
-              <a:rPr lang="ko-KR" altLang="en-US" sz="1500" dirty="0" err="1">
-                <a:latin typeface="D2Coding" panose="020B0609020101020101" pitchFamily="49" charset="-127"/>
-                <a:ea typeface="D2Coding" panose="020B0609020101020101" pitchFamily="49" charset="-127"/>
-              </a:rPr>
-              <a:t>combined</a:t>
-            </a:r>
-            <a:r>
-              <a:rPr lang="ko-KR" altLang="en-US" sz="1500" dirty="0">
-                <a:latin typeface="D2Coding" panose="020B0609020101020101" pitchFamily="49" charset="-127"/>
-                <a:ea typeface="D2Coding" panose="020B0609020101020101" pitchFamily="49" charset="-127"/>
-              </a:rPr>
-              <a:t> = </a:t>
-            </a:r>
-            <a:r>
-              <a:rPr lang="ko-KR" altLang="en-US" sz="1500" dirty="0" err="1">
-                <a:latin typeface="D2Coding" panose="020B0609020101020101" pitchFamily="49" charset="-127"/>
-                <a:ea typeface="D2Coding" panose="020B0609020101020101" pitchFamily="49" charset="-127"/>
-              </a:rPr>
-              <a:t>np.sum</a:t>
-            </a:r>
-            <a:r>
-              <a:rPr lang="ko-KR" altLang="en-US" sz="1500" dirty="0">
-                <a:latin typeface="D2Coding" panose="020B0609020101020101" pitchFamily="49" charset="-127"/>
-                <a:ea typeface="D2Coding" panose="020B0609020101020101" pitchFamily="49" charset="-127"/>
-              </a:rPr>
-              <a:t>(</a:t>
-            </a:r>
-            <a:r>
-              <a:rPr lang="ko-KR" altLang="en-US" sz="1500" dirty="0" err="1">
-                <a:latin typeface="D2Coding" panose="020B0609020101020101" pitchFamily="49" charset="-127"/>
-                <a:ea typeface="D2Coding" panose="020B0609020101020101" pitchFamily="49" charset="-127"/>
-              </a:rPr>
-              <a:t>attention_weights</a:t>
-            </a:r>
-            <a:r>
-              <a:rPr lang="ko-KR" altLang="en-US" sz="1500" dirty="0">
-                <a:latin typeface="D2Coding" panose="020B0609020101020101" pitchFamily="49" charset="-127"/>
-                <a:ea typeface="D2Coding" panose="020B0609020101020101" pitchFamily="49" charset="-127"/>
-              </a:rPr>
-              <a:t>[:, </a:t>
-            </a:r>
-            <a:r>
-              <a:rPr lang="ko-KR" altLang="en-US" sz="1500" dirty="0" err="1">
-                <a:latin typeface="D2Coding" panose="020B0609020101020101" pitchFamily="49" charset="-127"/>
-                <a:ea typeface="D2Coding" panose="020B0609020101020101" pitchFamily="49" charset="-127"/>
-              </a:rPr>
-              <a:t>np.newaxis</a:t>
-            </a:r>
-            <a:r>
-              <a:rPr lang="ko-KR" altLang="en-US" sz="1500" dirty="0">
-                <a:latin typeface="D2Coding" panose="020B0609020101020101" pitchFamily="49" charset="-127"/>
-                <a:ea typeface="D2Coding" panose="020B0609020101020101" pitchFamily="49" charset="-127"/>
-              </a:rPr>
-              <a:t>] * </a:t>
-            </a:r>
-            <a:r>
-              <a:rPr lang="ko-KR" altLang="en-US" sz="1500" dirty="0" err="1">
-                <a:latin typeface="D2Coding" panose="020B0609020101020101" pitchFamily="49" charset="-127"/>
-                <a:ea typeface="D2Coding" panose="020B0609020101020101" pitchFamily="49" charset="-127"/>
-              </a:rPr>
-              <a:t>values</a:t>
-            </a:r>
-            <a:r>
-              <a:rPr lang="ko-KR" altLang="en-US" sz="1500" dirty="0">
-                <a:latin typeface="D2Coding" panose="020B0609020101020101" pitchFamily="49" charset="-127"/>
-                <a:ea typeface="D2Coding" panose="020B0609020101020101" pitchFamily="49" charset="-127"/>
-              </a:rPr>
-              <a:t>, </a:t>
-            </a:r>
-            <a:r>
-              <a:rPr lang="ko-KR" altLang="en-US" sz="1500" dirty="0" err="1">
-                <a:latin typeface="D2Coding" panose="020B0609020101020101" pitchFamily="49" charset="-127"/>
-                <a:ea typeface="D2Coding" panose="020B0609020101020101" pitchFamily="49" charset="-127"/>
-              </a:rPr>
-              <a:t>axis</a:t>
-            </a:r>
-            <a:r>
-              <a:rPr lang="ko-KR" altLang="en-US" sz="1500" dirty="0">
-                <a:latin typeface="D2Coding" panose="020B0609020101020101" pitchFamily="49" charset="-127"/>
-                <a:ea typeface="D2Coding" panose="020B0609020101020101" pitchFamily="49" charset="-127"/>
-              </a:rPr>
-              <a:t>=0)</a:t>
-            </a:r>
-          </a:p>
-        </p:txBody>
-      </p:sp>
-      <p:sp>
-        <p:nvSpPr>
-          <p:cNvPr id="11" name="설명선: 선(강조선) 10">
-            <a:extLst>
-              <a:ext uri="{FF2B5EF4-FFF2-40B4-BE49-F238E27FC236}">
-                <a16:creationId xmlns:a16="http://schemas.microsoft.com/office/drawing/2014/main" id="{074597CC-5B92-16E9-A4E0-1E54945799A1}"/>
-              </a:ext>
-            </a:extLst>
-          </p:cNvPr>
-          <p:cNvSpPr/>
-          <p:nvPr/>
-        </p:nvSpPr>
-        <p:spPr>
-          <a:xfrm>
-            <a:off x="8975982" y="3133725"/>
-            <a:ext cx="2892167" cy="2819400"/>
-          </a:xfrm>
-          <a:prstGeom prst="accentCallout1">
-            <a:avLst>
-              <a:gd name="adj1" fmla="val 18750"/>
-              <a:gd name="adj2" fmla="val -8333"/>
-              <a:gd name="adj3" fmla="val 22237"/>
-              <a:gd name="adj4" fmla="val -13251"/>
-            </a:avLst>
-          </a:prstGeom>
-          <a:solidFill>
-            <a:schemeClr val="accent6">
-              <a:lumMod val="20000"/>
-              <a:lumOff val="80000"/>
-            </a:schemeClr>
-          </a:solidFill>
-        </p:spPr>
-        <p:style>
-          <a:lnRef idx="2">
-            <a:schemeClr val="accent1">
-              <a:shade val="15000"/>
-            </a:schemeClr>
-          </a:lnRef>
-          <a:fillRef idx="1">
-            <a:schemeClr val="accent1"/>
-          </a:fillRef>
-          <a:effectRef idx="0">
-            <a:schemeClr val="accent1"/>
-          </a:effectRef>
-          <a:fontRef idx="minor">
-            <a:schemeClr val="lt1"/>
-          </a:fontRef>
-        </p:style>
-        <p:txBody>
-          <a:bodyPr rtlCol="0" anchor="ctr"/>
-          <a:lstStyle/>
-          <a:p>
-            <a:pPr marL="171450" indent="-171450">
-              <a:buFont typeface="Wingdings" panose="05000000000000000000" pitchFamily="2" charset="2"/>
-              <a:buChar char="§"/>
-            </a:pPr>
-            <a:r>
-              <a:rPr lang="en-US" altLang="ko-KR" sz="1200" dirty="0">
-                <a:solidFill>
-                  <a:schemeClr val="tx1"/>
-                </a:solidFill>
-                <a:latin typeface="D2Coding" panose="020B0609020101020101" pitchFamily="49" charset="-127"/>
-                <a:ea typeface="D2Coding" panose="020B0609020101020101" pitchFamily="49" charset="-127"/>
-              </a:rPr>
-              <a:t>_Q</a:t>
-            </a:r>
-            <a:r>
-              <a:rPr lang="ko-KR" altLang="en-US" sz="1200" dirty="0">
-                <a:solidFill>
-                  <a:schemeClr val="tx1"/>
-                </a:solidFill>
-                <a:latin typeface="D2Coding" panose="020B0609020101020101" pitchFamily="49" charset="-127"/>
-                <a:ea typeface="D2Coding" panose="020B0609020101020101" pitchFamily="49" charset="-127"/>
-              </a:rPr>
-              <a:t>와 </a:t>
-            </a:r>
-            <a:r>
-              <a:rPr lang="en-US" altLang="ko-KR" sz="1200" dirty="0">
-                <a:solidFill>
-                  <a:schemeClr val="tx1"/>
-                </a:solidFill>
-                <a:latin typeface="D2Coding" panose="020B0609020101020101" pitchFamily="49" charset="-127"/>
-                <a:ea typeface="D2Coding" panose="020B0609020101020101" pitchFamily="49" charset="-127"/>
-              </a:rPr>
-              <a:t>W_K</a:t>
-            </a:r>
-            <a:r>
-              <a:rPr lang="ko-KR" altLang="en-US" sz="1200" dirty="0">
-                <a:solidFill>
-                  <a:schemeClr val="tx1"/>
-                </a:solidFill>
-                <a:latin typeface="D2Coding" panose="020B0609020101020101" pitchFamily="49" charset="-127"/>
-                <a:ea typeface="D2Coding" panose="020B0609020101020101" pitchFamily="49" charset="-127"/>
-              </a:rPr>
-              <a:t>라는 학습 가능한 파라미터</a:t>
-            </a:r>
-            <a:r>
-              <a:rPr lang="en-US" altLang="ko-KR" sz="1200" dirty="0">
-                <a:solidFill>
-                  <a:schemeClr val="tx1"/>
-                </a:solidFill>
-                <a:latin typeface="D2Coding" panose="020B0609020101020101" pitchFamily="49" charset="-127"/>
-                <a:ea typeface="D2Coding" panose="020B0609020101020101" pitchFamily="49" charset="-127"/>
-              </a:rPr>
-              <a:t>(</a:t>
-            </a:r>
-            <a:r>
-              <a:rPr lang="ko-KR" altLang="en-US" sz="1200" dirty="0">
-                <a:solidFill>
-                  <a:schemeClr val="tx1"/>
-                </a:solidFill>
-                <a:latin typeface="D2Coding" panose="020B0609020101020101" pitchFamily="49" charset="-127"/>
-                <a:ea typeface="D2Coding" panose="020B0609020101020101" pitchFamily="49" charset="-127"/>
-              </a:rPr>
-              <a:t>행렬</a:t>
-            </a:r>
-            <a:r>
-              <a:rPr lang="en-US" altLang="ko-KR" sz="1200" dirty="0">
-                <a:solidFill>
-                  <a:schemeClr val="tx1"/>
-                </a:solidFill>
-                <a:latin typeface="D2Coding" panose="020B0609020101020101" pitchFamily="49" charset="-127"/>
-                <a:ea typeface="D2Coding" panose="020B0609020101020101" pitchFamily="49" charset="-127"/>
-              </a:rPr>
-              <a:t>)</a:t>
-            </a:r>
-            <a:r>
-              <a:rPr lang="ko-KR" altLang="en-US" sz="1200" dirty="0">
-                <a:solidFill>
-                  <a:schemeClr val="tx1"/>
-                </a:solidFill>
-                <a:latin typeface="D2Coding" panose="020B0609020101020101" pitchFamily="49" charset="-127"/>
-                <a:ea typeface="D2Coding" panose="020B0609020101020101" pitchFamily="49" charset="-127"/>
-              </a:rPr>
-              <a:t>를 가정하고 행렬 </a:t>
-            </a:r>
-            <a:r>
-              <a:rPr lang="en-US" altLang="ko-KR" sz="1200" dirty="0">
-                <a:solidFill>
-                  <a:schemeClr val="tx1"/>
-                </a:solidFill>
-                <a:latin typeface="D2Coding" panose="020B0609020101020101" pitchFamily="49" charset="-127"/>
-                <a:ea typeface="D2Coding" panose="020B0609020101020101" pitchFamily="49" charset="-127"/>
-              </a:rPr>
-              <a:t>W</a:t>
-            </a:r>
-            <a:r>
-              <a:rPr lang="ko-KR" altLang="en-US" sz="1200" dirty="0">
-                <a:solidFill>
-                  <a:schemeClr val="tx1"/>
-                </a:solidFill>
-                <a:latin typeface="D2Coding" panose="020B0609020101020101" pitchFamily="49" charset="-127"/>
-                <a:ea typeface="D2Coding" panose="020B0609020101020101" pitchFamily="49" charset="-127"/>
-              </a:rPr>
-              <a:t>의 숫자가 </a:t>
-            </a:r>
-            <a:r>
-              <a:rPr lang="ko-KR" altLang="en-US" sz="1200" dirty="0" err="1">
-                <a:solidFill>
-                  <a:schemeClr val="tx1"/>
-                </a:solidFill>
-                <a:latin typeface="D2Coding" panose="020B0609020101020101" pitchFamily="49" charset="-127"/>
-                <a:ea typeface="D2Coding" panose="020B0609020101020101" pitchFamily="49" charset="-127"/>
-              </a:rPr>
-              <a:t>무엇이냐에</a:t>
-            </a:r>
-            <a:r>
-              <a:rPr lang="ko-KR" altLang="en-US" sz="1200" dirty="0">
-                <a:solidFill>
-                  <a:schemeClr val="tx1"/>
-                </a:solidFill>
-                <a:latin typeface="D2Coding" panose="020B0609020101020101" pitchFamily="49" charset="-127"/>
-                <a:ea typeface="D2Coding" panose="020B0609020101020101" pitchFamily="49" charset="-127"/>
-              </a:rPr>
-              <a:t> 따라 이 </a:t>
-            </a:r>
-            <a:r>
-              <a:rPr lang="ko-KR" altLang="en-US" sz="1200" dirty="0" err="1">
-                <a:solidFill>
-                  <a:schemeClr val="tx1"/>
-                </a:solidFill>
-                <a:latin typeface="D2Coding" panose="020B0609020101020101" pitchFamily="49" charset="-127"/>
-                <a:ea typeface="D2Coding" panose="020B0609020101020101" pitchFamily="49" charset="-127"/>
-              </a:rPr>
-              <a:t>어텐션</a:t>
-            </a:r>
-            <a:r>
-              <a:rPr lang="ko-KR" altLang="en-US" sz="1200" dirty="0">
-                <a:solidFill>
-                  <a:schemeClr val="tx1"/>
-                </a:solidFill>
-                <a:latin typeface="D2Coding" panose="020B0609020101020101" pitchFamily="49" charset="-127"/>
-                <a:ea typeface="D2Coding" panose="020B0609020101020101" pitchFamily="49" charset="-127"/>
-              </a:rPr>
-              <a:t> 모델은 데이터를 늘릴 수도</a:t>
-            </a:r>
-            <a:r>
-              <a:rPr lang="en-US" altLang="ko-KR" sz="1200" dirty="0">
-                <a:solidFill>
-                  <a:schemeClr val="tx1"/>
-                </a:solidFill>
-                <a:latin typeface="D2Coding" panose="020B0609020101020101" pitchFamily="49" charset="-127"/>
-                <a:ea typeface="D2Coding" panose="020B0609020101020101" pitchFamily="49" charset="-127"/>
-              </a:rPr>
-              <a:t>, </a:t>
-            </a:r>
-            <a:r>
-              <a:rPr lang="ko-KR" altLang="en-US" sz="1200" dirty="0">
-                <a:solidFill>
-                  <a:schemeClr val="tx1"/>
-                </a:solidFill>
-                <a:latin typeface="D2Coding" panose="020B0609020101020101" pitchFamily="49" charset="-127"/>
-                <a:ea typeface="D2Coding" panose="020B0609020101020101" pitchFamily="49" charset="-127"/>
-              </a:rPr>
-              <a:t>회전시킬 수도</a:t>
-            </a:r>
-            <a:r>
-              <a:rPr lang="en-US" altLang="ko-KR" sz="1200" dirty="0">
-                <a:solidFill>
-                  <a:schemeClr val="tx1"/>
-                </a:solidFill>
-                <a:latin typeface="D2Coding" panose="020B0609020101020101" pitchFamily="49" charset="-127"/>
-                <a:ea typeface="D2Coding" panose="020B0609020101020101" pitchFamily="49" charset="-127"/>
-              </a:rPr>
-              <a:t>, </a:t>
-            </a:r>
-            <a:r>
-              <a:rPr lang="ko-KR" altLang="en-US" sz="1200" dirty="0">
-                <a:solidFill>
-                  <a:schemeClr val="tx1"/>
-                </a:solidFill>
-                <a:latin typeface="D2Coding" panose="020B0609020101020101" pitchFamily="49" charset="-127"/>
-                <a:ea typeface="D2Coding" panose="020B0609020101020101" pitchFamily="49" charset="-127"/>
-              </a:rPr>
-              <a:t>특정 차원을 찌그러뜨릴 수도 </a:t>
-            </a:r>
-            <a:r>
-              <a:rPr lang="en-US" altLang="ko-KR" sz="1200" dirty="0">
-                <a:solidFill>
-                  <a:schemeClr val="tx1"/>
-                </a:solidFill>
-                <a:latin typeface="D2Coding" panose="020B0609020101020101" pitchFamily="49" charset="-127"/>
-                <a:ea typeface="D2Coding" panose="020B0609020101020101" pitchFamily="49" charset="-127"/>
-              </a:rPr>
-              <a:t>data</a:t>
-            </a:r>
-            <a:r>
-              <a:rPr lang="ko-KR" altLang="en-US" sz="1200" dirty="0">
-                <a:solidFill>
-                  <a:schemeClr val="tx1"/>
-                </a:solidFill>
-                <a:latin typeface="D2Coding" panose="020B0609020101020101" pitchFamily="49" charset="-127"/>
-                <a:ea typeface="D2Coding" panose="020B0609020101020101" pitchFamily="49" charset="-127"/>
-              </a:rPr>
-              <a:t> </a:t>
-            </a:r>
-            <a:r>
-              <a:rPr lang="en-US" altLang="ko-KR" sz="1200" dirty="0">
-                <a:solidFill>
-                  <a:schemeClr val="tx1"/>
-                </a:solidFill>
-                <a:latin typeface="D2Coding" panose="020B0609020101020101" pitchFamily="49" charset="-127"/>
-                <a:ea typeface="D2Coding" panose="020B0609020101020101" pitchFamily="49" charset="-127"/>
-              </a:rPr>
-              <a:t>representation</a:t>
-            </a:r>
-            <a:r>
-              <a:rPr lang="ko-KR" altLang="en-US" sz="1200" dirty="0">
-                <a:solidFill>
-                  <a:schemeClr val="tx1"/>
-                </a:solidFill>
-                <a:latin typeface="D2Coding" panose="020B0609020101020101" pitchFamily="49" charset="-127"/>
-                <a:ea typeface="D2Coding" panose="020B0609020101020101" pitchFamily="49" charset="-127"/>
-              </a:rPr>
-              <a:t>이 가능하게 되어</a:t>
-            </a:r>
-            <a:endParaRPr lang="en-US" altLang="ko-KR" sz="1200" dirty="0">
-              <a:solidFill>
-                <a:schemeClr val="tx1"/>
-              </a:solidFill>
-              <a:latin typeface="D2Coding" panose="020B0609020101020101" pitchFamily="49" charset="-127"/>
-              <a:ea typeface="D2Coding" panose="020B0609020101020101" pitchFamily="49" charset="-127"/>
-            </a:endParaRPr>
-          </a:p>
-          <a:p>
-            <a:pPr marL="285750" indent="-285750">
-              <a:buFont typeface="Wingdings" panose="05000000000000000000" pitchFamily="2" charset="2"/>
-              <a:buChar char="§"/>
-            </a:pPr>
-            <a:endParaRPr lang="en-US" altLang="ko-KR" dirty="0">
-              <a:latin typeface="D2Coding" panose="020B0609020101020101" pitchFamily="49" charset="-127"/>
-              <a:ea typeface="D2Coding" panose="020B0609020101020101" pitchFamily="49" charset="-127"/>
-            </a:endParaRPr>
-          </a:p>
-          <a:p>
-            <a:pPr marL="171450" indent="-171450">
-              <a:buFont typeface="Wingdings" panose="05000000000000000000" pitchFamily="2" charset="2"/>
-              <a:buChar char="§"/>
-            </a:pPr>
-            <a:r>
-              <a:rPr lang="ko-KR" altLang="en-US" sz="1200" dirty="0">
-                <a:solidFill>
-                  <a:schemeClr val="tx1"/>
-                </a:solidFill>
-                <a:latin typeface="D2Coding" panose="020B0609020101020101" pitchFamily="49" charset="-127"/>
-                <a:ea typeface="D2Coding" panose="020B0609020101020101" pitchFamily="49" charset="-127"/>
-              </a:rPr>
-              <a:t>즉</a:t>
-            </a:r>
-            <a:r>
-              <a:rPr lang="en-US" altLang="ko-KR" sz="1200" dirty="0">
-                <a:solidFill>
-                  <a:schemeClr val="tx1"/>
-                </a:solidFill>
-                <a:latin typeface="D2Coding" panose="020B0609020101020101" pitchFamily="49" charset="-127"/>
-                <a:ea typeface="D2Coding" panose="020B0609020101020101" pitchFamily="49" charset="-127"/>
-              </a:rPr>
-              <a:t>, </a:t>
-            </a:r>
-            <a:r>
-              <a:rPr lang="ko-KR" altLang="en-US" sz="1200" dirty="0">
-                <a:solidFill>
-                  <a:schemeClr val="tx1"/>
-                </a:solidFill>
-                <a:latin typeface="D2Coding" panose="020B0609020101020101" pitchFamily="49" charset="-127"/>
-                <a:ea typeface="D2Coding" panose="020B0609020101020101" pitchFamily="49" charset="-127"/>
-              </a:rPr>
-              <a:t>모델이 학습을 통해 표현할 수 있는 관계성의 가짓수</a:t>
-            </a:r>
-            <a:r>
-              <a:rPr lang="en-US" altLang="ko-KR" sz="1200" dirty="0">
-                <a:solidFill>
-                  <a:schemeClr val="tx1"/>
-                </a:solidFill>
-                <a:latin typeface="D2Coding" panose="020B0609020101020101" pitchFamily="49" charset="-127"/>
-                <a:ea typeface="D2Coding" panose="020B0609020101020101" pitchFamily="49" charset="-127"/>
-              </a:rPr>
-              <a:t>(</a:t>
-            </a:r>
-            <a:r>
-              <a:rPr lang="ko-KR" altLang="en-US" sz="1200" dirty="0">
-                <a:solidFill>
-                  <a:schemeClr val="tx1"/>
-                </a:solidFill>
-                <a:latin typeface="D2Coding" panose="020B0609020101020101" pitchFamily="49" charset="-127"/>
-                <a:ea typeface="D2Coding" panose="020B0609020101020101" pitchFamily="49" charset="-127"/>
-              </a:rPr>
-              <a:t>함수의 후보들</a:t>
-            </a:r>
-            <a:r>
-              <a:rPr lang="en-US" altLang="ko-KR" sz="1200" dirty="0">
-                <a:solidFill>
-                  <a:schemeClr val="tx1"/>
-                </a:solidFill>
-                <a:latin typeface="D2Coding" panose="020B0609020101020101" pitchFamily="49" charset="-127"/>
-                <a:ea typeface="D2Coding" panose="020B0609020101020101" pitchFamily="49" charset="-127"/>
-              </a:rPr>
-              <a:t>)</a:t>
-            </a:r>
-            <a:r>
-              <a:rPr lang="ko-KR" altLang="en-US" sz="1200" dirty="0">
-                <a:solidFill>
-                  <a:schemeClr val="tx1"/>
-                </a:solidFill>
-                <a:latin typeface="D2Coding" panose="020B0609020101020101" pitchFamily="49" charset="-127"/>
-                <a:ea typeface="D2Coding" panose="020B0609020101020101" pitchFamily="49" charset="-127"/>
-              </a:rPr>
-              <a:t>가 수억</a:t>
-            </a:r>
-            <a:r>
-              <a:rPr lang="en-US" altLang="ko-KR" sz="1200" dirty="0">
-                <a:solidFill>
-                  <a:schemeClr val="tx1"/>
-                </a:solidFill>
-                <a:latin typeface="D2Coding" panose="020B0609020101020101" pitchFamily="49" charset="-127"/>
-                <a:ea typeface="D2Coding" panose="020B0609020101020101" pitchFamily="49" charset="-127"/>
-              </a:rPr>
-              <a:t>, </a:t>
-            </a:r>
-            <a:r>
-              <a:rPr lang="ko-KR" altLang="en-US" sz="1200" dirty="0">
-                <a:solidFill>
-                  <a:schemeClr val="tx1"/>
-                </a:solidFill>
-                <a:latin typeface="D2Coding" panose="020B0609020101020101" pitchFamily="49" charset="-127"/>
-                <a:ea typeface="D2Coding" panose="020B0609020101020101" pitchFamily="49" charset="-127"/>
-              </a:rPr>
-              <a:t>수조 개로 늘어난 것입니다</a:t>
-            </a:r>
-            <a:r>
-              <a:rPr lang="en-US" altLang="ko-KR" sz="1200" dirty="0">
-                <a:solidFill>
-                  <a:schemeClr val="tx1"/>
-                </a:solidFill>
-                <a:latin typeface="D2Coding" panose="020B0609020101020101" pitchFamily="49" charset="-127"/>
-                <a:ea typeface="D2Coding" panose="020B0609020101020101" pitchFamily="49" charset="-127"/>
-              </a:rPr>
-              <a:t>. </a:t>
-            </a:r>
-            <a:r>
-              <a:rPr lang="ko-KR" altLang="en-US" sz="1200" dirty="0">
-                <a:solidFill>
-                  <a:schemeClr val="tx1"/>
-                </a:solidFill>
-                <a:latin typeface="D2Coding" panose="020B0609020101020101" pitchFamily="49" charset="-127"/>
-                <a:ea typeface="D2Coding" panose="020B0609020101020101" pitchFamily="49" charset="-127"/>
-              </a:rPr>
-              <a:t>이것은 </a:t>
-            </a:r>
-            <a:r>
-              <a:rPr lang="en-US" altLang="ko-KR" sz="1200" dirty="0">
-                <a:solidFill>
-                  <a:schemeClr val="tx1"/>
-                </a:solidFill>
-                <a:latin typeface="D2Coding" panose="020B0609020101020101" pitchFamily="49" charset="-127"/>
-                <a:ea typeface="D2Coding" panose="020B0609020101020101" pitchFamily="49" charset="-127"/>
-              </a:rPr>
-              <a:t>"</a:t>
-            </a:r>
-            <a:r>
-              <a:rPr lang="ko-KR" altLang="en-US" sz="1200" dirty="0">
-                <a:solidFill>
-                  <a:schemeClr val="tx1"/>
-                </a:solidFill>
-                <a:latin typeface="D2Coding" panose="020B0609020101020101" pitchFamily="49" charset="-127"/>
-                <a:ea typeface="D2Coding" panose="020B0609020101020101" pitchFamily="49" charset="-127"/>
-              </a:rPr>
-              <a:t>가설 공간을 훨씬 더 풍부하게 만들어 줌</a:t>
-            </a:r>
-          </a:p>
-        </p:txBody>
-      </p:sp>
-      <p:sp>
-        <p:nvSpPr>
-          <p:cNvPr id="12" name="설명선: 선(강조선) 11">
-            <a:extLst>
-              <a:ext uri="{FF2B5EF4-FFF2-40B4-BE49-F238E27FC236}">
-                <a16:creationId xmlns:a16="http://schemas.microsoft.com/office/drawing/2014/main" id="{57B4367C-8247-34B9-0338-40B441E54151}"/>
-              </a:ext>
-            </a:extLst>
-          </p:cNvPr>
-          <p:cNvSpPr/>
-          <p:nvPr/>
-        </p:nvSpPr>
-        <p:spPr>
-          <a:xfrm>
-            <a:off x="9680832" y="1383864"/>
-            <a:ext cx="2082544" cy="1246495"/>
-          </a:xfrm>
-          <a:prstGeom prst="accentCallout1">
-            <a:avLst>
-              <a:gd name="adj1" fmla="val 18750"/>
-              <a:gd name="adj2" fmla="val -8333"/>
-              <a:gd name="adj3" fmla="val 24529"/>
-              <a:gd name="adj4" fmla="val -19654"/>
-            </a:avLst>
-          </a:prstGeom>
-          <a:solidFill>
-            <a:schemeClr val="accent6">
-              <a:lumMod val="20000"/>
-              <a:lumOff val="80000"/>
-            </a:schemeClr>
-          </a:solidFill>
-        </p:spPr>
-        <p:style>
-          <a:lnRef idx="2">
-            <a:schemeClr val="accent1">
-              <a:shade val="15000"/>
-            </a:schemeClr>
-          </a:lnRef>
-          <a:fillRef idx="1">
-            <a:schemeClr val="accent1"/>
-          </a:fillRef>
-          <a:effectRef idx="0">
-            <a:schemeClr val="accent1"/>
-          </a:effectRef>
-          <a:fontRef idx="minor">
-            <a:schemeClr val="lt1"/>
-          </a:fontRef>
-        </p:style>
-        <p:txBody>
-          <a:bodyPr rtlCol="0" anchor="ctr"/>
-          <a:lstStyle/>
-          <a:p>
-            <a:pPr marL="171450" indent="-171450">
-              <a:buFont typeface="Wingdings" panose="05000000000000000000" pitchFamily="2" charset="2"/>
-              <a:buChar char="§"/>
-            </a:pPr>
-            <a:r>
-              <a:rPr lang="ko-KR" altLang="en-US" sz="1200" dirty="0">
-                <a:solidFill>
-                  <a:schemeClr val="tx1"/>
-                </a:solidFill>
-                <a:latin typeface="D2Coding" panose="020B0609020101020101" pitchFamily="49" charset="-127"/>
-                <a:ea typeface="D2Coding" panose="020B0609020101020101" pitchFamily="49" charset="-127"/>
-              </a:rPr>
-              <a:t>고정된 </a:t>
-            </a:r>
-            <a:r>
-              <a:rPr lang="ko-KR" altLang="en-US" sz="1200" dirty="0" err="1">
-                <a:solidFill>
-                  <a:schemeClr val="tx1"/>
-                </a:solidFill>
-                <a:latin typeface="D2Coding" panose="020B0609020101020101" pitchFamily="49" charset="-127"/>
-                <a:ea typeface="D2Coding" panose="020B0609020101020101" pitchFamily="49" charset="-127"/>
-              </a:rPr>
-              <a:t>임베딩이</a:t>
-            </a:r>
-            <a:r>
-              <a:rPr lang="ko-KR" altLang="en-US" sz="1200" dirty="0">
-                <a:solidFill>
-                  <a:schemeClr val="tx1"/>
-                </a:solidFill>
-                <a:latin typeface="D2Coding" panose="020B0609020101020101" pitchFamily="49" charset="-127"/>
-                <a:ea typeface="D2Coding" panose="020B0609020101020101" pitchFamily="49" charset="-127"/>
-              </a:rPr>
-              <a:t> 약점</a:t>
-            </a:r>
-            <a:r>
-              <a:rPr lang="en-US" altLang="ko-KR" sz="1200" dirty="0">
-                <a:solidFill>
-                  <a:schemeClr val="tx1"/>
-                </a:solidFill>
-                <a:latin typeface="D2Coding" panose="020B0609020101020101" pitchFamily="49" charset="-127"/>
-                <a:ea typeface="D2Coding" panose="020B0609020101020101" pitchFamily="49" charset="-127"/>
-              </a:rPr>
-              <a:t>, apple</a:t>
-            </a:r>
-            <a:r>
-              <a:rPr lang="ko-KR" altLang="en-US" sz="1200" dirty="0">
-                <a:solidFill>
-                  <a:schemeClr val="tx1"/>
-                </a:solidFill>
-                <a:latin typeface="D2Coding" panose="020B0609020101020101" pitchFamily="49" charset="-127"/>
-                <a:ea typeface="D2Coding" panose="020B0609020101020101" pitchFamily="49" charset="-127"/>
-              </a:rPr>
-              <a:t>이 </a:t>
-            </a:r>
-            <a:r>
-              <a:rPr lang="en-US" altLang="ko-KR" sz="1200" dirty="0">
-                <a:solidFill>
-                  <a:schemeClr val="tx1"/>
-                </a:solidFill>
-                <a:latin typeface="D2Coding" panose="020B0609020101020101" pitchFamily="49" charset="-127"/>
-                <a:ea typeface="D2Coding" panose="020B0609020101020101" pitchFamily="49" charset="-127"/>
-              </a:rPr>
-              <a:t>target</a:t>
-            </a:r>
-            <a:r>
-              <a:rPr lang="ko-KR" altLang="en-US" sz="1200" dirty="0">
-                <a:solidFill>
-                  <a:schemeClr val="tx1"/>
-                </a:solidFill>
-                <a:latin typeface="D2Coding" panose="020B0609020101020101" pitchFamily="49" charset="-127"/>
-                <a:ea typeface="D2Coding" panose="020B0609020101020101" pitchFamily="49" charset="-127"/>
-              </a:rPr>
-              <a:t>인 경우에도 </a:t>
-            </a:r>
-            <a:r>
-              <a:rPr lang="en-US" altLang="ko-KR" sz="1200" dirty="0">
-                <a:solidFill>
-                  <a:schemeClr val="tx1"/>
-                </a:solidFill>
-                <a:latin typeface="D2Coding" panose="020B0609020101020101" pitchFamily="49" charset="-127"/>
-                <a:ea typeface="D2Coding" panose="020B0609020101020101" pitchFamily="49" charset="-127"/>
-              </a:rPr>
-              <a:t>sources</a:t>
-            </a:r>
-            <a:r>
-              <a:rPr lang="ko-KR" altLang="en-US" sz="1200" dirty="0">
-                <a:solidFill>
-                  <a:schemeClr val="tx1"/>
-                </a:solidFill>
-                <a:latin typeface="D2Coding" panose="020B0609020101020101" pitchFamily="49" charset="-127"/>
-                <a:ea typeface="D2Coding" panose="020B0609020101020101" pitchFamily="49" charset="-127"/>
-              </a:rPr>
-              <a:t>에 </a:t>
-            </a:r>
-            <a:r>
-              <a:rPr lang="ko-KR" altLang="en-US" sz="1200" dirty="0" err="1">
-                <a:solidFill>
-                  <a:schemeClr val="tx1"/>
-                </a:solidFill>
-                <a:latin typeface="D2Coding" panose="020B0609020101020101" pitchFamily="49" charset="-127"/>
-                <a:ea typeface="D2Coding" panose="020B0609020101020101" pitchFamily="49" charset="-127"/>
-              </a:rPr>
-              <a:t>맥킨토시나</a:t>
-            </a:r>
-            <a:r>
-              <a:rPr lang="en-US" altLang="ko-KR" sz="1200" dirty="0">
-                <a:solidFill>
-                  <a:schemeClr val="tx1"/>
-                </a:solidFill>
-                <a:latin typeface="D2Coding" panose="020B0609020101020101" pitchFamily="49" charset="-127"/>
-                <a:ea typeface="D2Coding" panose="020B0609020101020101" pitchFamily="49" charset="-127"/>
-              </a:rPr>
-              <a:t>, </a:t>
-            </a:r>
-            <a:r>
-              <a:rPr lang="ko-KR" altLang="en-US" sz="1200" dirty="0">
-                <a:solidFill>
-                  <a:schemeClr val="tx1"/>
-                </a:solidFill>
-                <a:latin typeface="D2Coding" panose="020B0609020101020101" pitchFamily="49" charset="-127"/>
-                <a:ea typeface="D2Coding" panose="020B0609020101020101" pitchFamily="49" charset="-127"/>
-              </a:rPr>
-              <a:t>아이폰 등과 같은 단어와 연관성을 찾기 </a:t>
-            </a:r>
-            <a:r>
-              <a:rPr lang="ko-KR" altLang="en-US" sz="1200" dirty="0" err="1">
-                <a:solidFill>
-                  <a:schemeClr val="tx1"/>
-                </a:solidFill>
-                <a:latin typeface="D2Coding" panose="020B0609020101020101" pitchFamily="49" charset="-127"/>
-                <a:ea typeface="D2Coding" panose="020B0609020101020101" pitchFamily="49" charset="-127"/>
-              </a:rPr>
-              <a:t>힘등</a:t>
-            </a:r>
-            <a:endParaRPr lang="ko-KR" altLang="en-US" sz="1200" dirty="0">
-              <a:solidFill>
-                <a:schemeClr val="tx1"/>
-              </a:solidFill>
-              <a:latin typeface="D2Coding" panose="020B0609020101020101" pitchFamily="49" charset="-127"/>
-              <a:ea typeface="D2Coding" panose="020B0609020101020101" pitchFamily="49" charset="-127"/>
-            </a:endParaRPr>
-          </a:p>
-        </p:txBody>
-      </p:sp>
-      <p:sp>
-        <p:nvSpPr>
-          <p:cNvPr id="13" name="화살표: 아래쪽 12">
-            <a:extLst>
-              <a:ext uri="{FF2B5EF4-FFF2-40B4-BE49-F238E27FC236}">
-                <a16:creationId xmlns:a16="http://schemas.microsoft.com/office/drawing/2014/main" id="{D2CE9684-F397-CE45-DA5F-7FA117778FB7}"/>
-              </a:ext>
-            </a:extLst>
-          </p:cNvPr>
-          <p:cNvSpPr/>
-          <p:nvPr/>
-        </p:nvSpPr>
-        <p:spPr>
-          <a:xfrm>
-            <a:off x="3495676" y="2765801"/>
-            <a:ext cx="571499" cy="491749"/>
-          </a:xfrm>
-          <a:prstGeom prst="downArrow">
-            <a:avLst>
-              <a:gd name="adj1" fmla="val 52391"/>
-              <a:gd name="adj2" fmla="val 50000"/>
-            </a:avLst>
-          </a:prstGeom>
-        </p:spPr>
-        <p:style>
-          <a:lnRef idx="2">
-            <a:schemeClr val="accent1">
-              <a:shade val="15000"/>
-            </a:schemeClr>
-          </a:lnRef>
-          <a:fillRef idx="1">
-            <a:schemeClr val="accent1"/>
-          </a:fillRef>
-          <a:effectRef idx="0">
-            <a:schemeClr val="accent1"/>
-          </a:effectRef>
-          <a:fontRef idx="minor">
-            <a:schemeClr val="lt1"/>
-          </a:fontRef>
-        </p:style>
-        <p:txBody>
-          <a:bodyPr rtlCol="0" anchor="ctr"/>
-          <a:lstStyle/>
-          <a:p>
-            <a:pPr algn="ctr"/>
-            <a:endParaRPr lang="ko-KR" altLang="en-US"/>
-          </a:p>
-        </p:txBody>
-      </p:sp>
-      <p:sp>
-        <p:nvSpPr>
-          <p:cNvPr id="2" name="슬라이드 번호 개체 틀 3">
-            <a:extLst>
-              <a:ext uri="{FF2B5EF4-FFF2-40B4-BE49-F238E27FC236}">
-                <a16:creationId xmlns:a16="http://schemas.microsoft.com/office/drawing/2014/main" id="{FBD3113B-CEE3-3AB2-CA62-3B7E2CA67ECB}"/>
-              </a:ext>
-            </a:extLst>
-          </p:cNvPr>
-          <p:cNvSpPr txBox="1">
-            <a:spLocks/>
-          </p:cNvSpPr>
-          <p:nvPr/>
-        </p:nvSpPr>
-        <p:spPr>
-          <a:xfrm>
-            <a:off x="11123611" y="299420"/>
-            <a:ext cx="753545" cy="365125"/>
-          </a:xfrm>
-          <a:prstGeom prst="rect">
-            <a:avLst/>
-          </a:prstGeom>
-        </p:spPr>
-        <p:txBody>
-          <a:bodyPr vert="horz" lIns="91440" tIns="45720" rIns="91440" bIns="45720" rtlCol="0" anchor="ctr"/>
-          <a:lstStyle>
-            <a:defPPr rtl="0">
-              <a:defRPr lang="ko-KR"/>
-            </a:defPPr>
-            <a:lvl1pPr marL="0" algn="r" defTabSz="914400" rtl="0" eaLnBrk="1" latinLnBrk="0" hangingPunct="1">
-              <a:defRPr sz="1200" kern="1200" baseline="0">
-                <a:solidFill>
-                  <a:schemeClr val="tx1">
-                    <a:lumMod val="65000"/>
-                    <a:lumOff val="35000"/>
-                  </a:schemeClr>
-                </a:solidFill>
-                <a:latin typeface="맑은 고딕" panose="020B0503020000020004" pitchFamily="50" charset="-127"/>
-                <a:ea typeface="맑은 고딕" panose="020B0503020000020004" pitchFamily="50" charset="-127"/>
-                <a:cs typeface="+mn-cs"/>
-              </a:defRPr>
-            </a:lvl1pPr>
-            <a:lvl2pPr marL="457200" algn="l" defTabSz="914400" rtl="0" eaLnBrk="1" latinLnBrk="0" hangingPunct="1">
-              <a:defRPr sz="1800" kern="1200">
-                <a:solidFill>
-                  <a:schemeClr val="tx1"/>
-                </a:solidFill>
-                <a:latin typeface="+mn-lt"/>
-                <a:ea typeface="+mn-ea"/>
-                <a:cs typeface="+mn-cs"/>
-              </a:defRPr>
-            </a:lvl2pPr>
-            <a:lvl3pPr marL="914400" algn="l" defTabSz="914400" rtl="0" eaLnBrk="1" latinLnBrk="0" hangingPunct="1">
-              <a:defRPr sz="1800" kern="1200">
-                <a:solidFill>
-                  <a:schemeClr val="tx1"/>
-                </a:solidFill>
-                <a:latin typeface="+mn-lt"/>
-                <a:ea typeface="+mn-ea"/>
-                <a:cs typeface="+mn-cs"/>
-              </a:defRPr>
-            </a:lvl3pPr>
-            <a:lvl4pPr marL="1371600" algn="l" defTabSz="914400" rtl="0" eaLnBrk="1" latinLnBrk="0" hangingPunct="1">
-              <a:defRPr sz="1800" kern="1200">
-                <a:solidFill>
-                  <a:schemeClr val="tx1"/>
-                </a:solidFill>
-                <a:latin typeface="+mn-lt"/>
-                <a:ea typeface="+mn-ea"/>
-                <a:cs typeface="+mn-cs"/>
-              </a:defRPr>
-            </a:lvl4pPr>
-            <a:lvl5pPr marL="1828800" algn="l" defTabSz="914400" rtl="0" eaLnBrk="1" latinLnBrk="0" hangingPunct="1">
-              <a:defRPr sz="1800" kern="1200">
-                <a:solidFill>
-                  <a:schemeClr val="tx1"/>
-                </a:solidFill>
-                <a:latin typeface="+mn-lt"/>
-                <a:ea typeface="+mn-ea"/>
-                <a:cs typeface="+mn-cs"/>
-              </a:defRPr>
-            </a:lvl5pPr>
-            <a:lvl6pPr marL="2286000" algn="l" defTabSz="914400" rtl="0" eaLnBrk="1" latinLnBrk="0" hangingPunct="1">
-              <a:defRPr sz="1800" kern="1200">
-                <a:solidFill>
-                  <a:schemeClr val="tx1"/>
-                </a:solidFill>
-                <a:latin typeface="+mn-lt"/>
-                <a:ea typeface="+mn-ea"/>
-                <a:cs typeface="+mn-cs"/>
-              </a:defRPr>
-            </a:lvl6pPr>
-            <a:lvl7pPr marL="2743200" algn="l" defTabSz="914400" rtl="0" eaLnBrk="1" latinLnBrk="0" hangingPunct="1">
-              <a:defRPr sz="1800" kern="1200">
-                <a:solidFill>
-                  <a:schemeClr val="tx1"/>
-                </a:solidFill>
-                <a:latin typeface="+mn-lt"/>
-                <a:ea typeface="+mn-ea"/>
-                <a:cs typeface="+mn-cs"/>
-              </a:defRPr>
-            </a:lvl7pPr>
-            <a:lvl8pPr marL="3200400" algn="l" defTabSz="914400" rtl="0" eaLnBrk="1" latinLnBrk="0" hangingPunct="1">
-              <a:defRPr sz="1800" kern="1200">
-                <a:solidFill>
-                  <a:schemeClr val="tx1"/>
-                </a:solidFill>
-                <a:latin typeface="+mn-lt"/>
-                <a:ea typeface="+mn-ea"/>
-                <a:cs typeface="+mn-cs"/>
-              </a:defRPr>
-            </a:lvl8pPr>
-            <a:lvl9pPr marL="3657600" algn="l" defTabSz="914400" rtl="0" eaLnBrk="1" latinLnBrk="0" hangingPunct="1">
-              <a:defRPr sz="1800" kern="1200">
-                <a:solidFill>
-                  <a:schemeClr val="tx1"/>
-                </a:solidFill>
-                <a:latin typeface="+mn-lt"/>
-                <a:ea typeface="+mn-ea"/>
-                <a:cs typeface="+mn-cs"/>
-              </a:defRPr>
-            </a:lvl9pPr>
-          </a:lstStyle>
-          <a:p>
-            <a:fld id="{D57F1E4F-1CFF-5643-939E-217C01CDF565}" type="slidenum">
-              <a:rPr lang="en-US" sz="1400" b="1" smtClean="0">
-                <a:latin typeface="D2Coding" panose="020B0609020101020101" pitchFamily="49" charset="-127"/>
-                <a:ea typeface="D2Coding" panose="020B0609020101020101" pitchFamily="49" charset="-127"/>
-              </a:rPr>
-              <a:pPr/>
-              <a:t>29</a:t>
-            </a:fld>
-            <a:endParaRPr lang="en-US" sz="1400" b="1" dirty="0">
-              <a:latin typeface="D2Coding" panose="020B0609020101020101" pitchFamily="49" charset="-127"/>
-              <a:ea typeface="D2Coding" panose="020B0609020101020101" pitchFamily="49" charset="-127"/>
-            </a:endParaRPr>
-          </a:p>
-        </p:txBody>
-      </p:sp>
-    </p:spTree>
-    <p:extLst>
-      <p:ext uri="{BB962C8B-B14F-4D97-AF65-F5344CB8AC3E}">
-        <p14:creationId xmlns:p14="http://schemas.microsoft.com/office/powerpoint/2010/main" val="3644008806"/>
-      </p:ext>
-    </p:extLst>
-  </p:cSld>
-  <p:clrMapOvr>
-    <a:masterClrMapping/>
-  </p:clrMapOvr>
-</p:sld>
-</file>
-
 <file path=ppt/slides/slide3.xml><?xml version="1.0" encoding="utf-8"?>
 <p:sld xmlns:a="http://schemas.openxmlformats.org/drawingml/2006/main" xmlns:r="http://schemas.openxmlformats.org/officeDocument/2006/relationships" xmlns:p="http://schemas.openxmlformats.org/presentationml/2006/main">
   <p:cSld>
@@ -26941,15 +25181,8 @@
           <a:p>
             <a:pPr algn="l"/>
             <a:r>
-              <a:rPr lang="en-US" altLang="ko-KR" sz="2800" cap="none" dirty="0">
-                <a:solidFill>
-                  <a:schemeClr val="bg2">
-                    <a:lumMod val="25000"/>
-                  </a:schemeClr>
-                </a:solidFill>
-                <a:latin typeface="D2Coding" panose="020B0609020101020101" pitchFamily="49" charset="-127"/>
-                <a:ea typeface="D2Coding" panose="020B0609020101020101" pitchFamily="49" charset="-127"/>
-                <a:cs typeface="Segoe UI Light" panose="020B0502040204020203" pitchFamily="34" charset="0"/>
+              <a:rPr lang="en-US" altLang="ko-KR" sz="2800" b="1" cap="none" dirty="0">
+                <a:latin typeface="Lora" pitchFamily="2" charset="0"/>
               </a:rPr>
               <a:t>The language model</a:t>
             </a:r>
@@ -27391,6 +25624,1932 @@
 </file>
 
 <file path=ppt/slides/slide30.xml><?xml version="1.0" encoding="utf-8"?>
+<p:sld xmlns:a="http://schemas.openxmlformats.org/drawingml/2006/main" xmlns:r="http://schemas.openxmlformats.org/officeDocument/2006/relationships" xmlns:p="http://schemas.openxmlformats.org/presentationml/2006/main">
+  <p:cSld>
+    <p:spTree>
+      <p:nvGrpSpPr>
+        <p:cNvPr id="1" name="">
+          <a:extLst>
+            <a:ext uri="{FF2B5EF4-FFF2-40B4-BE49-F238E27FC236}">
+              <a16:creationId xmlns:a16="http://schemas.microsoft.com/office/drawing/2014/main" id="{EDD5BA04-637B-645C-99DF-7D88A1253A68}"/>
+            </a:ext>
+          </a:extLst>
+        </p:cNvPr>
+        <p:cNvGrpSpPr/>
+        <p:nvPr/>
+      </p:nvGrpSpPr>
+      <p:grpSpPr>
+        <a:xfrm>
+          <a:off x="0" y="0"/>
+          <a:ext cx="0" cy="0"/>
+          <a:chOff x="0" y="0"/>
+          <a:chExt cx="0" cy="0"/>
+        </a:xfrm>
+      </p:grpSpPr>
+      <p:sp>
+        <p:nvSpPr>
+          <p:cNvPr id="3" name="제목 1">
+            <a:extLst>
+              <a:ext uri="{FF2B5EF4-FFF2-40B4-BE49-F238E27FC236}">
+                <a16:creationId xmlns:a16="http://schemas.microsoft.com/office/drawing/2014/main" id="{3CF5DFFC-9095-DCA0-C08C-70FAA0EC7501}"/>
+              </a:ext>
+            </a:extLst>
+          </p:cNvPr>
+          <p:cNvSpPr txBox="1">
+            <a:spLocks/>
+          </p:cNvSpPr>
+          <p:nvPr/>
+        </p:nvSpPr>
+        <p:spPr>
+          <a:xfrm>
+            <a:off x="475645" y="481983"/>
+            <a:ext cx="10353762" cy="766439"/>
+          </a:xfrm>
+          <a:prstGeom prst="rect">
+            <a:avLst/>
+          </a:prstGeom>
+        </p:spPr>
+        <p:txBody>
+          <a:bodyPr vert="horz" lIns="91440" tIns="45720" rIns="91440" bIns="45720" rtlCol="0" anchor="ctr">
+            <a:normAutofit/>
+          </a:bodyPr>
+          <a:lstStyle>
+            <a:lvl1pPr algn="ctr" defTabSz="914400" rtl="0" eaLnBrk="1" latinLnBrk="1" hangingPunct="1">
+              <a:lnSpc>
+                <a:spcPct val="90000"/>
+              </a:lnSpc>
+              <a:spcBef>
+                <a:spcPct val="0"/>
+              </a:spcBef>
+              <a:buNone/>
+              <a:defRPr sz="3200" kern="1200" cap="all" baseline="0">
+                <a:solidFill>
+                  <a:schemeClr val="tx1"/>
+                </a:solidFill>
+                <a:effectLst/>
+                <a:latin typeface="Batang" panose="02030600000101010101" pitchFamily="18" charset="-127"/>
+                <a:ea typeface="Batang" panose="02030600000101010101" pitchFamily="18" charset="-127"/>
+                <a:cs typeface="+mj-cs"/>
+              </a:defRPr>
+            </a:lvl1pPr>
+          </a:lstStyle>
+          <a:p>
+            <a:pPr algn="l"/>
+            <a:r>
+              <a:rPr lang="en-US" altLang="ko-KR" sz="2800" b="1" cap="none" dirty="0">
+                <a:latin typeface="Lora" pitchFamily="2" charset="0"/>
+              </a:rPr>
+              <a:t>Q, K, V Attention(Query, Key, Value Attention)</a:t>
+            </a:r>
+          </a:p>
+        </p:txBody>
+      </p:sp>
+      <p:sp>
+        <p:nvSpPr>
+          <p:cNvPr id="5" name="TextBox 4">
+            <a:extLst>
+              <a:ext uri="{FF2B5EF4-FFF2-40B4-BE49-F238E27FC236}">
+                <a16:creationId xmlns:a16="http://schemas.microsoft.com/office/drawing/2014/main" id="{36742539-1047-AADF-A318-E21EC294A720}"/>
+              </a:ext>
+            </a:extLst>
+          </p:cNvPr>
+          <p:cNvSpPr txBox="1"/>
+          <p:nvPr/>
+        </p:nvSpPr>
+        <p:spPr>
+          <a:xfrm>
+            <a:off x="600074" y="1383864"/>
+            <a:ext cx="8686801" cy="1246495"/>
+          </a:xfrm>
+          <a:prstGeom prst="rect">
+            <a:avLst/>
+          </a:prstGeom>
+          <a:solidFill>
+            <a:srgbClr val="76E3FF"/>
+          </a:solidFill>
+        </p:spPr>
+        <p:txBody>
+          <a:bodyPr wrap="square">
+            <a:spAutoFit/>
+          </a:bodyPr>
+          <a:lstStyle/>
+          <a:p>
+            <a:r>
+              <a:rPr lang="ko-KR" altLang="en-US" sz="1500" dirty="0">
+                <a:latin typeface="D2Coding" panose="020B0609020101020101" pitchFamily="49" charset="-127"/>
+                <a:ea typeface="D2Coding" panose="020B0609020101020101" pitchFamily="49" charset="-127"/>
+              </a:rPr>
+              <a:t># </a:t>
+            </a:r>
+            <a:r>
+              <a:rPr lang="ko-KR" altLang="en-US" sz="1500" dirty="0" err="1">
+                <a:latin typeface="D2Coding" panose="020B0609020101020101" pitchFamily="49" charset="-127"/>
+                <a:ea typeface="D2Coding" panose="020B0609020101020101" pitchFamily="49" charset="-127"/>
+              </a:rPr>
+              <a:t>target</a:t>
+            </a:r>
+            <a:r>
+              <a:rPr lang="ko-KR" altLang="en-US" sz="1500" dirty="0">
+                <a:latin typeface="D2Coding" panose="020B0609020101020101" pitchFamily="49" charset="-127"/>
+                <a:ea typeface="D2Coding" panose="020B0609020101020101" pitchFamily="49" charset="-127"/>
+              </a:rPr>
+              <a:t> = </a:t>
+            </a:r>
+            <a:r>
+              <a:rPr lang="ko-KR" altLang="en-US" sz="1500" dirty="0" err="1">
+                <a:latin typeface="D2Coding" panose="020B0609020101020101" pitchFamily="49" charset="-127"/>
+                <a:ea typeface="D2Coding" panose="020B0609020101020101" pitchFamily="49" charset="-127"/>
+              </a:rPr>
+              <a:t>Query</a:t>
+            </a:r>
+            <a:r>
+              <a:rPr lang="ko-KR" altLang="en-US" sz="1500" dirty="0">
+                <a:latin typeface="D2Coding" panose="020B0609020101020101" pitchFamily="49" charset="-127"/>
+                <a:ea typeface="D2Coding" panose="020B0609020101020101" pitchFamily="49" charset="-127"/>
+              </a:rPr>
+              <a:t> 역할 / </a:t>
+            </a:r>
+            <a:r>
+              <a:rPr lang="ko-KR" altLang="en-US" sz="1500" dirty="0" err="1">
+                <a:latin typeface="D2Coding" panose="020B0609020101020101" pitchFamily="49" charset="-127"/>
+                <a:ea typeface="D2Coding" panose="020B0609020101020101" pitchFamily="49" charset="-127"/>
+              </a:rPr>
+              <a:t>s</a:t>
+            </a:r>
+            <a:r>
+              <a:rPr lang="ko-KR" altLang="en-US" sz="1500" dirty="0">
+                <a:latin typeface="D2Coding" panose="020B0609020101020101" pitchFamily="49" charset="-127"/>
+                <a:ea typeface="D2Coding" panose="020B0609020101020101" pitchFamily="49" charset="-127"/>
+              </a:rPr>
+              <a:t> = </a:t>
+            </a:r>
+            <a:r>
+              <a:rPr lang="ko-KR" altLang="en-US" sz="1500" dirty="0" err="1">
+                <a:latin typeface="D2Coding" panose="020B0609020101020101" pitchFamily="49" charset="-127"/>
+                <a:ea typeface="D2Coding" panose="020B0609020101020101" pitchFamily="49" charset="-127"/>
+              </a:rPr>
+              <a:t>Key와</a:t>
+            </a:r>
+            <a:r>
+              <a:rPr lang="ko-KR" altLang="en-US" sz="1500" dirty="0">
+                <a:latin typeface="D2Coding" panose="020B0609020101020101" pitchFamily="49" charset="-127"/>
+                <a:ea typeface="D2Coding" panose="020B0609020101020101" pitchFamily="49" charset="-127"/>
+              </a:rPr>
+              <a:t> </a:t>
+            </a:r>
+            <a:r>
+              <a:rPr lang="ko-KR" altLang="en-US" sz="1500" dirty="0" err="1">
+                <a:latin typeface="D2Coding" panose="020B0609020101020101" pitchFamily="49" charset="-127"/>
+                <a:ea typeface="D2Coding" panose="020B0609020101020101" pitchFamily="49" charset="-127"/>
+              </a:rPr>
+              <a:t>Value</a:t>
+            </a:r>
+            <a:r>
+              <a:rPr lang="ko-KR" altLang="en-US" sz="1500" dirty="0">
+                <a:latin typeface="D2Coding" panose="020B0609020101020101" pitchFamily="49" charset="-127"/>
+                <a:ea typeface="D2Coding" panose="020B0609020101020101" pitchFamily="49" charset="-127"/>
+              </a:rPr>
+              <a:t> 역할을 동시에 함 (재탕)</a:t>
+            </a:r>
+          </a:p>
+          <a:p>
+            <a:r>
+              <a:rPr lang="ko-KR" altLang="en-US" sz="1500" dirty="0" err="1">
+                <a:latin typeface="D2Coding" panose="020B0609020101020101" pitchFamily="49" charset="-127"/>
+                <a:ea typeface="D2Coding" panose="020B0609020101020101" pitchFamily="49" charset="-127"/>
+              </a:rPr>
+              <a:t>raw_scores</a:t>
+            </a:r>
+            <a:r>
+              <a:rPr lang="ko-KR" altLang="en-US" sz="1500" dirty="0">
+                <a:latin typeface="D2Coding" panose="020B0609020101020101" pitchFamily="49" charset="-127"/>
+                <a:ea typeface="D2Coding" panose="020B0609020101020101" pitchFamily="49" charset="-127"/>
+              </a:rPr>
+              <a:t> = </a:t>
+            </a:r>
+            <a:r>
+              <a:rPr lang="ko-KR" altLang="en-US" sz="1500" dirty="0" err="1">
+                <a:latin typeface="D2Coding" panose="020B0609020101020101" pitchFamily="49" charset="-127"/>
+                <a:ea typeface="D2Coding" panose="020B0609020101020101" pitchFamily="49" charset="-127"/>
+              </a:rPr>
+              <a:t>np.array</a:t>
+            </a:r>
+            <a:r>
+              <a:rPr lang="ko-KR" altLang="en-US" sz="1500" dirty="0">
+                <a:latin typeface="D2Coding" panose="020B0609020101020101" pitchFamily="49" charset="-127"/>
+                <a:ea typeface="D2Coding" panose="020B0609020101020101" pitchFamily="49" charset="-127"/>
+              </a:rPr>
+              <a:t>([</a:t>
+            </a:r>
+            <a:r>
+              <a:rPr lang="ko-KR" altLang="en-US" sz="1500" dirty="0" err="1">
+                <a:latin typeface="D2Coding" panose="020B0609020101020101" pitchFamily="49" charset="-127"/>
+                <a:ea typeface="D2Coding" panose="020B0609020101020101" pitchFamily="49" charset="-127"/>
+              </a:rPr>
+              <a:t>score</a:t>
+            </a:r>
+            <a:r>
+              <a:rPr lang="ko-KR" altLang="en-US" sz="1500" dirty="0">
+                <a:latin typeface="D2Coding" panose="020B0609020101020101" pitchFamily="49" charset="-127"/>
+                <a:ea typeface="D2Coding" panose="020B0609020101020101" pitchFamily="49" charset="-127"/>
+              </a:rPr>
+              <a:t>(</a:t>
+            </a:r>
+            <a:r>
+              <a:rPr lang="ko-KR" altLang="en-US" sz="1500" dirty="0" err="1">
+                <a:latin typeface="D2Coding" panose="020B0609020101020101" pitchFamily="49" charset="-127"/>
+                <a:ea typeface="D2Coding" panose="020B0609020101020101" pitchFamily="49" charset="-127"/>
+              </a:rPr>
+              <a:t>target</a:t>
+            </a:r>
+            <a:r>
+              <a:rPr lang="ko-KR" altLang="en-US" sz="1500" dirty="0">
+                <a:latin typeface="D2Coding" panose="020B0609020101020101" pitchFamily="49" charset="-127"/>
+                <a:ea typeface="D2Coding" panose="020B0609020101020101" pitchFamily="49" charset="-127"/>
+              </a:rPr>
+              <a:t>, </a:t>
+            </a:r>
+            <a:r>
+              <a:rPr lang="ko-KR" altLang="en-US" sz="1500" dirty="0" err="1">
+                <a:latin typeface="D2Coding" panose="020B0609020101020101" pitchFamily="49" charset="-127"/>
+                <a:ea typeface="D2Coding" panose="020B0609020101020101" pitchFamily="49" charset="-127"/>
+              </a:rPr>
+              <a:t>s</a:t>
+            </a:r>
+            <a:r>
+              <a:rPr lang="ko-KR" altLang="en-US" sz="1500" dirty="0">
+                <a:latin typeface="D2Coding" panose="020B0609020101020101" pitchFamily="49" charset="-127"/>
+                <a:ea typeface="D2Coding" panose="020B0609020101020101" pitchFamily="49" charset="-127"/>
+              </a:rPr>
+              <a:t>) </a:t>
+            </a:r>
+            <a:r>
+              <a:rPr lang="ko-KR" altLang="en-US" sz="1500" dirty="0" err="1">
+                <a:latin typeface="D2Coding" panose="020B0609020101020101" pitchFamily="49" charset="-127"/>
+                <a:ea typeface="D2Coding" panose="020B0609020101020101" pitchFamily="49" charset="-127"/>
+              </a:rPr>
+              <a:t>for</a:t>
+            </a:r>
+            <a:r>
+              <a:rPr lang="ko-KR" altLang="en-US" sz="1500" dirty="0">
+                <a:latin typeface="D2Coding" panose="020B0609020101020101" pitchFamily="49" charset="-127"/>
+                <a:ea typeface="D2Coding" panose="020B0609020101020101" pitchFamily="49" charset="-127"/>
+              </a:rPr>
+              <a:t> </a:t>
+            </a:r>
+            <a:r>
+              <a:rPr lang="ko-KR" altLang="en-US" sz="1500" dirty="0" err="1">
+                <a:latin typeface="D2Coding" panose="020B0609020101020101" pitchFamily="49" charset="-127"/>
+                <a:ea typeface="D2Coding" panose="020B0609020101020101" pitchFamily="49" charset="-127"/>
+              </a:rPr>
+              <a:t>s</a:t>
+            </a:r>
+            <a:r>
+              <a:rPr lang="ko-KR" altLang="en-US" sz="1500" dirty="0">
+                <a:latin typeface="D2Coding" panose="020B0609020101020101" pitchFamily="49" charset="-127"/>
+                <a:ea typeface="D2Coding" panose="020B0609020101020101" pitchFamily="49" charset="-127"/>
+              </a:rPr>
+              <a:t> </a:t>
+            </a:r>
+            <a:r>
+              <a:rPr lang="ko-KR" altLang="en-US" sz="1500" dirty="0" err="1">
+                <a:latin typeface="D2Coding" panose="020B0609020101020101" pitchFamily="49" charset="-127"/>
+                <a:ea typeface="D2Coding" panose="020B0609020101020101" pitchFamily="49" charset="-127"/>
+              </a:rPr>
+              <a:t>in</a:t>
+            </a:r>
+            <a:r>
+              <a:rPr lang="ko-KR" altLang="en-US" sz="1500" dirty="0">
+                <a:latin typeface="D2Coding" panose="020B0609020101020101" pitchFamily="49" charset="-127"/>
+                <a:ea typeface="D2Coding" panose="020B0609020101020101" pitchFamily="49" charset="-127"/>
+              </a:rPr>
+              <a:t> </a:t>
+            </a:r>
+            <a:r>
+              <a:rPr lang="ko-KR" altLang="en-US" sz="1500" dirty="0" err="1">
+                <a:latin typeface="D2Coding" panose="020B0609020101020101" pitchFamily="49" charset="-127"/>
+                <a:ea typeface="D2Coding" panose="020B0609020101020101" pitchFamily="49" charset="-127"/>
+              </a:rPr>
+              <a:t>sources</a:t>
+            </a:r>
+            <a:r>
+              <a:rPr lang="ko-KR" altLang="en-US" sz="1500" dirty="0">
+                <a:latin typeface="D2Coding" panose="020B0609020101020101" pitchFamily="49" charset="-127"/>
+                <a:ea typeface="D2Coding" panose="020B0609020101020101" pitchFamily="49" charset="-127"/>
+              </a:rPr>
+              <a:t>]) # 여기서 </a:t>
+            </a:r>
+            <a:r>
+              <a:rPr lang="ko-KR" altLang="en-US" sz="1500" dirty="0" err="1">
+                <a:latin typeface="D2Coding" panose="020B0609020101020101" pitchFamily="49" charset="-127"/>
+                <a:ea typeface="D2Coding" panose="020B0609020101020101" pitchFamily="49" charset="-127"/>
+              </a:rPr>
+              <a:t>s</a:t>
+            </a:r>
+            <a:r>
+              <a:rPr lang="ko-KR" altLang="en-US" sz="1500" dirty="0">
+                <a:latin typeface="D2Coding" panose="020B0609020101020101" pitchFamily="49" charset="-127"/>
+                <a:ea typeface="D2Coding" panose="020B0609020101020101" pitchFamily="49" charset="-127"/>
+              </a:rPr>
+              <a:t> (기준)</a:t>
+            </a:r>
+          </a:p>
+          <a:p>
+            <a:r>
+              <a:rPr lang="ko-KR" altLang="en-US" sz="1500" dirty="0" err="1">
+                <a:latin typeface="D2Coding" panose="020B0609020101020101" pitchFamily="49" charset="-127"/>
+                <a:ea typeface="D2Coding" panose="020B0609020101020101" pitchFamily="49" charset="-127"/>
+              </a:rPr>
+              <a:t>attention_weights</a:t>
+            </a:r>
+            <a:r>
+              <a:rPr lang="ko-KR" altLang="en-US" sz="1500" dirty="0">
+                <a:latin typeface="D2Coding" panose="020B0609020101020101" pitchFamily="49" charset="-127"/>
+                <a:ea typeface="D2Coding" panose="020B0609020101020101" pitchFamily="49" charset="-127"/>
+              </a:rPr>
+              <a:t> = </a:t>
+            </a:r>
+            <a:r>
+              <a:rPr lang="ko-KR" altLang="en-US" sz="1500" dirty="0" err="1">
+                <a:latin typeface="D2Coding" panose="020B0609020101020101" pitchFamily="49" charset="-127"/>
+                <a:ea typeface="D2Coding" panose="020B0609020101020101" pitchFamily="49" charset="-127"/>
+              </a:rPr>
+              <a:t>softmax</a:t>
+            </a:r>
+            <a:r>
+              <a:rPr lang="ko-KR" altLang="en-US" sz="1500" dirty="0">
+                <a:latin typeface="D2Coding" panose="020B0609020101020101" pitchFamily="49" charset="-127"/>
+                <a:ea typeface="D2Coding" panose="020B0609020101020101" pitchFamily="49" charset="-127"/>
+              </a:rPr>
+              <a:t>(</a:t>
+            </a:r>
+            <a:r>
+              <a:rPr lang="ko-KR" altLang="en-US" sz="1500" dirty="0" err="1">
+                <a:latin typeface="D2Coding" panose="020B0609020101020101" pitchFamily="49" charset="-127"/>
+                <a:ea typeface="D2Coding" panose="020B0609020101020101" pitchFamily="49" charset="-127"/>
+              </a:rPr>
+              <a:t>raw_scores</a:t>
+            </a:r>
+            <a:r>
+              <a:rPr lang="ko-KR" altLang="en-US" sz="1500" dirty="0">
+                <a:latin typeface="D2Coding" panose="020B0609020101020101" pitchFamily="49" charset="-127"/>
+                <a:ea typeface="D2Coding" panose="020B0609020101020101" pitchFamily="49" charset="-127"/>
+              </a:rPr>
+              <a:t>)</a:t>
+            </a:r>
+          </a:p>
+          <a:p>
+            <a:r>
+              <a:rPr lang="ko-KR" altLang="en-US" sz="1500" dirty="0">
+                <a:latin typeface="D2Coding" panose="020B0609020101020101" pitchFamily="49" charset="-127"/>
+                <a:ea typeface="D2Coding" panose="020B0609020101020101" pitchFamily="49" charset="-127"/>
+              </a:rPr>
+              <a:t># 최종 합산</a:t>
+            </a:r>
+          </a:p>
+          <a:p>
+            <a:r>
+              <a:rPr lang="ko-KR" altLang="en-US" sz="1500" dirty="0" err="1">
+                <a:latin typeface="D2Coding" panose="020B0609020101020101" pitchFamily="49" charset="-127"/>
+                <a:ea typeface="D2Coding" panose="020B0609020101020101" pitchFamily="49" charset="-127"/>
+              </a:rPr>
+              <a:t>combined</a:t>
+            </a:r>
+            <a:r>
+              <a:rPr lang="ko-KR" altLang="en-US" sz="1500" dirty="0">
+                <a:latin typeface="D2Coding" panose="020B0609020101020101" pitchFamily="49" charset="-127"/>
+                <a:ea typeface="D2Coding" panose="020B0609020101020101" pitchFamily="49" charset="-127"/>
+              </a:rPr>
+              <a:t> = </a:t>
+            </a:r>
+            <a:r>
+              <a:rPr lang="ko-KR" altLang="en-US" sz="1500" dirty="0" err="1">
+                <a:latin typeface="D2Coding" panose="020B0609020101020101" pitchFamily="49" charset="-127"/>
+                <a:ea typeface="D2Coding" panose="020B0609020101020101" pitchFamily="49" charset="-127"/>
+              </a:rPr>
+              <a:t>np.sum</a:t>
+            </a:r>
+            <a:r>
+              <a:rPr lang="ko-KR" altLang="en-US" sz="1500" dirty="0">
+                <a:latin typeface="D2Coding" panose="020B0609020101020101" pitchFamily="49" charset="-127"/>
+                <a:ea typeface="D2Coding" panose="020B0609020101020101" pitchFamily="49" charset="-127"/>
+              </a:rPr>
+              <a:t>(</a:t>
+            </a:r>
+            <a:r>
+              <a:rPr lang="ko-KR" altLang="en-US" sz="1500" dirty="0" err="1">
+                <a:latin typeface="D2Coding" panose="020B0609020101020101" pitchFamily="49" charset="-127"/>
+                <a:ea typeface="D2Coding" panose="020B0609020101020101" pitchFamily="49" charset="-127"/>
+              </a:rPr>
+              <a:t>attention_weights</a:t>
+            </a:r>
+            <a:r>
+              <a:rPr lang="ko-KR" altLang="en-US" sz="1500" dirty="0">
+                <a:latin typeface="D2Coding" panose="020B0609020101020101" pitchFamily="49" charset="-127"/>
+                <a:ea typeface="D2Coding" panose="020B0609020101020101" pitchFamily="49" charset="-127"/>
+              </a:rPr>
+              <a:t>[:, </a:t>
+            </a:r>
+            <a:r>
+              <a:rPr lang="ko-KR" altLang="en-US" sz="1500" dirty="0" err="1">
+                <a:latin typeface="D2Coding" panose="020B0609020101020101" pitchFamily="49" charset="-127"/>
+                <a:ea typeface="D2Coding" panose="020B0609020101020101" pitchFamily="49" charset="-127"/>
+              </a:rPr>
+              <a:t>np.newaxis</a:t>
+            </a:r>
+            <a:r>
+              <a:rPr lang="ko-KR" altLang="en-US" sz="1500" dirty="0">
+                <a:latin typeface="D2Coding" panose="020B0609020101020101" pitchFamily="49" charset="-127"/>
+                <a:ea typeface="D2Coding" panose="020B0609020101020101" pitchFamily="49" charset="-127"/>
+              </a:rPr>
+              <a:t>] * </a:t>
+            </a:r>
+            <a:r>
+              <a:rPr lang="ko-KR" altLang="en-US" sz="1500" dirty="0" err="1">
+                <a:latin typeface="D2Coding" panose="020B0609020101020101" pitchFamily="49" charset="-127"/>
+                <a:ea typeface="D2Coding" panose="020B0609020101020101" pitchFamily="49" charset="-127"/>
+              </a:rPr>
+              <a:t>sources</a:t>
+            </a:r>
+            <a:r>
+              <a:rPr lang="ko-KR" altLang="en-US" sz="1500" dirty="0">
+                <a:latin typeface="D2Coding" panose="020B0609020101020101" pitchFamily="49" charset="-127"/>
+                <a:ea typeface="D2Coding" panose="020B0609020101020101" pitchFamily="49" charset="-127"/>
+              </a:rPr>
+              <a:t>, </a:t>
+            </a:r>
+            <a:r>
+              <a:rPr lang="ko-KR" altLang="en-US" sz="1500" dirty="0" err="1">
+                <a:latin typeface="D2Coding" panose="020B0609020101020101" pitchFamily="49" charset="-127"/>
+                <a:ea typeface="D2Coding" panose="020B0609020101020101" pitchFamily="49" charset="-127"/>
+              </a:rPr>
+              <a:t>axis</a:t>
+            </a:r>
+            <a:r>
+              <a:rPr lang="ko-KR" altLang="en-US" sz="1500" dirty="0">
+                <a:latin typeface="D2Coding" panose="020B0609020101020101" pitchFamily="49" charset="-127"/>
+                <a:ea typeface="D2Coding" panose="020B0609020101020101" pitchFamily="49" charset="-127"/>
+              </a:rPr>
+              <a:t>=0) # 여기서 또 </a:t>
+            </a:r>
+            <a:r>
+              <a:rPr lang="ko-KR" altLang="en-US" sz="1500" dirty="0" err="1">
+                <a:latin typeface="D2Coding" panose="020B0609020101020101" pitchFamily="49" charset="-127"/>
+                <a:ea typeface="D2Coding" panose="020B0609020101020101" pitchFamily="49" charset="-127"/>
+              </a:rPr>
+              <a:t>sources</a:t>
+            </a:r>
+            <a:endParaRPr lang="ko-KR" altLang="en-US" sz="1500" dirty="0">
+              <a:latin typeface="D2Coding" panose="020B0609020101020101" pitchFamily="49" charset="-127"/>
+              <a:ea typeface="D2Coding" panose="020B0609020101020101" pitchFamily="49" charset="-127"/>
+            </a:endParaRPr>
+          </a:p>
+        </p:txBody>
+      </p:sp>
+      <p:sp>
+        <p:nvSpPr>
+          <p:cNvPr id="7" name="TextBox 6">
+            <a:extLst>
+              <a:ext uri="{FF2B5EF4-FFF2-40B4-BE49-F238E27FC236}">
+                <a16:creationId xmlns:a16="http://schemas.microsoft.com/office/drawing/2014/main" id="{87B95FD4-7953-6D6C-949B-752175600DF8}"/>
+              </a:ext>
+            </a:extLst>
+          </p:cNvPr>
+          <p:cNvSpPr txBox="1"/>
+          <p:nvPr/>
+        </p:nvSpPr>
+        <p:spPr>
+          <a:xfrm>
+            <a:off x="600074" y="3400425"/>
+            <a:ext cx="7981952" cy="2631490"/>
+          </a:xfrm>
+          <a:prstGeom prst="rect">
+            <a:avLst/>
+          </a:prstGeom>
+          <a:solidFill>
+            <a:srgbClr val="76E3FF"/>
+          </a:solidFill>
+        </p:spPr>
+        <p:txBody>
+          <a:bodyPr wrap="square">
+            <a:spAutoFit/>
+          </a:bodyPr>
+          <a:lstStyle/>
+          <a:p>
+            <a:r>
+              <a:rPr lang="ko-KR" altLang="en-US" sz="1500" dirty="0">
+                <a:latin typeface="D2Coding" panose="020B0609020101020101" pitchFamily="49" charset="-127"/>
+                <a:ea typeface="D2Coding" panose="020B0609020101020101" pitchFamily="49" charset="-127"/>
+              </a:rPr>
+              <a:t># </a:t>
+            </a:r>
+            <a:r>
+              <a:rPr lang="en-US" altLang="ko-KR" sz="1500" dirty="0">
+                <a:latin typeface="D2Coding" panose="020B0609020101020101" pitchFamily="49" charset="-127"/>
+                <a:ea typeface="D2Coding" panose="020B0609020101020101" pitchFamily="49" charset="-127"/>
+              </a:rPr>
+              <a:t>1</a:t>
+            </a:r>
+            <a:r>
+              <a:rPr lang="ko-KR" altLang="en-US" sz="1500" dirty="0">
+                <a:latin typeface="D2Coding" panose="020B0609020101020101" pitchFamily="49" charset="-127"/>
+                <a:ea typeface="D2Coding" panose="020B0609020101020101" pitchFamily="49" charset="-127"/>
+              </a:rPr>
+              <a:t>. 먼저 가중치 행렬(</a:t>
+            </a:r>
+            <a:r>
+              <a:rPr lang="ko-KR" altLang="en-US" sz="1500" dirty="0" err="1">
+                <a:latin typeface="D2Coding" panose="020B0609020101020101" pitchFamily="49" charset="-127"/>
+                <a:ea typeface="D2Coding" panose="020B0609020101020101" pitchFamily="49" charset="-127"/>
+              </a:rPr>
+              <a:t>W</a:t>
+            </a:r>
+            <a:r>
+              <a:rPr lang="ko-KR" altLang="en-US" sz="1500" dirty="0">
+                <a:latin typeface="D2Coding" panose="020B0609020101020101" pitchFamily="49" charset="-127"/>
+                <a:ea typeface="D2Coding" panose="020B0609020101020101" pitchFamily="49" charset="-127"/>
+              </a:rPr>
+              <a:t>)을 곱해 </a:t>
+            </a:r>
+            <a:r>
+              <a:rPr lang="ko-KR" altLang="en-US" sz="1500" dirty="0" err="1">
+                <a:latin typeface="D2Coding" panose="020B0609020101020101" pitchFamily="49" charset="-127"/>
+                <a:ea typeface="D2Coding" panose="020B0609020101020101" pitchFamily="49" charset="-127"/>
+              </a:rPr>
+              <a:t>sources를</a:t>
+            </a:r>
+            <a:r>
+              <a:rPr lang="ko-KR" altLang="en-US" sz="1500" dirty="0">
+                <a:latin typeface="D2Coding" panose="020B0609020101020101" pitchFamily="49" charset="-127"/>
+                <a:ea typeface="D2Coding" panose="020B0609020101020101" pitchFamily="49" charset="-127"/>
+              </a:rPr>
+              <a:t> </a:t>
+            </a:r>
+            <a:r>
+              <a:rPr lang="ko-KR" altLang="en-US" sz="1500" dirty="0" err="1">
+                <a:latin typeface="D2Coding" panose="020B0609020101020101" pitchFamily="49" charset="-127"/>
+                <a:ea typeface="D2Coding" panose="020B0609020101020101" pitchFamily="49" charset="-127"/>
+              </a:rPr>
+              <a:t>keys와</a:t>
+            </a:r>
+            <a:r>
+              <a:rPr lang="ko-KR" altLang="en-US" sz="1500" dirty="0">
+                <a:latin typeface="D2Coding" panose="020B0609020101020101" pitchFamily="49" charset="-127"/>
+                <a:ea typeface="D2Coding" panose="020B0609020101020101" pitchFamily="49" charset="-127"/>
+              </a:rPr>
+              <a:t> </a:t>
+            </a:r>
+            <a:r>
+              <a:rPr lang="ko-KR" altLang="en-US" sz="1500" dirty="0" err="1">
+                <a:latin typeface="D2Coding" panose="020B0609020101020101" pitchFamily="49" charset="-127"/>
+                <a:ea typeface="D2Coding" panose="020B0609020101020101" pitchFamily="49" charset="-127"/>
+              </a:rPr>
+              <a:t>values로</a:t>
+            </a:r>
+            <a:r>
+              <a:rPr lang="ko-KR" altLang="en-US" sz="1500" dirty="0">
+                <a:latin typeface="D2Coding" panose="020B0609020101020101" pitchFamily="49" charset="-127"/>
+                <a:ea typeface="D2Coding" panose="020B0609020101020101" pitchFamily="49" charset="-127"/>
+              </a:rPr>
+              <a:t> 완전히 분리해 둡니다.</a:t>
+            </a:r>
+          </a:p>
+          <a:p>
+            <a:r>
+              <a:rPr lang="ko-KR" altLang="en-US" sz="1500" dirty="0" err="1">
+                <a:latin typeface="D2Coding" panose="020B0609020101020101" pitchFamily="49" charset="-127"/>
+                <a:ea typeface="D2Coding" panose="020B0609020101020101" pitchFamily="49" charset="-127"/>
+              </a:rPr>
+              <a:t>query</a:t>
+            </a:r>
+            <a:r>
+              <a:rPr lang="ko-KR" altLang="en-US" sz="1500" dirty="0">
+                <a:latin typeface="D2Coding" panose="020B0609020101020101" pitchFamily="49" charset="-127"/>
+                <a:ea typeface="D2Coding" panose="020B0609020101020101" pitchFamily="49" charset="-127"/>
+              </a:rPr>
+              <a:t> = </a:t>
+            </a:r>
+            <a:r>
+              <a:rPr lang="ko-KR" altLang="en-US" sz="1500" dirty="0" err="1">
+                <a:latin typeface="D2Coding" panose="020B0609020101020101" pitchFamily="49" charset="-127"/>
+                <a:ea typeface="D2Coding" panose="020B0609020101020101" pitchFamily="49" charset="-127"/>
+              </a:rPr>
+              <a:t>np.dot</a:t>
+            </a:r>
+            <a:r>
+              <a:rPr lang="ko-KR" altLang="en-US" sz="1500" dirty="0">
+                <a:latin typeface="D2Coding" panose="020B0609020101020101" pitchFamily="49" charset="-127"/>
+                <a:ea typeface="D2Coding" panose="020B0609020101020101" pitchFamily="49" charset="-127"/>
+              </a:rPr>
+              <a:t>(</a:t>
+            </a:r>
+            <a:r>
+              <a:rPr lang="ko-KR" altLang="en-US" sz="1500" dirty="0" err="1">
+                <a:latin typeface="D2Coding" panose="020B0609020101020101" pitchFamily="49" charset="-127"/>
+                <a:ea typeface="D2Coding" panose="020B0609020101020101" pitchFamily="49" charset="-127"/>
+              </a:rPr>
+              <a:t>target</a:t>
+            </a:r>
+            <a:r>
+              <a:rPr lang="ko-KR" altLang="en-US" sz="1500" dirty="0">
+                <a:latin typeface="D2Coding" panose="020B0609020101020101" pitchFamily="49" charset="-127"/>
+                <a:ea typeface="D2Coding" panose="020B0609020101020101" pitchFamily="49" charset="-127"/>
+              </a:rPr>
+              <a:t>, W_Q)</a:t>
+            </a:r>
+          </a:p>
+          <a:p>
+            <a:r>
+              <a:rPr lang="ko-KR" altLang="en-US" sz="1500" dirty="0" err="1">
+                <a:latin typeface="D2Coding" panose="020B0609020101020101" pitchFamily="49" charset="-127"/>
+                <a:ea typeface="D2Coding" panose="020B0609020101020101" pitchFamily="49" charset="-127"/>
+              </a:rPr>
+              <a:t>keys</a:t>
+            </a:r>
+            <a:r>
+              <a:rPr lang="ko-KR" altLang="en-US" sz="1500" dirty="0">
+                <a:latin typeface="D2Coding" panose="020B0609020101020101" pitchFamily="49" charset="-127"/>
+                <a:ea typeface="D2Coding" panose="020B0609020101020101" pitchFamily="49" charset="-127"/>
+              </a:rPr>
+              <a:t> = </a:t>
+            </a:r>
+            <a:r>
+              <a:rPr lang="ko-KR" altLang="en-US" sz="1500" dirty="0" err="1">
+                <a:latin typeface="D2Coding" panose="020B0609020101020101" pitchFamily="49" charset="-127"/>
+                <a:ea typeface="D2Coding" panose="020B0609020101020101" pitchFamily="49" charset="-127"/>
+              </a:rPr>
+              <a:t>np.dot</a:t>
+            </a:r>
+            <a:r>
+              <a:rPr lang="ko-KR" altLang="en-US" sz="1500" dirty="0">
+                <a:latin typeface="D2Coding" panose="020B0609020101020101" pitchFamily="49" charset="-127"/>
+                <a:ea typeface="D2Coding" panose="020B0609020101020101" pitchFamily="49" charset="-127"/>
+              </a:rPr>
+              <a:t>(</a:t>
+            </a:r>
+            <a:r>
+              <a:rPr lang="ko-KR" altLang="en-US" sz="1500" dirty="0" err="1">
+                <a:latin typeface="D2Coding" panose="020B0609020101020101" pitchFamily="49" charset="-127"/>
+                <a:ea typeface="D2Coding" panose="020B0609020101020101" pitchFamily="49" charset="-127"/>
+              </a:rPr>
+              <a:t>sources</a:t>
+            </a:r>
+            <a:r>
+              <a:rPr lang="ko-KR" altLang="en-US" sz="1500" dirty="0">
+                <a:latin typeface="D2Coding" panose="020B0609020101020101" pitchFamily="49" charset="-127"/>
+                <a:ea typeface="D2Coding" panose="020B0609020101020101" pitchFamily="49" charset="-127"/>
+              </a:rPr>
+              <a:t>, W_K)    # 점수 매기기 전용 (기존의 </a:t>
+            </a:r>
+            <a:r>
+              <a:rPr lang="ko-KR" altLang="en-US" sz="1500" dirty="0" err="1">
+                <a:latin typeface="D2Coding" panose="020B0609020101020101" pitchFamily="49" charset="-127"/>
+                <a:ea typeface="D2Coding" panose="020B0609020101020101" pitchFamily="49" charset="-127"/>
+              </a:rPr>
+              <a:t>score</a:t>
+            </a:r>
+            <a:r>
+              <a:rPr lang="ko-KR" altLang="en-US" sz="1500" dirty="0">
+                <a:latin typeface="D2Coding" panose="020B0609020101020101" pitchFamily="49" charset="-127"/>
+                <a:ea typeface="D2Coding" panose="020B0609020101020101" pitchFamily="49" charset="-127"/>
+              </a:rPr>
+              <a:t> 함수 안의 </a:t>
+            </a:r>
+            <a:r>
+              <a:rPr lang="ko-KR" altLang="en-US" sz="1500" dirty="0" err="1">
+                <a:latin typeface="D2Coding" panose="020B0609020101020101" pitchFamily="49" charset="-127"/>
+                <a:ea typeface="D2Coding" panose="020B0609020101020101" pitchFamily="49" charset="-127"/>
+              </a:rPr>
+              <a:t>s</a:t>
+            </a:r>
+            <a:r>
+              <a:rPr lang="ko-KR" altLang="en-US" sz="1500" dirty="0">
+                <a:latin typeface="D2Coding" panose="020B0609020101020101" pitchFamily="49" charset="-127"/>
+                <a:ea typeface="D2Coding" panose="020B0609020101020101" pitchFamily="49" charset="-127"/>
+              </a:rPr>
+              <a:t> 대체)</a:t>
+            </a:r>
+          </a:p>
+          <a:p>
+            <a:r>
+              <a:rPr lang="ko-KR" altLang="en-US" sz="1500" dirty="0" err="1">
+                <a:latin typeface="D2Coding" panose="020B0609020101020101" pitchFamily="49" charset="-127"/>
+                <a:ea typeface="D2Coding" panose="020B0609020101020101" pitchFamily="49" charset="-127"/>
+              </a:rPr>
+              <a:t>values</a:t>
+            </a:r>
+            <a:r>
+              <a:rPr lang="ko-KR" altLang="en-US" sz="1500" dirty="0">
+                <a:latin typeface="D2Coding" panose="020B0609020101020101" pitchFamily="49" charset="-127"/>
+                <a:ea typeface="D2Coding" panose="020B0609020101020101" pitchFamily="49" charset="-127"/>
+              </a:rPr>
+              <a:t> = </a:t>
+            </a:r>
+            <a:r>
+              <a:rPr lang="ko-KR" altLang="en-US" sz="1500" dirty="0" err="1">
+                <a:latin typeface="D2Coding" panose="020B0609020101020101" pitchFamily="49" charset="-127"/>
+                <a:ea typeface="D2Coding" panose="020B0609020101020101" pitchFamily="49" charset="-127"/>
+              </a:rPr>
+              <a:t>np.dot</a:t>
+            </a:r>
+            <a:r>
+              <a:rPr lang="ko-KR" altLang="en-US" sz="1500" dirty="0">
+                <a:latin typeface="D2Coding" panose="020B0609020101020101" pitchFamily="49" charset="-127"/>
+                <a:ea typeface="D2Coding" panose="020B0609020101020101" pitchFamily="49" charset="-127"/>
+              </a:rPr>
+              <a:t>(</a:t>
+            </a:r>
+            <a:r>
+              <a:rPr lang="ko-KR" altLang="en-US" sz="1500" dirty="0" err="1">
+                <a:latin typeface="D2Coding" panose="020B0609020101020101" pitchFamily="49" charset="-127"/>
+                <a:ea typeface="D2Coding" panose="020B0609020101020101" pitchFamily="49" charset="-127"/>
+              </a:rPr>
+              <a:t>sources</a:t>
+            </a:r>
+            <a:r>
+              <a:rPr lang="ko-KR" altLang="en-US" sz="1500" dirty="0">
+                <a:latin typeface="D2Coding" panose="020B0609020101020101" pitchFamily="49" charset="-127"/>
+                <a:ea typeface="D2Coding" panose="020B0609020101020101" pitchFamily="49" charset="-127"/>
+              </a:rPr>
+              <a:t>, W_V)  # 실제 알맹이 전용 (기존의 최종 합산 </a:t>
+            </a:r>
+            <a:r>
+              <a:rPr lang="ko-KR" altLang="en-US" sz="1500" dirty="0" err="1">
+                <a:latin typeface="D2Coding" panose="020B0609020101020101" pitchFamily="49" charset="-127"/>
+                <a:ea typeface="D2Coding" panose="020B0609020101020101" pitchFamily="49" charset="-127"/>
+              </a:rPr>
+              <a:t>sources</a:t>
+            </a:r>
+            <a:r>
+              <a:rPr lang="ko-KR" altLang="en-US" sz="1500" dirty="0">
+                <a:latin typeface="D2Coding" panose="020B0609020101020101" pitchFamily="49" charset="-127"/>
+                <a:ea typeface="D2Coding" panose="020B0609020101020101" pitchFamily="49" charset="-127"/>
+              </a:rPr>
+              <a:t> 대체)</a:t>
+            </a:r>
+          </a:p>
+          <a:p>
+            <a:endParaRPr lang="ko-KR" altLang="en-US" sz="1500" dirty="0">
+              <a:latin typeface="D2Coding" panose="020B0609020101020101" pitchFamily="49" charset="-127"/>
+              <a:ea typeface="D2Coding" panose="020B0609020101020101" pitchFamily="49" charset="-127"/>
+            </a:endParaRPr>
+          </a:p>
+          <a:p>
+            <a:r>
+              <a:rPr lang="ko-KR" altLang="en-US" sz="1500" dirty="0">
+                <a:latin typeface="D2Coding" panose="020B0609020101020101" pitchFamily="49" charset="-127"/>
+                <a:ea typeface="D2Coding" panose="020B0609020101020101" pitchFamily="49" charset="-127"/>
+              </a:rPr>
+              <a:t># </a:t>
+            </a:r>
+            <a:r>
+              <a:rPr lang="en-US" altLang="ko-KR" sz="1500" dirty="0">
+                <a:latin typeface="D2Coding" panose="020B0609020101020101" pitchFamily="49" charset="-127"/>
+                <a:ea typeface="D2Coding" panose="020B0609020101020101" pitchFamily="49" charset="-127"/>
+              </a:rPr>
+              <a:t>2</a:t>
+            </a:r>
+            <a:r>
+              <a:rPr lang="ko-KR" altLang="en-US" sz="1500" dirty="0">
+                <a:latin typeface="D2Coding" panose="020B0609020101020101" pitchFamily="49" charset="-127"/>
+                <a:ea typeface="D2Coding" panose="020B0609020101020101" pitchFamily="49" charset="-127"/>
+              </a:rPr>
+              <a:t>. 점수 계산 (</a:t>
+            </a:r>
+            <a:r>
+              <a:rPr lang="ko-KR" altLang="en-US" sz="1500" dirty="0" err="1">
+                <a:latin typeface="D2Coding" panose="020B0609020101020101" pitchFamily="49" charset="-127"/>
+                <a:ea typeface="D2Coding" panose="020B0609020101020101" pitchFamily="49" charset="-127"/>
+              </a:rPr>
+              <a:t>Query와</a:t>
+            </a:r>
+            <a:r>
+              <a:rPr lang="ko-KR" altLang="en-US" sz="1500" dirty="0">
+                <a:latin typeface="D2Coding" panose="020B0609020101020101" pitchFamily="49" charset="-127"/>
+                <a:ea typeface="D2Coding" panose="020B0609020101020101" pitchFamily="49" charset="-127"/>
+              </a:rPr>
+              <a:t> </a:t>
+            </a:r>
+            <a:r>
+              <a:rPr lang="ko-KR" altLang="en-US" sz="1500" dirty="0" err="1">
+                <a:latin typeface="D2Coding" panose="020B0609020101020101" pitchFamily="49" charset="-127"/>
+                <a:ea typeface="D2Coding" panose="020B0609020101020101" pitchFamily="49" charset="-127"/>
+              </a:rPr>
+              <a:t>Key를</a:t>
+            </a:r>
+            <a:r>
+              <a:rPr lang="ko-KR" altLang="en-US" sz="1500" dirty="0">
+                <a:latin typeface="D2Coding" panose="020B0609020101020101" pitchFamily="49" charset="-127"/>
+                <a:ea typeface="D2Coding" panose="020B0609020101020101" pitchFamily="49" charset="-127"/>
+              </a:rPr>
+              <a:t> 비교)</a:t>
+            </a:r>
+          </a:p>
+          <a:p>
+            <a:r>
+              <a:rPr lang="ko-KR" altLang="en-US" sz="1500" dirty="0" err="1">
+                <a:latin typeface="D2Coding" panose="020B0609020101020101" pitchFamily="49" charset="-127"/>
+                <a:ea typeface="D2Coding" panose="020B0609020101020101" pitchFamily="49" charset="-127"/>
+              </a:rPr>
+              <a:t>raw_scores</a:t>
+            </a:r>
+            <a:r>
+              <a:rPr lang="ko-KR" altLang="en-US" sz="1500" dirty="0">
+                <a:latin typeface="D2Coding" panose="020B0609020101020101" pitchFamily="49" charset="-127"/>
+                <a:ea typeface="D2Coding" panose="020B0609020101020101" pitchFamily="49" charset="-127"/>
+              </a:rPr>
+              <a:t> = </a:t>
+            </a:r>
+            <a:r>
+              <a:rPr lang="ko-KR" altLang="en-US" sz="1500" dirty="0" err="1">
+                <a:latin typeface="D2Coding" panose="020B0609020101020101" pitchFamily="49" charset="-127"/>
+                <a:ea typeface="D2Coding" panose="020B0609020101020101" pitchFamily="49" charset="-127"/>
+              </a:rPr>
+              <a:t>np.array</a:t>
+            </a:r>
+            <a:r>
+              <a:rPr lang="ko-KR" altLang="en-US" sz="1500" dirty="0">
+                <a:latin typeface="D2Coding" panose="020B0609020101020101" pitchFamily="49" charset="-127"/>
+                <a:ea typeface="D2Coding" panose="020B0609020101020101" pitchFamily="49" charset="-127"/>
+              </a:rPr>
+              <a:t>([</a:t>
+            </a:r>
+            <a:r>
+              <a:rPr lang="ko-KR" altLang="en-US" sz="1500" dirty="0" err="1">
+                <a:latin typeface="D2Coding" panose="020B0609020101020101" pitchFamily="49" charset="-127"/>
+                <a:ea typeface="D2Coding" panose="020B0609020101020101" pitchFamily="49" charset="-127"/>
+              </a:rPr>
+              <a:t>score</a:t>
+            </a:r>
+            <a:r>
+              <a:rPr lang="ko-KR" altLang="en-US" sz="1500" dirty="0">
+                <a:latin typeface="D2Coding" panose="020B0609020101020101" pitchFamily="49" charset="-127"/>
+                <a:ea typeface="D2Coding" panose="020B0609020101020101" pitchFamily="49" charset="-127"/>
+              </a:rPr>
+              <a:t>(</a:t>
+            </a:r>
+            <a:r>
+              <a:rPr lang="ko-KR" altLang="en-US" sz="1500" dirty="0" err="1">
+                <a:latin typeface="D2Coding" panose="020B0609020101020101" pitchFamily="49" charset="-127"/>
+                <a:ea typeface="D2Coding" panose="020B0609020101020101" pitchFamily="49" charset="-127"/>
+              </a:rPr>
+              <a:t>query</a:t>
+            </a:r>
+            <a:r>
+              <a:rPr lang="ko-KR" altLang="en-US" sz="1500" dirty="0">
+                <a:latin typeface="D2Coding" panose="020B0609020101020101" pitchFamily="49" charset="-127"/>
+                <a:ea typeface="D2Coding" panose="020B0609020101020101" pitchFamily="49" charset="-127"/>
+              </a:rPr>
+              <a:t>, k) </a:t>
+            </a:r>
+            <a:r>
+              <a:rPr lang="ko-KR" altLang="en-US" sz="1500" dirty="0" err="1">
+                <a:latin typeface="D2Coding" panose="020B0609020101020101" pitchFamily="49" charset="-127"/>
+                <a:ea typeface="D2Coding" panose="020B0609020101020101" pitchFamily="49" charset="-127"/>
+              </a:rPr>
+              <a:t>for</a:t>
+            </a:r>
+            <a:r>
+              <a:rPr lang="ko-KR" altLang="en-US" sz="1500" dirty="0">
+                <a:latin typeface="D2Coding" panose="020B0609020101020101" pitchFamily="49" charset="-127"/>
+                <a:ea typeface="D2Coding" panose="020B0609020101020101" pitchFamily="49" charset="-127"/>
+              </a:rPr>
+              <a:t> k </a:t>
+            </a:r>
+            <a:r>
+              <a:rPr lang="ko-KR" altLang="en-US" sz="1500" dirty="0" err="1">
+                <a:latin typeface="D2Coding" panose="020B0609020101020101" pitchFamily="49" charset="-127"/>
+                <a:ea typeface="D2Coding" panose="020B0609020101020101" pitchFamily="49" charset="-127"/>
+              </a:rPr>
+              <a:t>in</a:t>
+            </a:r>
+            <a:r>
+              <a:rPr lang="ko-KR" altLang="en-US" sz="1500" dirty="0">
+                <a:latin typeface="D2Coding" panose="020B0609020101020101" pitchFamily="49" charset="-127"/>
+                <a:ea typeface="D2Coding" panose="020B0609020101020101" pitchFamily="49" charset="-127"/>
+              </a:rPr>
+              <a:t> </a:t>
+            </a:r>
+            <a:r>
+              <a:rPr lang="ko-KR" altLang="en-US" sz="1500" dirty="0" err="1">
+                <a:latin typeface="D2Coding" panose="020B0609020101020101" pitchFamily="49" charset="-127"/>
+                <a:ea typeface="D2Coding" panose="020B0609020101020101" pitchFamily="49" charset="-127"/>
+              </a:rPr>
+              <a:t>keys</a:t>
+            </a:r>
+            <a:r>
+              <a:rPr lang="ko-KR" altLang="en-US" sz="1500" dirty="0">
+                <a:latin typeface="D2Coding" panose="020B0609020101020101" pitchFamily="49" charset="-127"/>
+                <a:ea typeface="D2Coding" panose="020B0609020101020101" pitchFamily="49" charset="-127"/>
+              </a:rPr>
+              <a:t>]) </a:t>
+            </a:r>
+          </a:p>
+          <a:p>
+            <a:r>
+              <a:rPr lang="ko-KR" altLang="en-US" sz="1500" dirty="0" err="1">
+                <a:latin typeface="D2Coding" panose="020B0609020101020101" pitchFamily="49" charset="-127"/>
+                <a:ea typeface="D2Coding" panose="020B0609020101020101" pitchFamily="49" charset="-127"/>
+              </a:rPr>
+              <a:t>attention_weights</a:t>
+            </a:r>
+            <a:r>
+              <a:rPr lang="ko-KR" altLang="en-US" sz="1500" dirty="0">
+                <a:latin typeface="D2Coding" panose="020B0609020101020101" pitchFamily="49" charset="-127"/>
+                <a:ea typeface="D2Coding" panose="020B0609020101020101" pitchFamily="49" charset="-127"/>
+              </a:rPr>
+              <a:t> = </a:t>
+            </a:r>
+            <a:r>
+              <a:rPr lang="ko-KR" altLang="en-US" sz="1500" dirty="0" err="1">
+                <a:latin typeface="D2Coding" panose="020B0609020101020101" pitchFamily="49" charset="-127"/>
+                <a:ea typeface="D2Coding" panose="020B0609020101020101" pitchFamily="49" charset="-127"/>
+              </a:rPr>
+              <a:t>softmax</a:t>
+            </a:r>
+            <a:r>
+              <a:rPr lang="ko-KR" altLang="en-US" sz="1500" dirty="0">
+                <a:latin typeface="D2Coding" panose="020B0609020101020101" pitchFamily="49" charset="-127"/>
+                <a:ea typeface="D2Coding" panose="020B0609020101020101" pitchFamily="49" charset="-127"/>
+              </a:rPr>
+              <a:t>(</a:t>
+            </a:r>
+            <a:r>
+              <a:rPr lang="ko-KR" altLang="en-US" sz="1500" dirty="0" err="1">
+                <a:latin typeface="D2Coding" panose="020B0609020101020101" pitchFamily="49" charset="-127"/>
+                <a:ea typeface="D2Coding" panose="020B0609020101020101" pitchFamily="49" charset="-127"/>
+              </a:rPr>
+              <a:t>raw_scores</a:t>
+            </a:r>
+            <a:r>
+              <a:rPr lang="ko-KR" altLang="en-US" sz="1500" dirty="0">
+                <a:latin typeface="D2Coding" panose="020B0609020101020101" pitchFamily="49" charset="-127"/>
+                <a:ea typeface="D2Coding" panose="020B0609020101020101" pitchFamily="49" charset="-127"/>
+              </a:rPr>
+              <a:t>)</a:t>
+            </a:r>
+          </a:p>
+          <a:p>
+            <a:endParaRPr lang="ko-KR" altLang="en-US" sz="1500" dirty="0">
+              <a:latin typeface="D2Coding" panose="020B0609020101020101" pitchFamily="49" charset="-127"/>
+              <a:ea typeface="D2Coding" panose="020B0609020101020101" pitchFamily="49" charset="-127"/>
+            </a:endParaRPr>
+          </a:p>
+          <a:p>
+            <a:r>
+              <a:rPr lang="ko-KR" altLang="en-US" sz="1500" dirty="0">
+                <a:latin typeface="D2Coding" panose="020B0609020101020101" pitchFamily="49" charset="-127"/>
+                <a:ea typeface="D2Coding" panose="020B0609020101020101" pitchFamily="49" charset="-127"/>
+              </a:rPr>
+              <a:t># </a:t>
+            </a:r>
+            <a:r>
+              <a:rPr lang="en-US" altLang="ko-KR" sz="1500" dirty="0">
+                <a:latin typeface="D2Coding" panose="020B0609020101020101" pitchFamily="49" charset="-127"/>
+                <a:ea typeface="D2Coding" panose="020B0609020101020101" pitchFamily="49" charset="-127"/>
+              </a:rPr>
+              <a:t>3</a:t>
+            </a:r>
+            <a:r>
+              <a:rPr lang="ko-KR" altLang="en-US" sz="1500" dirty="0">
+                <a:latin typeface="D2Coding" panose="020B0609020101020101" pitchFamily="49" charset="-127"/>
+                <a:ea typeface="D2Coding" panose="020B0609020101020101" pitchFamily="49" charset="-127"/>
+              </a:rPr>
+              <a:t>. 최종 합산 (</a:t>
+            </a:r>
+            <a:r>
+              <a:rPr lang="ko-KR" altLang="en-US" sz="1500" dirty="0" err="1">
+                <a:latin typeface="D2Coding" panose="020B0609020101020101" pitchFamily="49" charset="-127"/>
+                <a:ea typeface="D2Coding" panose="020B0609020101020101" pitchFamily="49" charset="-127"/>
+              </a:rPr>
+              <a:t>Value를</a:t>
+            </a:r>
+            <a:r>
+              <a:rPr lang="ko-KR" altLang="en-US" sz="1500" dirty="0">
+                <a:latin typeface="D2Coding" panose="020B0609020101020101" pitchFamily="49" charset="-127"/>
+                <a:ea typeface="D2Coding" panose="020B0609020101020101" pitchFamily="49" charset="-127"/>
+              </a:rPr>
+              <a:t> 곱함)</a:t>
+            </a:r>
+          </a:p>
+          <a:p>
+            <a:r>
+              <a:rPr lang="ko-KR" altLang="en-US" sz="1500" dirty="0" err="1">
+                <a:latin typeface="D2Coding" panose="020B0609020101020101" pitchFamily="49" charset="-127"/>
+                <a:ea typeface="D2Coding" panose="020B0609020101020101" pitchFamily="49" charset="-127"/>
+              </a:rPr>
+              <a:t>combined</a:t>
+            </a:r>
+            <a:r>
+              <a:rPr lang="ko-KR" altLang="en-US" sz="1500" dirty="0">
+                <a:latin typeface="D2Coding" panose="020B0609020101020101" pitchFamily="49" charset="-127"/>
+                <a:ea typeface="D2Coding" panose="020B0609020101020101" pitchFamily="49" charset="-127"/>
+              </a:rPr>
+              <a:t> = </a:t>
+            </a:r>
+            <a:r>
+              <a:rPr lang="ko-KR" altLang="en-US" sz="1500" dirty="0" err="1">
+                <a:latin typeface="D2Coding" panose="020B0609020101020101" pitchFamily="49" charset="-127"/>
+                <a:ea typeface="D2Coding" panose="020B0609020101020101" pitchFamily="49" charset="-127"/>
+              </a:rPr>
+              <a:t>np.sum</a:t>
+            </a:r>
+            <a:r>
+              <a:rPr lang="ko-KR" altLang="en-US" sz="1500" dirty="0">
+                <a:latin typeface="D2Coding" panose="020B0609020101020101" pitchFamily="49" charset="-127"/>
+                <a:ea typeface="D2Coding" panose="020B0609020101020101" pitchFamily="49" charset="-127"/>
+              </a:rPr>
+              <a:t>(</a:t>
+            </a:r>
+            <a:r>
+              <a:rPr lang="ko-KR" altLang="en-US" sz="1500" dirty="0" err="1">
+                <a:latin typeface="D2Coding" panose="020B0609020101020101" pitchFamily="49" charset="-127"/>
+                <a:ea typeface="D2Coding" panose="020B0609020101020101" pitchFamily="49" charset="-127"/>
+              </a:rPr>
+              <a:t>attention_weights</a:t>
+            </a:r>
+            <a:r>
+              <a:rPr lang="ko-KR" altLang="en-US" sz="1500" dirty="0">
+                <a:latin typeface="D2Coding" panose="020B0609020101020101" pitchFamily="49" charset="-127"/>
+                <a:ea typeface="D2Coding" panose="020B0609020101020101" pitchFamily="49" charset="-127"/>
+              </a:rPr>
+              <a:t>[:, </a:t>
+            </a:r>
+            <a:r>
+              <a:rPr lang="ko-KR" altLang="en-US" sz="1500" dirty="0" err="1">
+                <a:latin typeface="D2Coding" panose="020B0609020101020101" pitchFamily="49" charset="-127"/>
+                <a:ea typeface="D2Coding" panose="020B0609020101020101" pitchFamily="49" charset="-127"/>
+              </a:rPr>
+              <a:t>np.newaxis</a:t>
+            </a:r>
+            <a:r>
+              <a:rPr lang="ko-KR" altLang="en-US" sz="1500" dirty="0">
+                <a:latin typeface="D2Coding" panose="020B0609020101020101" pitchFamily="49" charset="-127"/>
+                <a:ea typeface="D2Coding" panose="020B0609020101020101" pitchFamily="49" charset="-127"/>
+              </a:rPr>
+              <a:t>] * </a:t>
+            </a:r>
+            <a:r>
+              <a:rPr lang="ko-KR" altLang="en-US" sz="1500" dirty="0" err="1">
+                <a:latin typeface="D2Coding" panose="020B0609020101020101" pitchFamily="49" charset="-127"/>
+                <a:ea typeface="D2Coding" panose="020B0609020101020101" pitchFamily="49" charset="-127"/>
+              </a:rPr>
+              <a:t>values</a:t>
+            </a:r>
+            <a:r>
+              <a:rPr lang="ko-KR" altLang="en-US" sz="1500" dirty="0">
+                <a:latin typeface="D2Coding" panose="020B0609020101020101" pitchFamily="49" charset="-127"/>
+                <a:ea typeface="D2Coding" panose="020B0609020101020101" pitchFamily="49" charset="-127"/>
+              </a:rPr>
+              <a:t>, </a:t>
+            </a:r>
+            <a:r>
+              <a:rPr lang="ko-KR" altLang="en-US" sz="1500" dirty="0" err="1">
+                <a:latin typeface="D2Coding" panose="020B0609020101020101" pitchFamily="49" charset="-127"/>
+                <a:ea typeface="D2Coding" panose="020B0609020101020101" pitchFamily="49" charset="-127"/>
+              </a:rPr>
+              <a:t>axis</a:t>
+            </a:r>
+            <a:r>
+              <a:rPr lang="ko-KR" altLang="en-US" sz="1500" dirty="0">
+                <a:latin typeface="D2Coding" panose="020B0609020101020101" pitchFamily="49" charset="-127"/>
+                <a:ea typeface="D2Coding" panose="020B0609020101020101" pitchFamily="49" charset="-127"/>
+              </a:rPr>
+              <a:t>=0)</a:t>
+            </a:r>
+          </a:p>
+        </p:txBody>
+      </p:sp>
+      <p:sp>
+        <p:nvSpPr>
+          <p:cNvPr id="11" name="설명선: 선(강조선) 10">
+            <a:extLst>
+              <a:ext uri="{FF2B5EF4-FFF2-40B4-BE49-F238E27FC236}">
+                <a16:creationId xmlns:a16="http://schemas.microsoft.com/office/drawing/2014/main" id="{074597CC-5B92-16E9-A4E0-1E54945799A1}"/>
+              </a:ext>
+            </a:extLst>
+          </p:cNvPr>
+          <p:cNvSpPr/>
+          <p:nvPr/>
+        </p:nvSpPr>
+        <p:spPr>
+          <a:xfrm>
+            <a:off x="8975982" y="3133725"/>
+            <a:ext cx="2892167" cy="2819400"/>
+          </a:xfrm>
+          <a:prstGeom prst="accentCallout1">
+            <a:avLst>
+              <a:gd name="adj1" fmla="val 18750"/>
+              <a:gd name="adj2" fmla="val -8333"/>
+              <a:gd name="adj3" fmla="val 22237"/>
+              <a:gd name="adj4" fmla="val -13251"/>
+            </a:avLst>
+          </a:prstGeom>
+          <a:solidFill>
+            <a:schemeClr val="accent6">
+              <a:lumMod val="20000"/>
+              <a:lumOff val="80000"/>
+            </a:schemeClr>
+          </a:solidFill>
+        </p:spPr>
+        <p:style>
+          <a:lnRef idx="2">
+            <a:schemeClr val="accent1">
+              <a:shade val="15000"/>
+            </a:schemeClr>
+          </a:lnRef>
+          <a:fillRef idx="1">
+            <a:schemeClr val="accent1"/>
+          </a:fillRef>
+          <a:effectRef idx="0">
+            <a:schemeClr val="accent1"/>
+          </a:effectRef>
+          <a:fontRef idx="minor">
+            <a:schemeClr val="lt1"/>
+          </a:fontRef>
+        </p:style>
+        <p:txBody>
+          <a:bodyPr rtlCol="0" anchor="ctr"/>
+          <a:lstStyle/>
+          <a:p>
+            <a:pPr marL="171450" indent="-171450">
+              <a:buFont typeface="Wingdings" panose="05000000000000000000" pitchFamily="2" charset="2"/>
+              <a:buChar char="§"/>
+            </a:pPr>
+            <a:r>
+              <a:rPr lang="en-US" altLang="ko-KR" sz="1200" dirty="0">
+                <a:solidFill>
+                  <a:schemeClr val="tx1"/>
+                </a:solidFill>
+                <a:latin typeface="D2Coding" panose="020B0609020101020101" pitchFamily="49" charset="-127"/>
+                <a:ea typeface="D2Coding" panose="020B0609020101020101" pitchFamily="49" charset="-127"/>
+              </a:rPr>
+              <a:t>_Q</a:t>
+            </a:r>
+            <a:r>
+              <a:rPr lang="ko-KR" altLang="en-US" sz="1200" dirty="0">
+                <a:solidFill>
+                  <a:schemeClr val="tx1"/>
+                </a:solidFill>
+                <a:latin typeface="D2Coding" panose="020B0609020101020101" pitchFamily="49" charset="-127"/>
+                <a:ea typeface="D2Coding" panose="020B0609020101020101" pitchFamily="49" charset="-127"/>
+              </a:rPr>
+              <a:t>와 </a:t>
+            </a:r>
+            <a:r>
+              <a:rPr lang="en-US" altLang="ko-KR" sz="1200" dirty="0">
+                <a:solidFill>
+                  <a:schemeClr val="tx1"/>
+                </a:solidFill>
+                <a:latin typeface="D2Coding" panose="020B0609020101020101" pitchFamily="49" charset="-127"/>
+                <a:ea typeface="D2Coding" panose="020B0609020101020101" pitchFamily="49" charset="-127"/>
+              </a:rPr>
+              <a:t>W_K</a:t>
+            </a:r>
+            <a:r>
+              <a:rPr lang="ko-KR" altLang="en-US" sz="1200" dirty="0">
+                <a:solidFill>
+                  <a:schemeClr val="tx1"/>
+                </a:solidFill>
+                <a:latin typeface="D2Coding" panose="020B0609020101020101" pitchFamily="49" charset="-127"/>
+                <a:ea typeface="D2Coding" panose="020B0609020101020101" pitchFamily="49" charset="-127"/>
+              </a:rPr>
+              <a:t>라는 학습 가능한 파라미터</a:t>
+            </a:r>
+            <a:r>
+              <a:rPr lang="en-US" altLang="ko-KR" sz="1200" dirty="0">
+                <a:solidFill>
+                  <a:schemeClr val="tx1"/>
+                </a:solidFill>
+                <a:latin typeface="D2Coding" panose="020B0609020101020101" pitchFamily="49" charset="-127"/>
+                <a:ea typeface="D2Coding" panose="020B0609020101020101" pitchFamily="49" charset="-127"/>
+              </a:rPr>
+              <a:t>(</a:t>
+            </a:r>
+            <a:r>
+              <a:rPr lang="ko-KR" altLang="en-US" sz="1200" dirty="0">
+                <a:solidFill>
+                  <a:schemeClr val="tx1"/>
+                </a:solidFill>
+                <a:latin typeface="D2Coding" panose="020B0609020101020101" pitchFamily="49" charset="-127"/>
+                <a:ea typeface="D2Coding" panose="020B0609020101020101" pitchFamily="49" charset="-127"/>
+              </a:rPr>
+              <a:t>행렬</a:t>
+            </a:r>
+            <a:r>
+              <a:rPr lang="en-US" altLang="ko-KR" sz="1200" dirty="0">
+                <a:solidFill>
+                  <a:schemeClr val="tx1"/>
+                </a:solidFill>
+                <a:latin typeface="D2Coding" panose="020B0609020101020101" pitchFamily="49" charset="-127"/>
+                <a:ea typeface="D2Coding" panose="020B0609020101020101" pitchFamily="49" charset="-127"/>
+              </a:rPr>
+              <a:t>)</a:t>
+            </a:r>
+            <a:r>
+              <a:rPr lang="ko-KR" altLang="en-US" sz="1200" dirty="0">
+                <a:solidFill>
+                  <a:schemeClr val="tx1"/>
+                </a:solidFill>
+                <a:latin typeface="D2Coding" panose="020B0609020101020101" pitchFamily="49" charset="-127"/>
+                <a:ea typeface="D2Coding" panose="020B0609020101020101" pitchFamily="49" charset="-127"/>
+              </a:rPr>
+              <a:t>를 가정하고 행렬 </a:t>
+            </a:r>
+            <a:r>
+              <a:rPr lang="en-US" altLang="ko-KR" sz="1200" dirty="0">
+                <a:solidFill>
+                  <a:schemeClr val="tx1"/>
+                </a:solidFill>
+                <a:latin typeface="D2Coding" panose="020B0609020101020101" pitchFamily="49" charset="-127"/>
+                <a:ea typeface="D2Coding" panose="020B0609020101020101" pitchFamily="49" charset="-127"/>
+              </a:rPr>
+              <a:t>W</a:t>
+            </a:r>
+            <a:r>
+              <a:rPr lang="ko-KR" altLang="en-US" sz="1200" dirty="0">
+                <a:solidFill>
+                  <a:schemeClr val="tx1"/>
+                </a:solidFill>
+                <a:latin typeface="D2Coding" panose="020B0609020101020101" pitchFamily="49" charset="-127"/>
+                <a:ea typeface="D2Coding" panose="020B0609020101020101" pitchFamily="49" charset="-127"/>
+              </a:rPr>
+              <a:t>의 숫자가 </a:t>
+            </a:r>
+            <a:r>
+              <a:rPr lang="ko-KR" altLang="en-US" sz="1200" dirty="0" err="1">
+                <a:solidFill>
+                  <a:schemeClr val="tx1"/>
+                </a:solidFill>
+                <a:latin typeface="D2Coding" panose="020B0609020101020101" pitchFamily="49" charset="-127"/>
+                <a:ea typeface="D2Coding" panose="020B0609020101020101" pitchFamily="49" charset="-127"/>
+              </a:rPr>
+              <a:t>무엇이냐에</a:t>
+            </a:r>
+            <a:r>
+              <a:rPr lang="ko-KR" altLang="en-US" sz="1200" dirty="0">
+                <a:solidFill>
+                  <a:schemeClr val="tx1"/>
+                </a:solidFill>
+                <a:latin typeface="D2Coding" panose="020B0609020101020101" pitchFamily="49" charset="-127"/>
+                <a:ea typeface="D2Coding" panose="020B0609020101020101" pitchFamily="49" charset="-127"/>
+              </a:rPr>
+              <a:t> 따라 이 </a:t>
+            </a:r>
+            <a:r>
+              <a:rPr lang="ko-KR" altLang="en-US" sz="1200" dirty="0" err="1">
+                <a:solidFill>
+                  <a:schemeClr val="tx1"/>
+                </a:solidFill>
+                <a:latin typeface="D2Coding" panose="020B0609020101020101" pitchFamily="49" charset="-127"/>
+                <a:ea typeface="D2Coding" panose="020B0609020101020101" pitchFamily="49" charset="-127"/>
+              </a:rPr>
+              <a:t>어텐션</a:t>
+            </a:r>
+            <a:r>
+              <a:rPr lang="ko-KR" altLang="en-US" sz="1200" dirty="0">
+                <a:solidFill>
+                  <a:schemeClr val="tx1"/>
+                </a:solidFill>
+                <a:latin typeface="D2Coding" panose="020B0609020101020101" pitchFamily="49" charset="-127"/>
+                <a:ea typeface="D2Coding" panose="020B0609020101020101" pitchFamily="49" charset="-127"/>
+              </a:rPr>
+              <a:t> 모델은 데이터를 늘릴 수도</a:t>
+            </a:r>
+            <a:r>
+              <a:rPr lang="en-US" altLang="ko-KR" sz="1200" dirty="0">
+                <a:solidFill>
+                  <a:schemeClr val="tx1"/>
+                </a:solidFill>
+                <a:latin typeface="D2Coding" panose="020B0609020101020101" pitchFamily="49" charset="-127"/>
+                <a:ea typeface="D2Coding" panose="020B0609020101020101" pitchFamily="49" charset="-127"/>
+              </a:rPr>
+              <a:t>, </a:t>
+            </a:r>
+            <a:r>
+              <a:rPr lang="ko-KR" altLang="en-US" sz="1200" dirty="0">
+                <a:solidFill>
+                  <a:schemeClr val="tx1"/>
+                </a:solidFill>
+                <a:latin typeface="D2Coding" panose="020B0609020101020101" pitchFamily="49" charset="-127"/>
+                <a:ea typeface="D2Coding" panose="020B0609020101020101" pitchFamily="49" charset="-127"/>
+              </a:rPr>
+              <a:t>회전시킬 수도</a:t>
+            </a:r>
+            <a:r>
+              <a:rPr lang="en-US" altLang="ko-KR" sz="1200" dirty="0">
+                <a:solidFill>
+                  <a:schemeClr val="tx1"/>
+                </a:solidFill>
+                <a:latin typeface="D2Coding" panose="020B0609020101020101" pitchFamily="49" charset="-127"/>
+                <a:ea typeface="D2Coding" panose="020B0609020101020101" pitchFamily="49" charset="-127"/>
+              </a:rPr>
+              <a:t>, </a:t>
+            </a:r>
+            <a:r>
+              <a:rPr lang="ko-KR" altLang="en-US" sz="1200" dirty="0">
+                <a:solidFill>
+                  <a:schemeClr val="tx1"/>
+                </a:solidFill>
+                <a:latin typeface="D2Coding" panose="020B0609020101020101" pitchFamily="49" charset="-127"/>
+                <a:ea typeface="D2Coding" panose="020B0609020101020101" pitchFamily="49" charset="-127"/>
+              </a:rPr>
+              <a:t>특정 차원을 찌그러뜨릴 수도 </a:t>
+            </a:r>
+            <a:r>
+              <a:rPr lang="en-US" altLang="ko-KR" sz="1200" dirty="0">
+                <a:solidFill>
+                  <a:schemeClr val="tx1"/>
+                </a:solidFill>
+                <a:latin typeface="D2Coding" panose="020B0609020101020101" pitchFamily="49" charset="-127"/>
+                <a:ea typeface="D2Coding" panose="020B0609020101020101" pitchFamily="49" charset="-127"/>
+              </a:rPr>
+              <a:t>data</a:t>
+            </a:r>
+            <a:r>
+              <a:rPr lang="ko-KR" altLang="en-US" sz="1200" dirty="0">
+                <a:solidFill>
+                  <a:schemeClr val="tx1"/>
+                </a:solidFill>
+                <a:latin typeface="D2Coding" panose="020B0609020101020101" pitchFamily="49" charset="-127"/>
+                <a:ea typeface="D2Coding" panose="020B0609020101020101" pitchFamily="49" charset="-127"/>
+              </a:rPr>
+              <a:t> </a:t>
+            </a:r>
+            <a:r>
+              <a:rPr lang="en-US" altLang="ko-KR" sz="1200" dirty="0">
+                <a:solidFill>
+                  <a:schemeClr val="tx1"/>
+                </a:solidFill>
+                <a:latin typeface="D2Coding" panose="020B0609020101020101" pitchFamily="49" charset="-127"/>
+                <a:ea typeface="D2Coding" panose="020B0609020101020101" pitchFamily="49" charset="-127"/>
+              </a:rPr>
+              <a:t>representation</a:t>
+            </a:r>
+            <a:r>
+              <a:rPr lang="ko-KR" altLang="en-US" sz="1200" dirty="0">
+                <a:solidFill>
+                  <a:schemeClr val="tx1"/>
+                </a:solidFill>
+                <a:latin typeface="D2Coding" panose="020B0609020101020101" pitchFamily="49" charset="-127"/>
+                <a:ea typeface="D2Coding" panose="020B0609020101020101" pitchFamily="49" charset="-127"/>
+              </a:rPr>
+              <a:t>이 가능하게 되어</a:t>
+            </a:r>
+            <a:endParaRPr lang="en-US" altLang="ko-KR" sz="1200" dirty="0">
+              <a:solidFill>
+                <a:schemeClr val="tx1"/>
+              </a:solidFill>
+              <a:latin typeface="D2Coding" panose="020B0609020101020101" pitchFamily="49" charset="-127"/>
+              <a:ea typeface="D2Coding" panose="020B0609020101020101" pitchFamily="49" charset="-127"/>
+            </a:endParaRPr>
+          </a:p>
+          <a:p>
+            <a:pPr marL="285750" indent="-285750">
+              <a:buFont typeface="Wingdings" panose="05000000000000000000" pitchFamily="2" charset="2"/>
+              <a:buChar char="§"/>
+            </a:pPr>
+            <a:endParaRPr lang="en-US" altLang="ko-KR" dirty="0">
+              <a:latin typeface="D2Coding" panose="020B0609020101020101" pitchFamily="49" charset="-127"/>
+              <a:ea typeface="D2Coding" panose="020B0609020101020101" pitchFamily="49" charset="-127"/>
+            </a:endParaRPr>
+          </a:p>
+          <a:p>
+            <a:pPr marL="171450" indent="-171450">
+              <a:buFont typeface="Wingdings" panose="05000000000000000000" pitchFamily="2" charset="2"/>
+              <a:buChar char="§"/>
+            </a:pPr>
+            <a:r>
+              <a:rPr lang="ko-KR" altLang="en-US" sz="1200" dirty="0">
+                <a:solidFill>
+                  <a:schemeClr val="tx1"/>
+                </a:solidFill>
+                <a:latin typeface="D2Coding" panose="020B0609020101020101" pitchFamily="49" charset="-127"/>
+                <a:ea typeface="D2Coding" panose="020B0609020101020101" pitchFamily="49" charset="-127"/>
+              </a:rPr>
+              <a:t>즉</a:t>
+            </a:r>
+            <a:r>
+              <a:rPr lang="en-US" altLang="ko-KR" sz="1200" dirty="0">
+                <a:solidFill>
+                  <a:schemeClr val="tx1"/>
+                </a:solidFill>
+                <a:latin typeface="D2Coding" panose="020B0609020101020101" pitchFamily="49" charset="-127"/>
+                <a:ea typeface="D2Coding" panose="020B0609020101020101" pitchFamily="49" charset="-127"/>
+              </a:rPr>
+              <a:t>, </a:t>
+            </a:r>
+            <a:r>
+              <a:rPr lang="ko-KR" altLang="en-US" sz="1200" dirty="0">
+                <a:solidFill>
+                  <a:schemeClr val="tx1"/>
+                </a:solidFill>
+                <a:latin typeface="D2Coding" panose="020B0609020101020101" pitchFamily="49" charset="-127"/>
+                <a:ea typeface="D2Coding" panose="020B0609020101020101" pitchFamily="49" charset="-127"/>
+              </a:rPr>
+              <a:t>모델이 학습을 통해 표현할 수 있는 관계성의 가짓수</a:t>
+            </a:r>
+            <a:r>
+              <a:rPr lang="en-US" altLang="ko-KR" sz="1200" dirty="0">
+                <a:solidFill>
+                  <a:schemeClr val="tx1"/>
+                </a:solidFill>
+                <a:latin typeface="D2Coding" panose="020B0609020101020101" pitchFamily="49" charset="-127"/>
+                <a:ea typeface="D2Coding" panose="020B0609020101020101" pitchFamily="49" charset="-127"/>
+              </a:rPr>
+              <a:t>(</a:t>
+            </a:r>
+            <a:r>
+              <a:rPr lang="ko-KR" altLang="en-US" sz="1200" dirty="0">
+                <a:solidFill>
+                  <a:schemeClr val="tx1"/>
+                </a:solidFill>
+                <a:latin typeface="D2Coding" panose="020B0609020101020101" pitchFamily="49" charset="-127"/>
+                <a:ea typeface="D2Coding" panose="020B0609020101020101" pitchFamily="49" charset="-127"/>
+              </a:rPr>
+              <a:t>함수의 후보들</a:t>
+            </a:r>
+            <a:r>
+              <a:rPr lang="en-US" altLang="ko-KR" sz="1200" dirty="0">
+                <a:solidFill>
+                  <a:schemeClr val="tx1"/>
+                </a:solidFill>
+                <a:latin typeface="D2Coding" panose="020B0609020101020101" pitchFamily="49" charset="-127"/>
+                <a:ea typeface="D2Coding" panose="020B0609020101020101" pitchFamily="49" charset="-127"/>
+              </a:rPr>
+              <a:t>)</a:t>
+            </a:r>
+            <a:r>
+              <a:rPr lang="ko-KR" altLang="en-US" sz="1200" dirty="0">
+                <a:solidFill>
+                  <a:schemeClr val="tx1"/>
+                </a:solidFill>
+                <a:latin typeface="D2Coding" panose="020B0609020101020101" pitchFamily="49" charset="-127"/>
+                <a:ea typeface="D2Coding" panose="020B0609020101020101" pitchFamily="49" charset="-127"/>
+              </a:rPr>
+              <a:t>가 수억</a:t>
+            </a:r>
+            <a:r>
+              <a:rPr lang="en-US" altLang="ko-KR" sz="1200" dirty="0">
+                <a:solidFill>
+                  <a:schemeClr val="tx1"/>
+                </a:solidFill>
+                <a:latin typeface="D2Coding" panose="020B0609020101020101" pitchFamily="49" charset="-127"/>
+                <a:ea typeface="D2Coding" panose="020B0609020101020101" pitchFamily="49" charset="-127"/>
+              </a:rPr>
+              <a:t>, </a:t>
+            </a:r>
+            <a:r>
+              <a:rPr lang="ko-KR" altLang="en-US" sz="1200" dirty="0">
+                <a:solidFill>
+                  <a:schemeClr val="tx1"/>
+                </a:solidFill>
+                <a:latin typeface="D2Coding" panose="020B0609020101020101" pitchFamily="49" charset="-127"/>
+                <a:ea typeface="D2Coding" panose="020B0609020101020101" pitchFamily="49" charset="-127"/>
+              </a:rPr>
+              <a:t>수조 개로 늘어난 것입니다</a:t>
+            </a:r>
+            <a:r>
+              <a:rPr lang="en-US" altLang="ko-KR" sz="1200" dirty="0">
+                <a:solidFill>
+                  <a:schemeClr val="tx1"/>
+                </a:solidFill>
+                <a:latin typeface="D2Coding" panose="020B0609020101020101" pitchFamily="49" charset="-127"/>
+                <a:ea typeface="D2Coding" panose="020B0609020101020101" pitchFamily="49" charset="-127"/>
+              </a:rPr>
+              <a:t>. </a:t>
+            </a:r>
+            <a:r>
+              <a:rPr lang="ko-KR" altLang="en-US" sz="1200" dirty="0">
+                <a:solidFill>
+                  <a:schemeClr val="tx1"/>
+                </a:solidFill>
+                <a:latin typeface="D2Coding" panose="020B0609020101020101" pitchFamily="49" charset="-127"/>
+                <a:ea typeface="D2Coding" panose="020B0609020101020101" pitchFamily="49" charset="-127"/>
+              </a:rPr>
+              <a:t>이것은 </a:t>
+            </a:r>
+            <a:r>
+              <a:rPr lang="en-US" altLang="ko-KR" sz="1200" dirty="0">
+                <a:solidFill>
+                  <a:schemeClr val="tx1"/>
+                </a:solidFill>
+                <a:latin typeface="D2Coding" panose="020B0609020101020101" pitchFamily="49" charset="-127"/>
+                <a:ea typeface="D2Coding" panose="020B0609020101020101" pitchFamily="49" charset="-127"/>
+              </a:rPr>
+              <a:t>"</a:t>
+            </a:r>
+            <a:r>
+              <a:rPr lang="ko-KR" altLang="en-US" sz="1200" dirty="0">
+                <a:solidFill>
+                  <a:schemeClr val="tx1"/>
+                </a:solidFill>
+                <a:latin typeface="D2Coding" panose="020B0609020101020101" pitchFamily="49" charset="-127"/>
+                <a:ea typeface="D2Coding" panose="020B0609020101020101" pitchFamily="49" charset="-127"/>
+              </a:rPr>
+              <a:t>가설 공간을 훨씬 더 풍부하게 만들어 줌</a:t>
+            </a:r>
+          </a:p>
+        </p:txBody>
+      </p:sp>
+      <p:sp>
+        <p:nvSpPr>
+          <p:cNvPr id="12" name="설명선: 선(강조선) 11">
+            <a:extLst>
+              <a:ext uri="{FF2B5EF4-FFF2-40B4-BE49-F238E27FC236}">
+                <a16:creationId xmlns:a16="http://schemas.microsoft.com/office/drawing/2014/main" id="{57B4367C-8247-34B9-0338-40B441E54151}"/>
+              </a:ext>
+            </a:extLst>
+          </p:cNvPr>
+          <p:cNvSpPr/>
+          <p:nvPr/>
+        </p:nvSpPr>
+        <p:spPr>
+          <a:xfrm>
+            <a:off x="9680832" y="1383864"/>
+            <a:ext cx="2082544" cy="1246495"/>
+          </a:xfrm>
+          <a:prstGeom prst="accentCallout1">
+            <a:avLst>
+              <a:gd name="adj1" fmla="val 18750"/>
+              <a:gd name="adj2" fmla="val -8333"/>
+              <a:gd name="adj3" fmla="val 24529"/>
+              <a:gd name="adj4" fmla="val -19654"/>
+            </a:avLst>
+          </a:prstGeom>
+          <a:solidFill>
+            <a:schemeClr val="accent6">
+              <a:lumMod val="20000"/>
+              <a:lumOff val="80000"/>
+            </a:schemeClr>
+          </a:solidFill>
+        </p:spPr>
+        <p:style>
+          <a:lnRef idx="2">
+            <a:schemeClr val="accent1">
+              <a:shade val="15000"/>
+            </a:schemeClr>
+          </a:lnRef>
+          <a:fillRef idx="1">
+            <a:schemeClr val="accent1"/>
+          </a:fillRef>
+          <a:effectRef idx="0">
+            <a:schemeClr val="accent1"/>
+          </a:effectRef>
+          <a:fontRef idx="minor">
+            <a:schemeClr val="lt1"/>
+          </a:fontRef>
+        </p:style>
+        <p:txBody>
+          <a:bodyPr rtlCol="0" anchor="ctr"/>
+          <a:lstStyle/>
+          <a:p>
+            <a:pPr marL="171450" indent="-171450">
+              <a:buFont typeface="Wingdings" panose="05000000000000000000" pitchFamily="2" charset="2"/>
+              <a:buChar char="§"/>
+            </a:pPr>
+            <a:r>
+              <a:rPr lang="ko-KR" altLang="en-US" sz="1200" dirty="0">
+                <a:solidFill>
+                  <a:schemeClr val="tx1"/>
+                </a:solidFill>
+                <a:latin typeface="D2Coding" panose="020B0609020101020101" pitchFamily="49" charset="-127"/>
+                <a:ea typeface="D2Coding" panose="020B0609020101020101" pitchFamily="49" charset="-127"/>
+              </a:rPr>
+              <a:t>고정된 </a:t>
+            </a:r>
+            <a:r>
+              <a:rPr lang="ko-KR" altLang="en-US" sz="1200" dirty="0" err="1">
+                <a:solidFill>
+                  <a:schemeClr val="tx1"/>
+                </a:solidFill>
+                <a:latin typeface="D2Coding" panose="020B0609020101020101" pitchFamily="49" charset="-127"/>
+                <a:ea typeface="D2Coding" panose="020B0609020101020101" pitchFamily="49" charset="-127"/>
+              </a:rPr>
+              <a:t>임베딩이</a:t>
+            </a:r>
+            <a:r>
+              <a:rPr lang="ko-KR" altLang="en-US" sz="1200" dirty="0">
+                <a:solidFill>
+                  <a:schemeClr val="tx1"/>
+                </a:solidFill>
+                <a:latin typeface="D2Coding" panose="020B0609020101020101" pitchFamily="49" charset="-127"/>
+                <a:ea typeface="D2Coding" panose="020B0609020101020101" pitchFamily="49" charset="-127"/>
+              </a:rPr>
+              <a:t> 약점</a:t>
+            </a:r>
+            <a:r>
+              <a:rPr lang="en-US" altLang="ko-KR" sz="1200" dirty="0">
+                <a:solidFill>
+                  <a:schemeClr val="tx1"/>
+                </a:solidFill>
+                <a:latin typeface="D2Coding" panose="020B0609020101020101" pitchFamily="49" charset="-127"/>
+                <a:ea typeface="D2Coding" panose="020B0609020101020101" pitchFamily="49" charset="-127"/>
+              </a:rPr>
+              <a:t>, apple</a:t>
+            </a:r>
+            <a:r>
+              <a:rPr lang="ko-KR" altLang="en-US" sz="1200" dirty="0">
+                <a:solidFill>
+                  <a:schemeClr val="tx1"/>
+                </a:solidFill>
+                <a:latin typeface="D2Coding" panose="020B0609020101020101" pitchFamily="49" charset="-127"/>
+                <a:ea typeface="D2Coding" panose="020B0609020101020101" pitchFamily="49" charset="-127"/>
+              </a:rPr>
+              <a:t>이 </a:t>
+            </a:r>
+            <a:r>
+              <a:rPr lang="en-US" altLang="ko-KR" sz="1200" dirty="0">
+                <a:solidFill>
+                  <a:schemeClr val="tx1"/>
+                </a:solidFill>
+                <a:latin typeface="D2Coding" panose="020B0609020101020101" pitchFamily="49" charset="-127"/>
+                <a:ea typeface="D2Coding" panose="020B0609020101020101" pitchFamily="49" charset="-127"/>
+              </a:rPr>
+              <a:t>target</a:t>
+            </a:r>
+            <a:r>
+              <a:rPr lang="ko-KR" altLang="en-US" sz="1200" dirty="0">
+                <a:solidFill>
+                  <a:schemeClr val="tx1"/>
+                </a:solidFill>
+                <a:latin typeface="D2Coding" panose="020B0609020101020101" pitchFamily="49" charset="-127"/>
+                <a:ea typeface="D2Coding" panose="020B0609020101020101" pitchFamily="49" charset="-127"/>
+              </a:rPr>
+              <a:t>인 경우에도 </a:t>
+            </a:r>
+            <a:r>
+              <a:rPr lang="en-US" altLang="ko-KR" sz="1200" dirty="0">
+                <a:solidFill>
+                  <a:schemeClr val="tx1"/>
+                </a:solidFill>
+                <a:latin typeface="D2Coding" panose="020B0609020101020101" pitchFamily="49" charset="-127"/>
+                <a:ea typeface="D2Coding" panose="020B0609020101020101" pitchFamily="49" charset="-127"/>
+              </a:rPr>
+              <a:t>sources</a:t>
+            </a:r>
+            <a:r>
+              <a:rPr lang="ko-KR" altLang="en-US" sz="1200" dirty="0">
+                <a:solidFill>
+                  <a:schemeClr val="tx1"/>
+                </a:solidFill>
+                <a:latin typeface="D2Coding" panose="020B0609020101020101" pitchFamily="49" charset="-127"/>
+                <a:ea typeface="D2Coding" panose="020B0609020101020101" pitchFamily="49" charset="-127"/>
+              </a:rPr>
+              <a:t>에 </a:t>
+            </a:r>
+            <a:r>
+              <a:rPr lang="ko-KR" altLang="en-US" sz="1200" dirty="0" err="1">
+                <a:solidFill>
+                  <a:schemeClr val="tx1"/>
+                </a:solidFill>
+                <a:latin typeface="D2Coding" panose="020B0609020101020101" pitchFamily="49" charset="-127"/>
+                <a:ea typeface="D2Coding" panose="020B0609020101020101" pitchFamily="49" charset="-127"/>
+              </a:rPr>
+              <a:t>맥킨토시나</a:t>
+            </a:r>
+            <a:r>
+              <a:rPr lang="en-US" altLang="ko-KR" sz="1200" dirty="0">
+                <a:solidFill>
+                  <a:schemeClr val="tx1"/>
+                </a:solidFill>
+                <a:latin typeface="D2Coding" panose="020B0609020101020101" pitchFamily="49" charset="-127"/>
+                <a:ea typeface="D2Coding" panose="020B0609020101020101" pitchFamily="49" charset="-127"/>
+              </a:rPr>
+              <a:t>, </a:t>
+            </a:r>
+            <a:r>
+              <a:rPr lang="ko-KR" altLang="en-US" sz="1200" dirty="0">
+                <a:solidFill>
+                  <a:schemeClr val="tx1"/>
+                </a:solidFill>
+                <a:latin typeface="D2Coding" panose="020B0609020101020101" pitchFamily="49" charset="-127"/>
+                <a:ea typeface="D2Coding" panose="020B0609020101020101" pitchFamily="49" charset="-127"/>
+              </a:rPr>
+              <a:t>아이폰 등과 같은 단어와 연관성을 찾기 </a:t>
+            </a:r>
+            <a:r>
+              <a:rPr lang="ko-KR" altLang="en-US" sz="1200" dirty="0" err="1">
+                <a:solidFill>
+                  <a:schemeClr val="tx1"/>
+                </a:solidFill>
+                <a:latin typeface="D2Coding" panose="020B0609020101020101" pitchFamily="49" charset="-127"/>
+                <a:ea typeface="D2Coding" panose="020B0609020101020101" pitchFamily="49" charset="-127"/>
+              </a:rPr>
+              <a:t>힘등</a:t>
+            </a:r>
+            <a:endParaRPr lang="ko-KR" altLang="en-US" sz="1200" dirty="0">
+              <a:solidFill>
+                <a:schemeClr val="tx1"/>
+              </a:solidFill>
+              <a:latin typeface="D2Coding" panose="020B0609020101020101" pitchFamily="49" charset="-127"/>
+              <a:ea typeface="D2Coding" panose="020B0609020101020101" pitchFamily="49" charset="-127"/>
+            </a:endParaRPr>
+          </a:p>
+        </p:txBody>
+      </p:sp>
+      <p:sp>
+        <p:nvSpPr>
+          <p:cNvPr id="13" name="화살표: 아래쪽 12">
+            <a:extLst>
+              <a:ext uri="{FF2B5EF4-FFF2-40B4-BE49-F238E27FC236}">
+                <a16:creationId xmlns:a16="http://schemas.microsoft.com/office/drawing/2014/main" id="{D2CE9684-F397-CE45-DA5F-7FA117778FB7}"/>
+              </a:ext>
+            </a:extLst>
+          </p:cNvPr>
+          <p:cNvSpPr/>
+          <p:nvPr/>
+        </p:nvSpPr>
+        <p:spPr>
+          <a:xfrm>
+            <a:off x="3495676" y="2765801"/>
+            <a:ext cx="571499" cy="491749"/>
+          </a:xfrm>
+          <a:prstGeom prst="downArrow">
+            <a:avLst>
+              <a:gd name="adj1" fmla="val 52391"/>
+              <a:gd name="adj2" fmla="val 50000"/>
+            </a:avLst>
+          </a:prstGeom>
+        </p:spPr>
+        <p:style>
+          <a:lnRef idx="2">
+            <a:schemeClr val="accent1">
+              <a:shade val="15000"/>
+            </a:schemeClr>
+          </a:lnRef>
+          <a:fillRef idx="1">
+            <a:schemeClr val="accent1"/>
+          </a:fillRef>
+          <a:effectRef idx="0">
+            <a:schemeClr val="accent1"/>
+          </a:effectRef>
+          <a:fontRef idx="minor">
+            <a:schemeClr val="lt1"/>
+          </a:fontRef>
+        </p:style>
+        <p:txBody>
+          <a:bodyPr rtlCol="0" anchor="ctr"/>
+          <a:lstStyle/>
+          <a:p>
+            <a:pPr algn="ctr"/>
+            <a:endParaRPr lang="ko-KR" altLang="en-US"/>
+          </a:p>
+        </p:txBody>
+      </p:sp>
+      <p:sp>
+        <p:nvSpPr>
+          <p:cNvPr id="2" name="슬라이드 번호 개체 틀 3">
+            <a:extLst>
+              <a:ext uri="{FF2B5EF4-FFF2-40B4-BE49-F238E27FC236}">
+                <a16:creationId xmlns:a16="http://schemas.microsoft.com/office/drawing/2014/main" id="{FBD3113B-CEE3-3AB2-CA62-3B7E2CA67ECB}"/>
+              </a:ext>
+            </a:extLst>
+          </p:cNvPr>
+          <p:cNvSpPr txBox="1">
+            <a:spLocks/>
+          </p:cNvSpPr>
+          <p:nvPr/>
+        </p:nvSpPr>
+        <p:spPr>
+          <a:xfrm>
+            <a:off x="11123611" y="299420"/>
+            <a:ext cx="753545" cy="365125"/>
+          </a:xfrm>
+          <a:prstGeom prst="rect">
+            <a:avLst/>
+          </a:prstGeom>
+        </p:spPr>
+        <p:txBody>
+          <a:bodyPr vert="horz" lIns="91440" tIns="45720" rIns="91440" bIns="45720" rtlCol="0" anchor="ctr"/>
+          <a:lstStyle>
+            <a:defPPr rtl="0">
+              <a:defRPr lang="ko-KR"/>
+            </a:defPPr>
+            <a:lvl1pPr marL="0" algn="r" defTabSz="914400" rtl="0" eaLnBrk="1" latinLnBrk="0" hangingPunct="1">
+              <a:defRPr sz="1200" kern="1200" baseline="0">
+                <a:solidFill>
+                  <a:schemeClr val="tx1">
+                    <a:lumMod val="65000"/>
+                    <a:lumOff val="35000"/>
+                  </a:schemeClr>
+                </a:solidFill>
+                <a:latin typeface="맑은 고딕" panose="020B0503020000020004" pitchFamily="50" charset="-127"/>
+                <a:ea typeface="맑은 고딕" panose="020B0503020000020004" pitchFamily="50" charset="-127"/>
+                <a:cs typeface="+mn-cs"/>
+              </a:defRPr>
+            </a:lvl1pPr>
+            <a:lvl2pPr marL="457200" algn="l" defTabSz="914400" rtl="0" eaLnBrk="1" latinLnBrk="0" hangingPunct="1">
+              <a:defRPr sz="1800" kern="1200">
+                <a:solidFill>
+                  <a:schemeClr val="tx1"/>
+                </a:solidFill>
+                <a:latin typeface="+mn-lt"/>
+                <a:ea typeface="+mn-ea"/>
+                <a:cs typeface="+mn-cs"/>
+              </a:defRPr>
+            </a:lvl2pPr>
+            <a:lvl3pPr marL="914400" algn="l" defTabSz="914400" rtl="0" eaLnBrk="1" latinLnBrk="0" hangingPunct="1">
+              <a:defRPr sz="1800" kern="1200">
+                <a:solidFill>
+                  <a:schemeClr val="tx1"/>
+                </a:solidFill>
+                <a:latin typeface="+mn-lt"/>
+                <a:ea typeface="+mn-ea"/>
+                <a:cs typeface="+mn-cs"/>
+              </a:defRPr>
+            </a:lvl3pPr>
+            <a:lvl4pPr marL="1371600" algn="l" defTabSz="914400" rtl="0" eaLnBrk="1" latinLnBrk="0" hangingPunct="1">
+              <a:defRPr sz="1800" kern="1200">
+                <a:solidFill>
+                  <a:schemeClr val="tx1"/>
+                </a:solidFill>
+                <a:latin typeface="+mn-lt"/>
+                <a:ea typeface="+mn-ea"/>
+                <a:cs typeface="+mn-cs"/>
+              </a:defRPr>
+            </a:lvl4pPr>
+            <a:lvl5pPr marL="1828800" algn="l" defTabSz="914400" rtl="0" eaLnBrk="1" latinLnBrk="0" hangingPunct="1">
+              <a:defRPr sz="1800" kern="1200">
+                <a:solidFill>
+                  <a:schemeClr val="tx1"/>
+                </a:solidFill>
+                <a:latin typeface="+mn-lt"/>
+                <a:ea typeface="+mn-ea"/>
+                <a:cs typeface="+mn-cs"/>
+              </a:defRPr>
+            </a:lvl5pPr>
+            <a:lvl6pPr marL="2286000" algn="l" defTabSz="914400" rtl="0" eaLnBrk="1" latinLnBrk="0" hangingPunct="1">
+              <a:defRPr sz="1800" kern="1200">
+                <a:solidFill>
+                  <a:schemeClr val="tx1"/>
+                </a:solidFill>
+                <a:latin typeface="+mn-lt"/>
+                <a:ea typeface="+mn-ea"/>
+                <a:cs typeface="+mn-cs"/>
+              </a:defRPr>
+            </a:lvl6pPr>
+            <a:lvl7pPr marL="2743200" algn="l" defTabSz="914400" rtl="0" eaLnBrk="1" latinLnBrk="0" hangingPunct="1">
+              <a:defRPr sz="1800" kern="1200">
+                <a:solidFill>
+                  <a:schemeClr val="tx1"/>
+                </a:solidFill>
+                <a:latin typeface="+mn-lt"/>
+                <a:ea typeface="+mn-ea"/>
+                <a:cs typeface="+mn-cs"/>
+              </a:defRPr>
+            </a:lvl7pPr>
+            <a:lvl8pPr marL="3200400" algn="l" defTabSz="914400" rtl="0" eaLnBrk="1" latinLnBrk="0" hangingPunct="1">
+              <a:defRPr sz="1800" kern="1200">
+                <a:solidFill>
+                  <a:schemeClr val="tx1"/>
+                </a:solidFill>
+                <a:latin typeface="+mn-lt"/>
+                <a:ea typeface="+mn-ea"/>
+                <a:cs typeface="+mn-cs"/>
+              </a:defRPr>
+            </a:lvl8pPr>
+            <a:lvl9pPr marL="3657600" algn="l" defTabSz="914400" rtl="0" eaLnBrk="1" latinLnBrk="0" hangingPunct="1">
+              <a:defRPr sz="1800" kern="1200">
+                <a:solidFill>
+                  <a:schemeClr val="tx1"/>
+                </a:solidFill>
+                <a:latin typeface="+mn-lt"/>
+                <a:ea typeface="+mn-ea"/>
+                <a:cs typeface="+mn-cs"/>
+              </a:defRPr>
+            </a:lvl9pPr>
+          </a:lstStyle>
+          <a:p>
+            <a:fld id="{D57F1E4F-1CFF-5643-939E-217C01CDF565}" type="slidenum">
+              <a:rPr lang="en-US" sz="1400" b="1" smtClean="0">
+                <a:latin typeface="D2Coding" panose="020B0609020101020101" pitchFamily="49" charset="-127"/>
+                <a:ea typeface="D2Coding" panose="020B0609020101020101" pitchFamily="49" charset="-127"/>
+              </a:rPr>
+              <a:pPr/>
+              <a:t>30</a:t>
+            </a:fld>
+            <a:endParaRPr lang="en-US" sz="1400" b="1" dirty="0">
+              <a:latin typeface="D2Coding" panose="020B0609020101020101" pitchFamily="49" charset="-127"/>
+              <a:ea typeface="D2Coding" panose="020B0609020101020101" pitchFamily="49" charset="-127"/>
+            </a:endParaRPr>
+          </a:p>
+        </p:txBody>
+      </p:sp>
+    </p:spTree>
+    <p:extLst>
+      <p:ext uri="{BB962C8B-B14F-4D97-AF65-F5344CB8AC3E}">
+        <p14:creationId xmlns:p14="http://schemas.microsoft.com/office/powerpoint/2010/main" val="3644008806"/>
+      </p:ext>
+    </p:extLst>
+  </p:cSld>
+  <p:clrMapOvr>
+    <a:masterClrMapping/>
+  </p:clrMapOvr>
+</p:sld>
+</file>
+
+<file path=ppt/slides/slide31.xml><?xml version="1.0" encoding="utf-8"?>
 <p:sld xmlns:a="http://schemas.openxmlformats.org/drawingml/2006/main" xmlns:r="http://schemas.openxmlformats.org/officeDocument/2006/relationships" xmlns:p="http://schemas.openxmlformats.org/presentationml/2006/main">
   <p:cSld>
     <p:spTree>
@@ -32145,7 +32304,7 @@
                 <a:ea typeface="D2Coding" panose="020B0609020101020101" pitchFamily="49" charset="-127"/>
               </a:rPr>
               <a:pPr/>
-              <a:t>30</a:t>
+              <a:t>31</a:t>
             </a:fld>
             <a:endParaRPr lang="en-US" sz="1400" b="1" dirty="0">
               <a:latin typeface="D2Coding" panose="020B0609020101020101" pitchFamily="49" charset="-127"/>
@@ -32167,7 +32326,7 @@
 </p:sld>
 </file>
 
-<file path=ppt/slides/slide31.xml><?xml version="1.0" encoding="utf-8"?>
+<file path=ppt/slides/slide32.xml><?xml version="1.0" encoding="utf-8"?>
 <p:sld xmlns:a="http://schemas.openxmlformats.org/drawingml/2006/main" xmlns:r="http://schemas.openxmlformats.org/officeDocument/2006/relationships" xmlns:p="http://schemas.openxmlformats.org/presentationml/2006/main">
   <p:cSld>
     <p:spTree>
@@ -33490,7 +33649,7 @@
                 <a:ea typeface="D2Coding" panose="020B0609020101020101" pitchFamily="49" charset="-127"/>
               </a:rPr>
               <a:pPr/>
-              <a:t>31</a:t>
+              <a:t>32</a:t>
             </a:fld>
             <a:endParaRPr lang="en-US" sz="1400" b="1" dirty="0">
               <a:latin typeface="D2Coding" panose="020B0609020101020101" pitchFamily="49" charset="-127"/>
@@ -33512,7 +33671,7 @@
 </p:sld>
 </file>
 
-<file path=ppt/slides/slide32.xml><?xml version="1.0" encoding="utf-8"?>
+<file path=ppt/slides/slide33.xml><?xml version="1.0" encoding="utf-8"?>
 <p:sld xmlns:a="http://schemas.openxmlformats.org/drawingml/2006/main" xmlns:r="http://schemas.openxmlformats.org/officeDocument/2006/relationships" xmlns:p="http://schemas.openxmlformats.org/presentationml/2006/main">
   <p:cSld>
     <p:spTree>
@@ -33723,7 +33882,7 @@
                 <a:ea typeface="D2Coding" panose="020B0609020101020101" pitchFamily="49" charset="-127"/>
               </a:rPr>
               <a:pPr/>
-              <a:t>32</a:t>
+              <a:t>33</a:t>
             </a:fld>
             <a:endParaRPr lang="en-US" sz="1400" b="1" dirty="0">
               <a:latin typeface="D2Coding" panose="020B0609020101020101" pitchFamily="49" charset="-127"/>
@@ -35111,7 +35270,7 @@
 </p:sld>
 </file>
 
-<file path=ppt/slides/slide33.xml><?xml version="1.0" encoding="utf-8"?>
+<file path=ppt/slides/slide34.xml><?xml version="1.0" encoding="utf-8"?>
 <p:sld xmlns:a="http://schemas.openxmlformats.org/drawingml/2006/main" xmlns:r="http://schemas.openxmlformats.org/officeDocument/2006/relationships" xmlns:p="http://schemas.openxmlformats.org/presentationml/2006/main">
   <p:cSld>
     <p:spTree>
@@ -35326,7 +35485,7 @@
                 <a:ea typeface="D2Coding" panose="020B0609020101020101" pitchFamily="49" charset="-127"/>
               </a:rPr>
               <a:pPr/>
-              <a:t>33</a:t>
+              <a:t>34</a:t>
             </a:fld>
             <a:endParaRPr lang="en-US" sz="1400" b="1" dirty="0">
               <a:latin typeface="D2Coding" panose="020B0609020101020101" pitchFamily="49" charset="-127"/>
@@ -35765,7 +35924,7 @@
 </p:sld>
 </file>
 
-<file path=ppt/slides/slide34.xml><?xml version="1.0" encoding="utf-8"?>
+<file path=ppt/slides/slide35.xml><?xml version="1.0" encoding="utf-8"?>
 <p:sld xmlns:a="http://schemas.openxmlformats.org/drawingml/2006/main" xmlns:r="http://schemas.openxmlformats.org/officeDocument/2006/relationships" xmlns:p="http://schemas.openxmlformats.org/presentationml/2006/main">
   <p:cSld>
     <p:spTree>
@@ -36519,7 +36678,7 @@
                 <a:ea typeface="D2Coding" panose="020B0609020101020101" pitchFamily="49" charset="-127"/>
               </a:rPr>
               <a:pPr/>
-              <a:t>34</a:t>
+              <a:t>35</a:t>
             </a:fld>
             <a:endParaRPr lang="en-US" sz="1400" b="1" dirty="0">
               <a:latin typeface="D2Coding" panose="020B0609020101020101" pitchFamily="49" charset="-127"/>
@@ -36647,7 +36806,7 @@
 </p:sld>
 </file>
 
-<file path=ppt/slides/slide35.xml><?xml version="1.0" encoding="utf-8"?>
+<file path=ppt/slides/slide36.xml><?xml version="1.0" encoding="utf-8"?>
 <p:sld xmlns:a="http://schemas.openxmlformats.org/drawingml/2006/main" xmlns:r="http://schemas.openxmlformats.org/officeDocument/2006/relationships" xmlns:p="http://schemas.openxmlformats.org/presentationml/2006/main">
   <p:cSld>
     <p:spTree>
@@ -37761,7 +37920,7 @@
                 <a:ea typeface="D2Coding" panose="020B0609020101020101" pitchFamily="49" charset="-127"/>
               </a:rPr>
               <a:pPr/>
-              <a:t>35</a:t>
+              <a:t>36</a:t>
             </a:fld>
             <a:endParaRPr lang="en-US" sz="1400" b="1" dirty="0">
               <a:latin typeface="D2Coding" panose="020B0609020101020101" pitchFamily="49" charset="-127"/>
@@ -37783,7 +37942,7 @@
 </p:sld>
 </file>
 
-<file path=ppt/slides/slide36.xml><?xml version="1.0" encoding="utf-8"?>
+<file path=ppt/slides/slide37.xml><?xml version="1.0" encoding="utf-8"?>
 <p:sld xmlns:a="http://schemas.openxmlformats.org/drawingml/2006/main" xmlns:r="http://schemas.openxmlformats.org/officeDocument/2006/relationships" xmlns:p="http://schemas.openxmlformats.org/presentationml/2006/main">
   <p:cSld>
     <p:spTree>
@@ -38502,7 +38661,7 @@
                 <a:ea typeface="D2Coding" panose="020B0609020101020101" pitchFamily="49" charset="-127"/>
               </a:rPr>
               <a:pPr/>
-              <a:t>36</a:t>
+              <a:t>37</a:t>
             </a:fld>
             <a:endParaRPr lang="en-US" sz="1400" b="1" dirty="0">
               <a:latin typeface="D2Coding" panose="020B0609020101020101" pitchFamily="49" charset="-127"/>
@@ -38524,7 +38683,7 @@
 </p:sld>
 </file>
 
-<file path=ppt/slides/slide37.xml><?xml version="1.0" encoding="utf-8"?>
+<file path=ppt/slides/slide38.xml><?xml version="1.0" encoding="utf-8"?>
 <p:sld xmlns:a="http://schemas.openxmlformats.org/drawingml/2006/main" xmlns:r="http://schemas.openxmlformats.org/officeDocument/2006/relationships" xmlns:p="http://schemas.openxmlformats.org/presentationml/2006/main">
   <p:cSld>
     <p:spTree>
@@ -38782,7 +38941,7 @@
                 <a:ea typeface="D2Coding" panose="020B0609020101020101" pitchFamily="49" charset="-127"/>
               </a:rPr>
               <a:pPr/>
-              <a:t>37</a:t>
+              <a:t>38</a:t>
             </a:fld>
             <a:endParaRPr lang="en-US" sz="1400" b="1" dirty="0">
               <a:latin typeface="D2Coding" panose="020B0609020101020101" pitchFamily="49" charset="-127"/>
@@ -38877,15 +39036,8 @@
           <a:p>
             <a:pPr algn="l"/>
             <a:r>
-              <a:rPr lang="en-US" altLang="ko-KR" sz="2800" cap="none" dirty="0">
-                <a:solidFill>
-                  <a:schemeClr val="bg2">
-                    <a:lumMod val="25000"/>
-                  </a:schemeClr>
-                </a:solidFill>
-                <a:latin typeface="D2Coding" panose="020B0609020101020101" pitchFamily="49" charset="-127"/>
-                <a:ea typeface="D2Coding" panose="020B0609020101020101" pitchFamily="49" charset="-127"/>
-                <a:cs typeface="Segoe UI Light" panose="020B0502040204020203" pitchFamily="34" charset="0"/>
+              <a:rPr lang="en-US" altLang="ko-KR" sz="2800" b="1" cap="none" dirty="0">
+                <a:latin typeface="Lora" pitchFamily="2" charset="0"/>
               </a:rPr>
               <a:t>The language model</a:t>
             </a:r>
@@ -39708,17 +39860,34 @@
           <a:p>
             <a:pPr algn="l"/>
             <a:r>
-              <a:rPr lang="en-US" altLang="ko-KR" sz="2800" cap="none" dirty="0">
-                <a:solidFill>
-                  <a:schemeClr val="bg2">
-                    <a:lumMod val="25000"/>
-                  </a:schemeClr>
-                </a:solidFill>
-                <a:latin typeface="D2Coding" panose="020B0609020101020101" pitchFamily="49" charset="-127"/>
-                <a:ea typeface="D2Coding" panose="020B0609020101020101" pitchFamily="49" charset="-127"/>
-                <a:cs typeface="Segoe UI Light" panose="020B0502040204020203" pitchFamily="34" charset="0"/>
-              </a:rPr>
-              <a:t>The language model</a:t>
+              <a:rPr lang="en-US" altLang="ko-KR" sz="2800" b="1" cap="none" dirty="0">
+                <a:latin typeface="Lora" pitchFamily="2" charset="0"/>
+              </a:rPr>
+              <a:t>The conditional</a:t>
+            </a:r>
+            <a:r>
+              <a:rPr lang="ko-KR" altLang="en-US" sz="2800" b="1" cap="none" dirty="0">
+                <a:latin typeface="Lora" pitchFamily="2" charset="0"/>
+              </a:rPr>
+              <a:t> </a:t>
+            </a:r>
+            <a:r>
+              <a:rPr lang="en-US" altLang="ko-KR" sz="2800" b="1" cap="none" dirty="0">
+                <a:latin typeface="Lora" pitchFamily="2" charset="0"/>
+              </a:rPr>
+              <a:t>probability</a:t>
+            </a:r>
+            <a:r>
+              <a:rPr lang="ko-KR" altLang="en-US" sz="2800" b="1" cap="none" dirty="0">
+                <a:latin typeface="Lora" pitchFamily="2" charset="0"/>
+              </a:rPr>
+              <a:t> </a:t>
+            </a:r>
+            <a:r>
+              <a:rPr lang="en-US" altLang="ko-KR" sz="2800" b="1" cap="none" dirty="0">
+                <a:latin typeface="Lora" pitchFamily="2" charset="0"/>
+              </a:rPr>
+              <a:t>language model</a:t>
             </a:r>
           </a:p>
         </p:txBody>
@@ -40517,7 +40686,7 @@
               <a:rPr lang="en-US" altLang="ko-KR" sz="2800" b="1" cap="none" dirty="0">
                 <a:latin typeface="Lora" pitchFamily="2" charset="0"/>
               </a:rPr>
-              <a:t>Generating Shakespeare</a:t>
+              <a:t>How to train and generate Shakespeare</a:t>
             </a:r>
             <a:endParaRPr lang="en-US" altLang="ko-KR" sz="2800" cap="none" dirty="0">
               <a:solidFill>
@@ -41196,15 +41365,8 @@
           <a:p>
             <a:pPr algn="l"/>
             <a:r>
-              <a:rPr lang="en-US" altLang="ko-KR" sz="2800" cap="none" dirty="0">
-                <a:solidFill>
-                  <a:schemeClr val="bg2">
-                    <a:lumMod val="25000"/>
-                  </a:schemeClr>
-                </a:solidFill>
-                <a:latin typeface="D2Coding" panose="020B0609020101020101" pitchFamily="49" charset="-127"/>
-                <a:ea typeface="D2Coding" panose="020B0609020101020101" pitchFamily="49" charset="-127"/>
-                <a:cs typeface="Segoe UI Light" panose="020B0502040204020203" pitchFamily="34" charset="0"/>
+              <a:rPr lang="en-US" altLang="ko-KR" sz="2800" b="1" cap="none" dirty="0">
+                <a:latin typeface="Lora" pitchFamily="2" charset="0"/>
               </a:rPr>
               <a:t>Training a Shakespeare language model</a:t>
             </a:r>
@@ -41966,7 +42128,7 @@
               <a:rPr lang="en-US" altLang="ko-KR" sz="2800" b="1" cap="none" dirty="0">
                 <a:latin typeface="Lora" pitchFamily="2" charset="0"/>
               </a:rPr>
-              <a:t>Generating Shakespeare</a:t>
+              <a:t>Generating novel like Shakespeare</a:t>
             </a:r>
             <a:endParaRPr lang="en-US" altLang="ko-KR" sz="2800" cap="none" dirty="0">
               <a:solidFill>
